--- a/presentations/14-kids-sound-and-share/14-kids-sound-and-share-lab.pptx
+++ b/presentations/14-kids-sound-and-share/14-kids-sound-and-share-lab.pptx
@@ -35,9 +35,10 @@
     <p:sldId id="283" r:id="rId29"/>
     <p:sldId id="284" r:id="rId30"/>
     <p:sldId id="285" r:id="rId31"/>
+    <p:sldId id="286" r:id="rId32"/>
   </p:sldIdLst>
   <p:notesMasterIdLst>
-    <p:notesMasterId r:id="rId32"/>
+    <p:notesMasterId r:id="rId33"/>
   </p:notesMasterIdLst>
   <p:sldSz cx="12192000" cy="6858000"/>
   <p:notesSz cx="6858000" cy="12192000"/>
@@ -136,7 +137,7 @@
   <p:extLst>
     <p:ext uri="{521415D9-36F7-43E2-AB2F-B90AF26B5E84}">
       <p14:sectionLst xmlns:p14="http://schemas.microsoft.com/office/powerpoint/2010/main">
-        <p14:section name="Opening" id="{b228efd5-bb78-976d-99b6-f1bb1efece9b}">
+        <p14:section name="Opening" id="{e0462330-72d4-128f-2f3c-f4af6f6a25d7}">
           <p14:sldIdLst>
             <p14:sldId id="256"/>
             <p14:sldId id="257"/>
@@ -144,7 +145,7 @@
             <p14:sldId id="259"/>
           </p14:sldIdLst>
         </p14:section>
-        <p14:section name="Mission 4" id="{9718444c-0004-6079-4c58-fb7eca457e4d}">
+        <p14:section name="Mission 4" id="{d8aa0ff5-4975-ff63-96fd-05e45fd03584}">
           <p14:sldIdLst>
             <p14:sldId id="260"/>
             <p14:sldId id="261"/>
@@ -153,7 +154,7 @@
             <p14:sldId id="264"/>
           </p14:sldIdLst>
         </p14:section>
-        <p14:section name="The Music Pad" id="{f5f0c4a2-fc0c-faa7-f975-e4aa3c0d9e81}">
+        <p14:section name="The Music Pad" id="{ba191fe7-09c6-b6cf-e209-6a64035599cf}">
           <p14:sldIdLst>
             <p14:sldId id="265"/>
             <p14:sldId id="266"/>
@@ -163,35 +164,36 @@
             <p14:sldId id="270"/>
             <p14:sldId id="271"/>
             <p14:sldId id="272"/>
+            <p14:sldId id="273"/>
           </p14:sldIdLst>
         </p14:section>
-        <p14:section name="Sprite Lab" id="{fa1df299-7e45-747e-bf32-60e205cc966e}">
+        <p14:section name="Sprite Lab" id="{6de503a2-72c9-3f77-2dcc-888abd6eb306}">
           <p14:sldIdLst>
-            <p14:sldId id="273"/>
             <p14:sldId id="274"/>
             <p14:sldId id="275"/>
+            <p14:sldId id="276"/>
           </p14:sldIdLst>
         </p14:section>
-        <p14:section name="Peek at the C" id="{8d0262b2-77cf-d891-ac4b-d15e8048a720}">
+        <p14:section name="Peek at the C" id="{69cbf986-9f12-b6a8-1942-8d102ff8b259}">
           <p14:sldIdLst>
-            <p14:sldId id="276"/>
             <p14:sldId id="277"/>
             <p14:sldId id="278"/>
+            <p14:sldId id="279"/>
           </p14:sldIdLst>
         </p14:section>
-        <p14:section name="Mission 5" id="{e312a2a9-3c6e-170d-c888-024c67c67f62}">
+        <p14:section name="Mission 5" id="{3798cfde-cd42-55e9-3b9d-80773bc28563}">
           <p14:sldIdLst>
-            <p14:sldId id="279"/>
             <p14:sldId id="280"/>
             <p14:sldId id="281"/>
             <p14:sldId id="282"/>
             <p14:sldId id="283"/>
             <p14:sldId id="284"/>
+            <p14:sldId id="285"/>
           </p14:sldIdLst>
         </p14:section>
-        <p14:section name="Closing" id="{f7005354-d871-55f9-8020-ca4ae7d997b4}">
+        <p14:section name="Closing" id="{b5a3a44b-146e-4e8d-6ce2-d4f18f73e269}">
           <p14:sldIdLst>
-            <p14:sldId id="285"/>
+            <p14:sldId id="286"/>
           </p14:sldIdLst>
         </p14:section>
       </p14:sectionLst>
@@ -1918,7 +1920,7 @@
           <a:p>
             <a:r>
               <a:rPr lang="en-US" dirty="0"/>
-              <a:t>Answer: B. += means add to.</a:t>
+              <a:t/>
             </a:r>
             <a:endParaRPr lang="en-US" dirty="0"/>
           </a:p>
@@ -2006,7 +2008,7 @@
           <a:p>
             <a:r>
               <a:rPr lang="en-US" dirty="0"/>
-              <a:t/>
+              <a:t>Answer: B. += means add to.</a:t>
             </a:r>
             <a:endParaRPr lang="en-US" dirty="0"/>
           </a:p>
@@ -2646,6 +2648,94 @@
             <a:fld id="{F7021451-1387-4CA6-816F-3879F97B5CBC}" type="slidenum">
               <a:rPr lang="en-US"/>
               <a:t>30</a:t>
+            </a:fld>
+            <a:endParaRPr lang="en-US"/>
+          </a:p>
+        </p:txBody>
+      </p:sp>
+    </p:spTree>
+    <p:extLst>
+      <p:ext uri="{BB962C8B-B14F-4D97-AF65-F5344CB8AC3E}">
+        <p14:creationId xmlns:p14="http://schemas.microsoft.com/office/powerpoint/2010/main" val="1024086991"/>
+      </p:ext>
+    </p:extLst>
+  </p:cSld>
+  <p:clrMapOvr>
+    <a:masterClrMapping/>
+  </p:clrMapOvr>
+</p:notes>
+</file>
+
+<file path=ppt/notesSlides/notesSlide31.xml><?xml version="1.0" encoding="utf-8"?>
+<p:notes xmlns:a="http://schemas.openxmlformats.org/drawingml/2006/main" xmlns:r="http://schemas.openxmlformats.org/officeDocument/2006/relationships" xmlns:p="http://schemas.openxmlformats.org/presentationml/2006/main">
+  <p:cSld>
+    <p:spTree>
+      <p:nvGrpSpPr>
+        <p:cNvPr id="1" name=""/>
+        <p:cNvGrpSpPr/>
+        <p:nvPr/>
+      </p:nvGrpSpPr>
+      <p:grpSpPr>
+        <a:xfrm>
+          <a:off x="0" y="0"/>
+          <a:ext cx="0" cy="0"/>
+          <a:chOff x="0" y="0"/>
+          <a:chExt cx="0" cy="0"/>
+        </a:xfrm>
+      </p:grpSpPr>
+      <p:sp>
+        <p:nvSpPr>
+          <p:cNvPr id="2" name="Slide Image Placeholder 1"/>
+          <p:cNvSpPr>
+            <a:spLocks noGrp="1" noRot="1" noChangeAspect="1"/>
+          </p:cNvSpPr>
+          <p:nvPr>
+            <p:ph type="sldImg"/>
+          </p:nvPr>
+        </p:nvSpPr>
+        <p:spPr/>
+      </p:sp>
+      <p:sp>
+        <p:nvSpPr>
+          <p:cNvPr id="3" name="Notes Placeholder 2"/>
+          <p:cNvSpPr>
+            <a:spLocks noGrp="1"/>
+          </p:cNvSpPr>
+          <p:nvPr>
+            <p:ph type="body" idx="1"/>
+          </p:nvPr>
+        </p:nvSpPr>
+        <p:spPr/>
+        <p:txBody>
+          <a:bodyPr/>
+          <a:lstStyle/>
+          <a:p>
+            <a:r>
+              <a:rPr lang="en-US" dirty="0"/>
+              <a:t/>
+            </a:r>
+            <a:endParaRPr lang="en-US" dirty="0"/>
+          </a:p>
+        </p:txBody>
+      </p:sp>
+      <p:sp>
+        <p:nvSpPr>
+          <p:cNvPr id="4" name="Slide Number Placeholder 3"/>
+          <p:cNvSpPr>
+            <a:spLocks noGrp="1"/>
+          </p:cNvSpPr>
+          <p:nvPr>
+            <p:ph type="sldNum" sz="quarter" idx="10"/>
+          </p:nvPr>
+        </p:nvSpPr>
+        <p:spPr/>
+        <p:txBody>
+          <a:bodyPr/>
+          <a:lstStyle/>
+          <a:p>
+            <a:fld id="{F7021451-1387-4CA6-816F-3879F97B5CBC}" type="slidenum">
+              <a:rPr lang="en-US"/>
+              <a:t>31</a:t>
             </a:fld>
             <a:endParaRPr lang="en-US"/>
           </a:p>
@@ -4716,12 +4806,12 @@
         </p:nvSpPr>
         <p:spPr>
           <a:xfrm>
-            <a:off x="8092440" y="2834640"/>
-            <a:ext cx="3550615" cy="3383280"/>
+            <a:off x="8092440" y="2788920"/>
+            <a:ext cx="3550615" cy="3429000"/>
           </a:xfrm>
           <a:prstGeom prst="roundRect">
             <a:avLst>
-              <a:gd name="adj" fmla="val 2162"/>
+              <a:gd name="adj" fmla="val 2133"/>
             </a:avLst>
           </a:prstGeom>
           <a:solidFill>
@@ -4743,8 +4833,8 @@
         </p:nvSpPr>
         <p:spPr>
           <a:xfrm>
-            <a:off x="8321040" y="2971800"/>
-            <a:ext cx="3093415" cy="365760"/>
+            <a:off x="8321040" y="2880360"/>
+            <a:ext cx="3093415" cy="310896"/>
           </a:xfrm>
           <a:prstGeom prst="rect">
             <a:avLst/>
@@ -4760,7 +4850,7 @@
               <a:buNone/>
             </a:pPr>
             <a:r>
-              <a:rPr lang="en-US" sz="1500" b="1" dirty="0">
+              <a:rPr lang="en-US" sz="1400" b="1" dirty="0">
                 <a:solidFill>
                   <a:srgbClr val="2F7D4F"/>
                 </a:solidFill>
@@ -4770,7 +4860,7 @@
               </a:rPr>
               <a:t>You should see</a:t>
             </a:r>
-            <a:endParaRPr lang="en-US" sz="1500" dirty="0"/>
+            <a:endParaRPr lang="en-US" sz="1400" dirty="0"/>
           </a:p>
         </p:txBody>
       </p:sp>
@@ -4782,8 +4872,8 @@
         </p:nvSpPr>
         <p:spPr>
           <a:xfrm>
-            <a:off x="8321040" y="3429000"/>
-            <a:ext cx="3093415" cy="2606040"/>
+            <a:off x="8321040" y="3246120"/>
+            <a:ext cx="3093415" cy="2862072"/>
           </a:xfrm>
           <a:prstGeom prst="rect">
             <a:avLst/>
@@ -5940,12 +6030,12 @@
         </p:nvSpPr>
         <p:spPr>
           <a:xfrm>
-            <a:off x="8092440" y="2834640"/>
-            <a:ext cx="3550615" cy="3383280"/>
+            <a:off x="8092440" y="2788920"/>
+            <a:ext cx="3550615" cy="3429000"/>
           </a:xfrm>
           <a:prstGeom prst="roundRect">
             <a:avLst>
-              <a:gd name="adj" fmla="val 2162"/>
+              <a:gd name="adj" fmla="val 2133"/>
             </a:avLst>
           </a:prstGeom>
           <a:solidFill>
@@ -5967,8 +6057,8 @@
         </p:nvSpPr>
         <p:spPr>
           <a:xfrm>
-            <a:off x="8321040" y="2971800"/>
-            <a:ext cx="3093415" cy="365760"/>
+            <a:off x="8321040" y="2880360"/>
+            <a:ext cx="3093415" cy="310896"/>
           </a:xfrm>
           <a:prstGeom prst="rect">
             <a:avLst/>
@@ -5984,7 +6074,7 @@
               <a:buNone/>
             </a:pPr>
             <a:r>
-              <a:rPr lang="en-US" sz="1500" b="1" dirty="0">
+              <a:rPr lang="en-US" sz="1400" b="1" dirty="0">
                 <a:solidFill>
                   <a:srgbClr val="2F7D4F"/>
                 </a:solidFill>
@@ -5994,7 +6084,7 @@
               </a:rPr>
               <a:t>You should see</a:t>
             </a:r>
-            <a:endParaRPr lang="en-US" sz="1500" dirty="0"/>
+            <a:endParaRPr lang="en-US" sz="1400" dirty="0"/>
           </a:p>
         </p:txBody>
       </p:sp>
@@ -6006,8 +6096,8 @@
         </p:nvSpPr>
         <p:spPr>
           <a:xfrm>
-            <a:off x="8321040" y="3429000"/>
-            <a:ext cx="3093415" cy="2606040"/>
+            <a:off x="8321040" y="3246120"/>
+            <a:ext cx="3093415" cy="2862072"/>
           </a:xfrm>
           <a:prstGeom prst="rect">
             <a:avLst/>
@@ -7297,12 +7387,12 @@
         </p:nvSpPr>
         <p:spPr>
           <a:xfrm>
-            <a:off x="8092440" y="2834640"/>
-            <a:ext cx="3550615" cy="3383280"/>
+            <a:off x="8092440" y="2788920"/>
+            <a:ext cx="3550615" cy="3429000"/>
           </a:xfrm>
           <a:prstGeom prst="roundRect">
             <a:avLst>
-              <a:gd name="adj" fmla="val 2162"/>
+              <a:gd name="adj" fmla="val 2133"/>
             </a:avLst>
           </a:prstGeom>
           <a:solidFill>
@@ -7324,8 +7414,8 @@
         </p:nvSpPr>
         <p:spPr>
           <a:xfrm>
-            <a:off x="8321040" y="2971800"/>
-            <a:ext cx="3093415" cy="365760"/>
+            <a:off x="8321040" y="2880360"/>
+            <a:ext cx="3093415" cy="310896"/>
           </a:xfrm>
           <a:prstGeom prst="rect">
             <a:avLst/>
@@ -7341,7 +7431,7 @@
               <a:buNone/>
             </a:pPr>
             <a:r>
-              <a:rPr lang="en-US" sz="1500" b="1" dirty="0">
+              <a:rPr lang="en-US" sz="1400" b="1" dirty="0">
                 <a:solidFill>
                   <a:srgbClr val="2F7D4F"/>
                 </a:solidFill>
@@ -7351,7 +7441,7 @@
               </a:rPr>
               <a:t>You should see</a:t>
             </a:r>
-            <a:endParaRPr lang="en-US" sz="1500" dirty="0"/>
+            <a:endParaRPr lang="en-US" sz="1400" dirty="0"/>
           </a:p>
         </p:txBody>
       </p:sp>
@@ -7363,8 +7453,8 @@
         </p:nvSpPr>
         <p:spPr>
           <a:xfrm>
-            <a:off x="8321040" y="3429000"/>
-            <a:ext cx="3093415" cy="2606040"/>
+            <a:off x="8321040" y="3246120"/>
+            <a:ext cx="3093415" cy="2862072"/>
           </a:xfrm>
           <a:prstGeom prst="rect">
             <a:avLst/>
@@ -7502,197 +7592,46 @@
                 <a:ea typeface="Cambria" pitchFamily="34" charset="-122"/>
                 <a:cs typeface="Cambria" pitchFamily="34" charset="-120"/>
               </a:rPr>
-              <a:t>Playing UP</a:t>
+              <a:t>The Music Pad, for real</a:t>
             </a:r>
             <a:endParaRPr lang="en-US" sz="3000" dirty="0"/>
           </a:p>
         </p:txBody>
       </p:sp>
-      <p:sp>
-        <p:nvSpPr>
-          <p:cNvPr id="3" name="Shape 1"/>
-          <p:cNvSpPr/>
-          <p:nvPr/>
-        </p:nvSpPr>
-        <p:spPr>
-          <a:xfrm>
-            <a:off x="475488" y="1938528"/>
-            <a:ext cx="5998464" cy="3803904"/>
-          </a:xfrm>
-          <a:prstGeom prst="rect">
-            <a:avLst/>
-          </a:prstGeom>
-          <a:solidFill>
-            <a:srgbClr val="2E4A62"/>
-          </a:solidFill>
-          <a:ln w="12700">
-            <a:solidFill>
-              <a:srgbClr val="2E4A62"/>
-            </a:solidFill>
-            <a:prstDash val="solid"/>
-          </a:ln>
-        </p:spPr>
-      </p:sp>
-      <p:sp>
-        <p:nvSpPr>
-          <p:cNvPr id="4" name="Shape 2"/>
-          <p:cNvSpPr/>
-          <p:nvPr/>
-        </p:nvSpPr>
-        <p:spPr>
-          <a:xfrm>
-            <a:off x="548640" y="2011680"/>
-            <a:ext cx="5852160" cy="3657600"/>
-          </a:xfrm>
-          <a:prstGeom prst="rect">
-            <a:avLst/>
-          </a:prstGeom>
-          <a:solidFill>
-            <a:srgbClr val="000000"/>
-          </a:solidFill>
-          <a:ln w="12700">
-            <a:solidFill>
-              <a:srgbClr val="000000"/>
-            </a:solidFill>
-            <a:prstDash val="solid"/>
-          </a:ln>
-        </p:spPr>
-      </p:sp>
-      <p:sp>
-        <p:nvSpPr>
-          <p:cNvPr id="5" name="Shape 3"/>
-          <p:cNvSpPr/>
-          <p:nvPr/>
-        </p:nvSpPr>
-        <p:spPr>
-          <a:xfrm>
-            <a:off x="1280160" y="3474720"/>
-            <a:ext cx="877824" cy="877824"/>
-          </a:xfrm>
-          <a:prstGeom prst="rect">
-            <a:avLst/>
-          </a:prstGeom>
-          <a:solidFill>
-            <a:srgbClr val="0000F8"/>
-          </a:solidFill>
-          <a:ln w="12700">
-            <a:solidFill>
-              <a:srgbClr val="0000F8"/>
-            </a:solidFill>
-            <a:prstDash val="solid"/>
-          </a:ln>
-        </p:spPr>
-      </p:sp>
-      <p:sp>
-        <p:nvSpPr>
-          <p:cNvPr id="6" name="Shape 4"/>
-          <p:cNvSpPr/>
-          <p:nvPr/>
-        </p:nvSpPr>
-        <p:spPr>
-          <a:xfrm>
-            <a:off x="2450592" y="3474720"/>
-            <a:ext cx="877824" cy="877824"/>
-          </a:xfrm>
-          <a:prstGeom prst="rect">
-            <a:avLst/>
-          </a:prstGeom>
-          <a:solidFill>
-            <a:srgbClr val="00FC00"/>
-          </a:solidFill>
-          <a:ln w="12700">
-            <a:solidFill>
-              <a:srgbClr val="00FC00"/>
-            </a:solidFill>
-            <a:prstDash val="solid"/>
-          </a:ln>
-        </p:spPr>
-      </p:sp>
-      <p:sp>
-        <p:nvSpPr>
-          <p:cNvPr id="7" name="Shape 5"/>
-          <p:cNvSpPr/>
-          <p:nvPr/>
-        </p:nvSpPr>
-        <p:spPr>
-          <a:xfrm>
-            <a:off x="3621024" y="3474720"/>
-            <a:ext cx="877824" cy="877824"/>
-          </a:xfrm>
-          <a:prstGeom prst="rect">
-            <a:avLst/>
-          </a:prstGeom>
-          <a:solidFill>
-            <a:srgbClr val="F80000"/>
-          </a:solidFill>
-          <a:ln w="12700">
-            <a:solidFill>
-              <a:srgbClr val="F80000"/>
-            </a:solidFill>
-            <a:prstDash val="solid"/>
-          </a:ln>
-        </p:spPr>
-      </p:sp>
-      <p:sp>
-        <p:nvSpPr>
-          <p:cNvPr id="8" name="Shape 6"/>
-          <p:cNvSpPr/>
-          <p:nvPr/>
-        </p:nvSpPr>
-        <p:spPr>
-          <a:xfrm>
-            <a:off x="4791456" y="3474720"/>
-            <a:ext cx="877824" cy="877824"/>
-          </a:xfrm>
-          <a:prstGeom prst="rect">
-            <a:avLst/>
-          </a:prstGeom>
-          <a:solidFill>
-            <a:srgbClr val="F800F8"/>
-          </a:solidFill>
-          <a:ln w="12700">
-            <a:solidFill>
-              <a:srgbClr val="F800F8"/>
-            </a:solidFill>
-            <a:prstDash val="solid"/>
-          </a:ln>
-        </p:spPr>
-      </p:sp>
-      <p:sp>
-        <p:nvSpPr>
-          <p:cNvPr id="9" name="Shape 7"/>
-          <p:cNvSpPr/>
-          <p:nvPr/>
-        </p:nvSpPr>
-        <p:spPr>
-          <a:xfrm>
-            <a:off x="2450592" y="4498848"/>
-            <a:ext cx="877824" cy="109728"/>
-          </a:xfrm>
-          <a:prstGeom prst="rect">
-            <a:avLst/>
-          </a:prstGeom>
-          <a:solidFill>
-            <a:srgbClr val="FFFFFF"/>
-          </a:solidFill>
-          <a:ln w="12700">
-            <a:solidFill>
-              <a:srgbClr val="FFFFFF"/>
-            </a:solidFill>
-            <a:prstDash val="solid"/>
-          </a:ln>
-        </p:spPr>
-      </p:sp>
-      <p:sp>
-        <p:nvSpPr>
-          <p:cNvPr id="10" name="Text 8"/>
-          <p:cNvSpPr txBox="1"/>
-          <p:nvPr/>
-        </p:nvSpPr>
-        <p:spPr>
-          <a:xfrm>
-            <a:off x="548640" y="5779008"/>
-            <a:ext cx="5852160" cy="274320"/>
+      <p:pic>
+        <p:nvPicPr>
+          <p:cNvPr id="3" name="Image 0" descr="UP held: the white bar is under the green pad">    </p:cNvPr>
+          <p:cNvPicPr>
+            <a:picLocks noChangeAspect="1"/>
+          </p:cNvPicPr>
+          <p:nvPr/>
+        </p:nvPicPr>
+        <p:blipFill>
+          <a:blip r:embed="rId1"/>
+          <a:stretch>
+            <a:fillRect/>
+          </a:stretch>
+        </p:blipFill>
+        <p:spPr>
+          <a:xfrm>
+            <a:off x="2804008" y="1463040"/>
+            <a:ext cx="6583680" cy="4114800"/>
+          </a:xfrm>
+          <a:prstGeom prst="rect">
+            <a:avLst/>
+          </a:prstGeom>
+        </p:spPr>
+      </p:pic>
+      <p:sp>
+        <p:nvSpPr>
+          <p:cNvPr id="4" name="Text 1"/>
+          <p:cNvSpPr txBox="1"/>
+          <p:nvPr/>
+        </p:nvSpPr>
+        <p:spPr>
+          <a:xfrm>
+            <a:off x="548640" y="5715000"/>
+            <a:ext cx="11094415" cy="457200"/>
           </a:xfrm>
           <a:prstGeom prst="rect">
             <a:avLst/>
@@ -7704,11 +7643,11 @@
           <a:bodyPr wrap="square" lIns="0" tIns="0" rIns="0" bIns="0" rtlCol="0" anchor="t"/>
           <a:lstStyle/>
           <a:p>
-            <a:pPr indent="0" marL="0">
-              <a:buNone/>
-            </a:pPr>
-            <a:r>
-              <a:rPr lang="en-US" sz="1100" i="1" dirty="0">
+            <a:pPr algn="ctr" indent="0" marL="0">
+              <a:buNone/>
+            </a:pPr>
+            <a:r>
+              <a:rPr lang="en-US" sz="1400" i="1" dirty="0">
                 <a:solidFill>
                   <a:srgbClr val="5B6B78"/>
                 </a:solidFill>
@@ -7716,267 +7655,9 @@
                 <a:ea typeface="Calibri" pitchFamily="34" charset="-122"/>
                 <a:cs typeface="Calibri" pitchFamily="34" charset="-120"/>
               </a:rPr>
-              <a:t>320 x 200 game viewport</a:t>
-            </a:r>
-            <a:endParaRPr lang="en-US" sz="1100" dirty="0"/>
-          </a:p>
-        </p:txBody>
-      </p:sp>
-      <p:sp>
-        <p:nvSpPr>
-          <p:cNvPr id="11" name="Text 9"/>
-          <p:cNvSpPr txBox="1"/>
-          <p:nvPr/>
-        </p:nvSpPr>
-        <p:spPr>
-          <a:xfrm>
-            <a:off x="6858000" y="1481328"/>
-            <a:ext cx="457200" cy="457200"/>
-          </a:xfrm>
-          <a:prstGeom prst="roundRect">
-            <a:avLst>
-              <a:gd name="adj" fmla="val 16000"/>
-            </a:avLst>
-          </a:prstGeom>
-          <a:solidFill>
-            <a:srgbClr val="6B4FA0"/>
-          </a:solidFill>
-          <a:ln>
-            <a:solidFill>
-              <a:srgbClr val="6B4FA0"/>
-            </a:solidFill>
-          </a:ln>
-        </p:spPr>
-        <p:txBody>
-          <a:bodyPr wrap="square" lIns="0" tIns="0" rIns="0" bIns="0" rtlCol="0" anchor="ctr"/>
-          <a:lstStyle/>
-          <a:p>
-            <a:pPr algn="ctr" indent="0" marL="0">
-              <a:buNone/>
-            </a:pPr>
-            <a:r>
-              <a:rPr lang="en-US" sz="1700" b="1" dirty="0">
-                <a:solidFill>
-                  <a:srgbClr val="FFFFFF"/>
-                </a:solidFill>
-                <a:latin typeface="Calibri" pitchFamily="34" charset="0"/>
-                <a:ea typeface="Calibri" pitchFamily="34" charset="-122"/>
-                <a:cs typeface="Calibri" pitchFamily="34" charset="-120"/>
-              </a:rPr>
-              <a:t>1</a:t>
-            </a:r>
-            <a:endParaRPr lang="en-US" sz="1700" dirty="0"/>
-          </a:p>
-        </p:txBody>
-      </p:sp>
-      <p:sp>
-        <p:nvSpPr>
-          <p:cNvPr id="12" name="Text 10"/>
-          <p:cNvSpPr txBox="1"/>
-          <p:nvPr/>
-        </p:nvSpPr>
-        <p:spPr>
-          <a:xfrm>
-            <a:off x="7589520" y="1463040"/>
-            <a:ext cx="4053535" cy="493776"/>
-          </a:xfrm>
-          <a:prstGeom prst="rect">
-            <a:avLst/>
-          </a:prstGeom>
-          <a:noFill/>
-          <a:ln/>
-        </p:spPr>
-        <p:txBody>
-          <a:bodyPr wrap="square" lIns="0" tIns="0" rIns="0" bIns="0" rtlCol="0" anchor="ctr"/>
-          <a:lstStyle/>
-          <a:p>
-            <a:pPr indent="0" marL="0">
-              <a:buNone/>
-            </a:pPr>
-            <a:r>
-              <a:rPr lang="en-US" sz="2700" dirty="0">
-                <a:solidFill>
-                  <a:srgbClr val="1B2530"/>
-                </a:solidFill>
-                <a:latin typeface="Calibri" pitchFamily="34" charset="0"/>
-                <a:ea typeface="Calibri" pitchFamily="34" charset="-122"/>
-                <a:cs typeface="Calibri" pitchFamily="34" charset="-120"/>
-              </a:rPr>
-              <a:t>UP is the green pad</a:t>
-            </a:r>
-            <a:endParaRPr lang="en-US" sz="2700" dirty="0"/>
-          </a:p>
-        </p:txBody>
-      </p:sp>
-      <p:sp>
-        <p:nvSpPr>
-          <p:cNvPr id="13" name="Text 11"/>
-          <p:cNvSpPr txBox="1"/>
-          <p:nvPr/>
-        </p:nvSpPr>
-        <p:spPr>
-          <a:xfrm>
-            <a:off x="6858000" y="3121152"/>
-            <a:ext cx="457200" cy="457200"/>
-          </a:xfrm>
-          <a:prstGeom prst="roundRect">
-            <a:avLst>
-              <a:gd name="adj" fmla="val 16000"/>
-            </a:avLst>
-          </a:prstGeom>
-          <a:solidFill>
-            <a:srgbClr val="6B4FA0"/>
-          </a:solidFill>
-          <a:ln>
-            <a:solidFill>
-              <a:srgbClr val="6B4FA0"/>
-            </a:solidFill>
-          </a:ln>
-        </p:spPr>
-        <p:txBody>
-          <a:bodyPr wrap="square" lIns="0" tIns="0" rIns="0" bIns="0" rtlCol="0" anchor="ctr"/>
-          <a:lstStyle/>
-          <a:p>
-            <a:pPr algn="ctr" indent="0" marL="0">
-              <a:buNone/>
-            </a:pPr>
-            <a:r>
-              <a:rPr lang="en-US" sz="1700" b="1" dirty="0">
-                <a:solidFill>
-                  <a:srgbClr val="FFFFFF"/>
-                </a:solidFill>
-                <a:latin typeface="Calibri" pitchFamily="34" charset="0"/>
-                <a:ea typeface="Calibri" pitchFamily="34" charset="-122"/>
-                <a:cs typeface="Calibri" pitchFamily="34" charset="-120"/>
-              </a:rPr>
-              <a:t>2</a:t>
-            </a:r>
-            <a:endParaRPr lang="en-US" sz="1700" dirty="0"/>
-          </a:p>
-        </p:txBody>
-      </p:sp>
-      <p:sp>
-        <p:nvSpPr>
-          <p:cNvPr id="14" name="Text 12"/>
-          <p:cNvSpPr txBox="1"/>
-          <p:nvPr/>
-        </p:nvSpPr>
-        <p:spPr>
-          <a:xfrm>
-            <a:off x="7589520" y="3102864"/>
-            <a:ext cx="4053535" cy="1475232"/>
-          </a:xfrm>
-          <a:prstGeom prst="rect">
-            <a:avLst/>
-          </a:prstGeom>
-          <a:noFill/>
-          <a:ln/>
-        </p:spPr>
-        <p:txBody>
-          <a:bodyPr wrap="square" lIns="0" tIns="0" rIns="0" bIns="0" rtlCol="0" anchor="t"/>
-          <a:lstStyle/>
-          <a:p>
-            <a:pPr indent="0" marL="0">
-              <a:buNone/>
-            </a:pPr>
-            <a:r>
-              <a:rPr lang="en-US" sz="2700" dirty="0">
-                <a:solidFill>
-                  <a:srgbClr val="1B2530"/>
-                </a:solidFill>
-                <a:latin typeface="Calibri" pitchFamily="34" charset="0"/>
-                <a:ea typeface="Calibri" pitchFamily="34" charset="-122"/>
-                <a:cs typeface="Calibri" pitchFamily="34" charset="-120"/>
-              </a:rPr>
-              <a:t>The white bar is under it</a:t>
-            </a:r>
-            <a:endParaRPr lang="en-US" sz="2700" dirty="0"/>
-          </a:p>
-        </p:txBody>
-      </p:sp>
-      <p:sp>
-        <p:nvSpPr>
-          <p:cNvPr id="15" name="Text 13"/>
-          <p:cNvSpPr txBox="1"/>
-          <p:nvPr/>
-        </p:nvSpPr>
-        <p:spPr>
-          <a:xfrm>
-            <a:off x="6858000" y="4760976"/>
-            <a:ext cx="457200" cy="457200"/>
-          </a:xfrm>
-          <a:prstGeom prst="roundRect">
-            <a:avLst>
-              <a:gd name="adj" fmla="val 16000"/>
-            </a:avLst>
-          </a:prstGeom>
-          <a:solidFill>
-            <a:srgbClr val="6B4FA0"/>
-          </a:solidFill>
-          <a:ln>
-            <a:solidFill>
-              <a:srgbClr val="6B4FA0"/>
-            </a:solidFill>
-          </a:ln>
-        </p:spPr>
-        <p:txBody>
-          <a:bodyPr wrap="square" lIns="0" tIns="0" rIns="0" bIns="0" rtlCol="0" anchor="ctr"/>
-          <a:lstStyle/>
-          <a:p>
-            <a:pPr algn="ctr" indent="0" marL="0">
-              <a:buNone/>
-            </a:pPr>
-            <a:r>
-              <a:rPr lang="en-US" sz="1700" b="1" dirty="0">
-                <a:solidFill>
-                  <a:srgbClr val="FFFFFF"/>
-                </a:solidFill>
-                <a:latin typeface="Calibri" pitchFamily="34" charset="0"/>
-                <a:ea typeface="Calibri" pitchFamily="34" charset="-122"/>
-                <a:cs typeface="Calibri" pitchFamily="34" charset="-120"/>
-              </a:rPr>
-              <a:t>3</a:t>
-            </a:r>
-            <a:endParaRPr lang="en-US" sz="1700" dirty="0"/>
-          </a:p>
-        </p:txBody>
-      </p:sp>
-      <p:sp>
-        <p:nvSpPr>
-          <p:cNvPr id="16" name="Text 14"/>
-          <p:cNvSpPr txBox="1"/>
-          <p:nvPr/>
-        </p:nvSpPr>
-        <p:spPr>
-          <a:xfrm>
-            <a:off x="7589520" y="4742688"/>
-            <a:ext cx="4053535" cy="493776"/>
-          </a:xfrm>
-          <a:prstGeom prst="rect">
-            <a:avLst/>
-          </a:prstGeom>
-          <a:noFill/>
-          <a:ln/>
-        </p:spPr>
-        <p:txBody>
-          <a:bodyPr wrap="square" lIns="0" tIns="0" rIns="0" bIns="0" rtlCol="0" anchor="ctr"/>
-          <a:lstStyle/>
-          <a:p>
-            <a:pPr indent="0" marL="0">
-              <a:buNone/>
-            </a:pPr>
-            <a:r>
-              <a:rPr lang="en-US" sz="2700" dirty="0">
-                <a:solidFill>
-                  <a:srgbClr val="1B2530"/>
-                </a:solidFill>
-                <a:latin typeface="Calibri" pitchFamily="34" charset="0"/>
-                <a:ea typeface="Calibri" pitchFamily="34" charset="-122"/>
-                <a:cs typeface="Calibri" pitchFamily="34" charset="-120"/>
-              </a:rPr>
-              <a:t>You hear note 64</a:t>
-            </a:r>
-            <a:endParaRPr lang="en-US" sz="2700" dirty="0"/>
+              <a:t>UP held: the white bar is under the green pad</a:t>
+            </a:r>
+            <a:endParaRPr lang="en-US" sz="1400" dirty="0"/>
           </a:p>
         </p:txBody>
       </p:sp>
@@ -8088,7 +7769,7 @@
                 <a:ea typeface="Cambria" pitchFamily="34" charset="-122"/>
                 <a:cs typeface="Cambria" pitchFamily="34" charset="-120"/>
               </a:rPr>
-              <a:t>Your own tune</a:t>
+              <a:t>Playing UP</a:t>
             </a:r>
             <a:endParaRPr lang="en-US" sz="3000" dirty="0"/>
           </a:p>
@@ -8096,18 +7777,232 @@
       </p:sp>
       <p:sp>
         <p:nvSpPr>
-          <p:cNvPr id="3" name="Text 1"/>
-          <p:cNvSpPr txBox="1"/>
-          <p:nvPr/>
-        </p:nvSpPr>
-        <p:spPr>
-          <a:xfrm>
-            <a:off x="548640" y="1481328"/>
-            <a:ext cx="438912" cy="438912"/>
+          <p:cNvPr id="3" name="Shape 1"/>
+          <p:cNvSpPr/>
+          <p:nvPr/>
+        </p:nvSpPr>
+        <p:spPr>
+          <a:xfrm>
+            <a:off x="475488" y="1938528"/>
+            <a:ext cx="5998464" cy="3803904"/>
+          </a:xfrm>
+          <a:prstGeom prst="rect">
+            <a:avLst/>
+          </a:prstGeom>
+          <a:solidFill>
+            <a:srgbClr val="2E4A62"/>
+          </a:solidFill>
+          <a:ln w="12700">
+            <a:solidFill>
+              <a:srgbClr val="2E4A62"/>
+            </a:solidFill>
+            <a:prstDash val="solid"/>
+          </a:ln>
+        </p:spPr>
+      </p:sp>
+      <p:sp>
+        <p:nvSpPr>
+          <p:cNvPr id="4" name="Shape 2"/>
+          <p:cNvSpPr/>
+          <p:nvPr/>
+        </p:nvSpPr>
+        <p:spPr>
+          <a:xfrm>
+            <a:off x="548640" y="2011680"/>
+            <a:ext cx="5852160" cy="3657600"/>
+          </a:xfrm>
+          <a:prstGeom prst="rect">
+            <a:avLst/>
+          </a:prstGeom>
+          <a:solidFill>
+            <a:srgbClr val="000000"/>
+          </a:solidFill>
+          <a:ln w="12700">
+            <a:solidFill>
+              <a:srgbClr val="000000"/>
+            </a:solidFill>
+            <a:prstDash val="solid"/>
+          </a:ln>
+        </p:spPr>
+      </p:sp>
+      <p:sp>
+        <p:nvSpPr>
+          <p:cNvPr id="5" name="Shape 3"/>
+          <p:cNvSpPr/>
+          <p:nvPr/>
+        </p:nvSpPr>
+        <p:spPr>
+          <a:xfrm>
+            <a:off x="1280160" y="3474720"/>
+            <a:ext cx="877824" cy="877824"/>
+          </a:xfrm>
+          <a:prstGeom prst="rect">
+            <a:avLst/>
+          </a:prstGeom>
+          <a:solidFill>
+            <a:srgbClr val="0000F8"/>
+          </a:solidFill>
+          <a:ln w="12700">
+            <a:solidFill>
+              <a:srgbClr val="0000F8"/>
+            </a:solidFill>
+            <a:prstDash val="solid"/>
+          </a:ln>
+        </p:spPr>
+      </p:sp>
+      <p:sp>
+        <p:nvSpPr>
+          <p:cNvPr id="6" name="Shape 4"/>
+          <p:cNvSpPr/>
+          <p:nvPr/>
+        </p:nvSpPr>
+        <p:spPr>
+          <a:xfrm>
+            <a:off x="2450592" y="3474720"/>
+            <a:ext cx="877824" cy="877824"/>
+          </a:xfrm>
+          <a:prstGeom prst="rect">
+            <a:avLst/>
+          </a:prstGeom>
+          <a:solidFill>
+            <a:srgbClr val="00FC00"/>
+          </a:solidFill>
+          <a:ln w="12700">
+            <a:solidFill>
+              <a:srgbClr val="00FC00"/>
+            </a:solidFill>
+            <a:prstDash val="solid"/>
+          </a:ln>
+        </p:spPr>
+      </p:sp>
+      <p:sp>
+        <p:nvSpPr>
+          <p:cNvPr id="7" name="Shape 5"/>
+          <p:cNvSpPr/>
+          <p:nvPr/>
+        </p:nvSpPr>
+        <p:spPr>
+          <a:xfrm>
+            <a:off x="3621024" y="3474720"/>
+            <a:ext cx="877824" cy="877824"/>
+          </a:xfrm>
+          <a:prstGeom prst="rect">
+            <a:avLst/>
+          </a:prstGeom>
+          <a:solidFill>
+            <a:srgbClr val="F80000"/>
+          </a:solidFill>
+          <a:ln w="12700">
+            <a:solidFill>
+              <a:srgbClr val="F80000"/>
+            </a:solidFill>
+            <a:prstDash val="solid"/>
+          </a:ln>
+        </p:spPr>
+      </p:sp>
+      <p:sp>
+        <p:nvSpPr>
+          <p:cNvPr id="8" name="Shape 6"/>
+          <p:cNvSpPr/>
+          <p:nvPr/>
+        </p:nvSpPr>
+        <p:spPr>
+          <a:xfrm>
+            <a:off x="4791456" y="3474720"/>
+            <a:ext cx="877824" cy="877824"/>
+          </a:xfrm>
+          <a:prstGeom prst="rect">
+            <a:avLst/>
+          </a:prstGeom>
+          <a:solidFill>
+            <a:srgbClr val="F800F8"/>
+          </a:solidFill>
+          <a:ln w="12700">
+            <a:solidFill>
+              <a:srgbClr val="F800F8"/>
+            </a:solidFill>
+            <a:prstDash val="solid"/>
+          </a:ln>
+        </p:spPr>
+      </p:sp>
+      <p:sp>
+        <p:nvSpPr>
+          <p:cNvPr id="9" name="Shape 7"/>
+          <p:cNvSpPr/>
+          <p:nvPr/>
+        </p:nvSpPr>
+        <p:spPr>
+          <a:xfrm>
+            <a:off x="2450592" y="4498848"/>
+            <a:ext cx="877824" cy="109728"/>
+          </a:xfrm>
+          <a:prstGeom prst="rect">
+            <a:avLst/>
+          </a:prstGeom>
+          <a:solidFill>
+            <a:srgbClr val="FFFFFF"/>
+          </a:solidFill>
+          <a:ln w="12700">
+            <a:solidFill>
+              <a:srgbClr val="FFFFFF"/>
+            </a:solidFill>
+            <a:prstDash val="solid"/>
+          </a:ln>
+        </p:spPr>
+      </p:sp>
+      <p:sp>
+        <p:nvSpPr>
+          <p:cNvPr id="10" name="Text 8"/>
+          <p:cNvSpPr txBox="1"/>
+          <p:nvPr/>
+        </p:nvSpPr>
+        <p:spPr>
+          <a:xfrm>
+            <a:off x="548640" y="5779008"/>
+            <a:ext cx="5852160" cy="274320"/>
+          </a:xfrm>
+          <a:prstGeom prst="rect">
+            <a:avLst/>
+          </a:prstGeom>
+          <a:noFill/>
+          <a:ln/>
+        </p:spPr>
+        <p:txBody>
+          <a:bodyPr wrap="square" lIns="0" tIns="0" rIns="0" bIns="0" rtlCol="0" anchor="t"/>
+          <a:lstStyle/>
+          <a:p>
+            <a:pPr indent="0" marL="0">
+              <a:buNone/>
+            </a:pPr>
+            <a:r>
+              <a:rPr lang="en-US" sz="1100" i="1" dirty="0">
+                <a:solidFill>
+                  <a:srgbClr val="5B6B78"/>
+                </a:solidFill>
+                <a:latin typeface="Calibri" pitchFamily="34" charset="0"/>
+                <a:ea typeface="Calibri" pitchFamily="34" charset="-122"/>
+                <a:cs typeface="Calibri" pitchFamily="34" charset="-120"/>
+              </a:rPr>
+              <a:t>320 x 200 game viewport</a:t>
+            </a:r>
+            <a:endParaRPr lang="en-US" sz="1100" dirty="0"/>
+          </a:p>
+        </p:txBody>
+      </p:sp>
+      <p:sp>
+        <p:nvSpPr>
+          <p:cNvPr id="11" name="Text 9"/>
+          <p:cNvSpPr txBox="1"/>
+          <p:nvPr/>
+        </p:nvSpPr>
+        <p:spPr>
+          <a:xfrm>
+            <a:off x="6858000" y="1481328"/>
+            <a:ext cx="457200" cy="457200"/>
           </a:xfrm>
           <a:prstGeom prst="roundRect">
             <a:avLst>
-              <a:gd name="adj" fmla="val 16667"/>
+              <a:gd name="adj" fmla="val 16000"/>
             </a:avLst>
           </a:prstGeom>
           <a:solidFill>
@@ -8127,7 +8022,7 @@
               <a:buNone/>
             </a:pPr>
             <a:r>
-              <a:rPr lang="en-US" sz="1600" b="1" dirty="0">
+              <a:rPr lang="en-US" sz="1700" b="1" dirty="0">
                 <a:solidFill>
                   <a:srgbClr val="FFFFFF"/>
                 </a:solidFill>
@@ -8137,20 +8032,20 @@
               </a:rPr>
               <a:t>1</a:t>
             </a:r>
-            <a:endParaRPr lang="en-US" sz="1600" dirty="0"/>
-          </a:p>
-        </p:txBody>
-      </p:sp>
-      <p:sp>
-        <p:nvSpPr>
-          <p:cNvPr id="4" name="Text 2"/>
-          <p:cNvSpPr txBox="1"/>
-          <p:nvPr/>
-        </p:nvSpPr>
-        <p:spPr>
-          <a:xfrm>
-            <a:off x="1234440" y="1463040"/>
-            <a:ext cx="6446520" cy="475488"/>
+            <a:endParaRPr lang="en-US" sz="1700" dirty="0"/>
+          </a:p>
+        </p:txBody>
+      </p:sp>
+      <p:sp>
+        <p:nvSpPr>
+          <p:cNvPr id="12" name="Text 10"/>
+          <p:cNvSpPr txBox="1"/>
+          <p:nvPr/>
+        </p:nvSpPr>
+        <p:spPr>
+          <a:xfrm>
+            <a:off x="7589520" y="1463040"/>
+            <a:ext cx="4053535" cy="493776"/>
           </a:xfrm>
           <a:prstGeom prst="rect">
             <a:avLst/>
@@ -8166,7 +8061,7 @@
               <a:buNone/>
             </a:pPr>
             <a:r>
-              <a:rPr lang="en-US" sz="2400" dirty="0">
+              <a:rPr lang="en-US" sz="2700" dirty="0">
                 <a:solidFill>
                   <a:srgbClr val="1B2530"/>
                 </a:solidFill>
@@ -8174,26 +8069,26 @@
                 <a:ea typeface="Calibri" pitchFamily="34" charset="-122"/>
                 <a:cs typeface="Calibri" pitchFamily="34" charset="-120"/>
               </a:rPr>
-              <a:t>Change the four note numbers</a:t>
-            </a:r>
-            <a:endParaRPr lang="en-US" sz="2400" dirty="0"/>
-          </a:p>
-        </p:txBody>
-      </p:sp>
-      <p:sp>
-        <p:nvSpPr>
-          <p:cNvPr id="5" name="Text 3"/>
-          <p:cNvSpPr txBox="1"/>
-          <p:nvPr/>
-        </p:nvSpPr>
-        <p:spPr>
-          <a:xfrm>
-            <a:off x="548640" y="3115056"/>
-            <a:ext cx="438912" cy="438912"/>
+              <a:t>UP is the green pad</a:t>
+            </a:r>
+            <a:endParaRPr lang="en-US" sz="2700" dirty="0"/>
+          </a:p>
+        </p:txBody>
+      </p:sp>
+      <p:sp>
+        <p:nvSpPr>
+          <p:cNvPr id="13" name="Text 11"/>
+          <p:cNvSpPr txBox="1"/>
+          <p:nvPr/>
+        </p:nvSpPr>
+        <p:spPr>
+          <a:xfrm>
+            <a:off x="6858000" y="3121152"/>
+            <a:ext cx="457200" cy="457200"/>
           </a:xfrm>
           <a:prstGeom prst="roundRect">
             <a:avLst>
-              <a:gd name="adj" fmla="val 16667"/>
+              <a:gd name="adj" fmla="val 16000"/>
             </a:avLst>
           </a:prstGeom>
           <a:solidFill>
@@ -8213,7 +8108,7 @@
               <a:buNone/>
             </a:pPr>
             <a:r>
-              <a:rPr lang="en-US" sz="1600" b="1" dirty="0">
+              <a:rPr lang="en-US" sz="1700" b="1" dirty="0">
                 <a:solidFill>
                   <a:srgbClr val="FFFFFF"/>
                 </a:solidFill>
@@ -8223,20 +8118,20 @@
               </a:rPr>
               <a:t>2</a:t>
             </a:r>
-            <a:endParaRPr lang="en-US" sz="1600" dirty="0"/>
-          </a:p>
-        </p:txBody>
-      </p:sp>
-      <p:sp>
-        <p:nvSpPr>
-          <p:cNvPr id="6" name="Text 4"/>
-          <p:cNvSpPr txBox="1"/>
-          <p:nvPr/>
-        </p:nvSpPr>
-        <p:spPr>
-          <a:xfrm>
-            <a:off x="1234440" y="3096768"/>
-            <a:ext cx="6446520" cy="1487424"/>
+            <a:endParaRPr lang="en-US" sz="1700" dirty="0"/>
+          </a:p>
+        </p:txBody>
+      </p:sp>
+      <p:sp>
+        <p:nvSpPr>
+          <p:cNvPr id="14" name="Text 12"/>
+          <p:cNvSpPr txBox="1"/>
+          <p:nvPr/>
+        </p:nvSpPr>
+        <p:spPr>
+          <a:xfrm>
+            <a:off x="7589520" y="3102864"/>
+            <a:ext cx="4053535" cy="1475232"/>
           </a:xfrm>
           <a:prstGeom prst="rect">
             <a:avLst/>
@@ -8252,7 +8147,7 @@
               <a:buNone/>
             </a:pPr>
             <a:r>
-              <a:rPr lang="en-US" sz="2400" dirty="0">
+              <a:rPr lang="en-US" sz="2700" dirty="0">
                 <a:solidFill>
                   <a:srgbClr val="1B2530"/>
                 </a:solidFill>
@@ -8260,26 +8155,26 @@
                 <a:ea typeface="Calibri" pitchFamily="34" charset="-122"/>
                 <a:cs typeface="Calibri" pitchFamily="34" charset="-120"/>
               </a:rPr>
-              <a:t>Use the note table: 60 62 64 65 67 69 71 72</a:t>
-            </a:r>
-            <a:endParaRPr lang="en-US" sz="2400" dirty="0"/>
-          </a:p>
-        </p:txBody>
-      </p:sp>
-      <p:sp>
-        <p:nvSpPr>
-          <p:cNvPr id="7" name="Text 5"/>
-          <p:cNvSpPr txBox="1"/>
-          <p:nvPr/>
-        </p:nvSpPr>
-        <p:spPr>
-          <a:xfrm>
-            <a:off x="548640" y="4748784"/>
-            <a:ext cx="438912" cy="438912"/>
+              <a:t>The white bar is under it</a:t>
+            </a:r>
+            <a:endParaRPr lang="en-US" sz="2700" dirty="0"/>
+          </a:p>
+        </p:txBody>
+      </p:sp>
+      <p:sp>
+        <p:nvSpPr>
+          <p:cNvPr id="15" name="Text 13"/>
+          <p:cNvSpPr txBox="1"/>
+          <p:nvPr/>
+        </p:nvSpPr>
+        <p:spPr>
+          <a:xfrm>
+            <a:off x="6858000" y="4760976"/>
+            <a:ext cx="457200" cy="457200"/>
           </a:xfrm>
           <a:prstGeom prst="roundRect">
             <a:avLst>
-              <a:gd name="adj" fmla="val 16667"/>
+              <a:gd name="adj" fmla="val 16000"/>
             </a:avLst>
           </a:prstGeom>
           <a:solidFill>
@@ -8299,7 +8194,7 @@
               <a:buNone/>
             </a:pPr>
             <a:r>
-              <a:rPr lang="en-US" sz="1600" b="1" dirty="0">
+              <a:rPr lang="en-US" sz="1700" b="1" dirty="0">
                 <a:solidFill>
                   <a:srgbClr val="FFFFFF"/>
                 </a:solidFill>
@@ -8309,20 +8204,20 @@
               </a:rPr>
               <a:t>3</a:t>
             </a:r>
-            <a:endParaRPr lang="en-US" sz="1600" dirty="0"/>
-          </a:p>
-        </p:txBody>
-      </p:sp>
-      <p:sp>
-        <p:nvSpPr>
-          <p:cNvPr id="8" name="Text 6"/>
-          <p:cNvSpPr txBox="1"/>
-          <p:nvPr/>
-        </p:nvSpPr>
-        <p:spPr>
-          <a:xfrm>
-            <a:off x="1234440" y="4730496"/>
-            <a:ext cx="6446520" cy="475488"/>
+            <a:endParaRPr lang="en-US" sz="1700" dirty="0"/>
+          </a:p>
+        </p:txBody>
+      </p:sp>
+      <p:sp>
+        <p:nvSpPr>
+          <p:cNvPr id="16" name="Text 14"/>
+          <p:cNvSpPr txBox="1"/>
+          <p:nvPr/>
+        </p:nvSpPr>
+        <p:spPr>
+          <a:xfrm>
+            <a:off x="7589520" y="4742688"/>
+            <a:ext cx="4053535" cy="493776"/>
           </a:xfrm>
           <a:prstGeom prst="rect">
             <a:avLst/>
@@ -8338,7 +8233,7 @@
               <a:buNone/>
             </a:pPr>
             <a:r>
-              <a:rPr lang="en-US" sz="2400" dirty="0">
+              <a:rPr lang="en-US" sz="2700" dirty="0">
                 <a:solidFill>
                   <a:srgbClr val="1B2530"/>
                 </a:solidFill>
@@ -8346,219 +8241,9 @@
                 <a:ea typeface="Calibri" pitchFamily="34" charset="-122"/>
                 <a:cs typeface="Calibri" pitchFamily="34" charset="-120"/>
               </a:rPr>
-              <a:t>Teach your tune to another pair</a:t>
-            </a:r>
-            <a:endParaRPr lang="en-US" sz="2400" dirty="0"/>
-          </a:p>
-        </p:txBody>
-      </p:sp>
-      <p:sp>
-        <p:nvSpPr>
-          <p:cNvPr id="9" name="Shape 7"/>
-          <p:cNvSpPr/>
-          <p:nvPr/>
-        </p:nvSpPr>
-        <p:spPr>
-          <a:xfrm>
-            <a:off x="8092440" y="1463040"/>
-            <a:ext cx="3550615" cy="1143000"/>
-          </a:xfrm>
-          <a:prstGeom prst="roundRect">
-            <a:avLst>
-              <a:gd name="adj" fmla="val 6400"/>
-            </a:avLst>
-          </a:prstGeom>
-          <a:solidFill>
-            <a:srgbClr val="1B2530"/>
-          </a:solidFill>
-          <a:ln w="12700">
-            <a:solidFill>
-              <a:srgbClr val="1B2530"/>
-            </a:solidFill>
-            <a:prstDash val="solid"/>
-          </a:ln>
-        </p:spPr>
-      </p:sp>
-      <p:sp>
-        <p:nvSpPr>
-          <p:cNvPr id="10" name="Text 8"/>
-          <p:cNvSpPr txBox="1"/>
-          <p:nvPr/>
-        </p:nvSpPr>
-        <p:spPr>
-          <a:xfrm>
-            <a:off x="8321040" y="1600200"/>
-            <a:ext cx="3093415" cy="457200"/>
-          </a:xfrm>
-          <a:prstGeom prst="rect">
-            <a:avLst/>
-          </a:prstGeom>
-          <a:noFill/>
-          <a:ln/>
-        </p:spPr>
-        <p:txBody>
-          <a:bodyPr wrap="square" lIns="0" tIns="0" rIns="0" bIns="0" rtlCol="0" anchor="t"/>
-          <a:lstStyle/>
-          <a:p>
-            <a:pPr indent="0" marL="0">
-              <a:buNone/>
-            </a:pPr>
-            <a:r>
-              <a:rPr lang="en-US" sz="2200" b="1" dirty="0">
-                <a:solidFill>
-                  <a:srgbClr val="FFFFFF"/>
-                </a:solidFill>
-                <a:latin typeface="Cambria" pitchFamily="34" charset="0"/>
-                <a:ea typeface="Cambria" pitchFamily="34" charset="-122"/>
-                <a:cs typeface="Cambria" pitchFamily="34" charset="-120"/>
-              </a:rPr>
-              <a:t>Step 7</a:t>
-            </a:r>
-            <a:endParaRPr lang="en-US" sz="2200" dirty="0"/>
-          </a:p>
-        </p:txBody>
-      </p:sp>
-      <p:sp>
-        <p:nvSpPr>
-          <p:cNvPr id="11" name="Text 9"/>
-          <p:cNvSpPr txBox="1"/>
-          <p:nvPr/>
-        </p:nvSpPr>
-        <p:spPr>
-          <a:xfrm>
-            <a:off x="8321040" y="2084832"/>
-            <a:ext cx="3093415" cy="365760"/>
-          </a:xfrm>
-          <a:prstGeom prst="rect">
-            <a:avLst/>
-          </a:prstGeom>
-          <a:noFill/>
-          <a:ln/>
-        </p:spPr>
-        <p:txBody>
-          <a:bodyPr wrap="square" lIns="0" tIns="0" rIns="0" bIns="0" rtlCol="0" anchor="t"/>
-          <a:lstStyle/>
-          <a:p>
-            <a:pPr indent="0" marL="0">
-              <a:buNone/>
-            </a:pPr>
-            <a:r>
-              <a:rPr lang="en-US" sz="1600" dirty="0">
-                <a:solidFill>
-                  <a:srgbClr val="CFE3EA"/>
-                </a:solidFill>
-                <a:latin typeface="Calibri" pitchFamily="34" charset="0"/>
-                <a:ea typeface="Calibri" pitchFamily="34" charset="-122"/>
-                <a:cs typeface="Calibri" pitchFamily="34" charset="-120"/>
-              </a:rPr>
-              <a:t>about 4 min</a:t>
-            </a:r>
-            <a:endParaRPr lang="en-US" sz="1600" dirty="0"/>
-          </a:p>
-        </p:txBody>
-      </p:sp>
-      <p:sp>
-        <p:nvSpPr>
-          <p:cNvPr id="12" name="Shape 10"/>
-          <p:cNvSpPr/>
-          <p:nvPr/>
-        </p:nvSpPr>
-        <p:spPr>
-          <a:xfrm>
-            <a:off x="8092440" y="2834640"/>
-            <a:ext cx="3550615" cy="3383280"/>
-          </a:xfrm>
-          <a:prstGeom prst="roundRect">
-            <a:avLst>
-              <a:gd name="adj" fmla="val 2162"/>
-            </a:avLst>
-          </a:prstGeom>
-          <a:solidFill>
-            <a:srgbClr val="EEF2F4"/>
-          </a:solidFill>
-          <a:ln w="12700">
-            <a:solidFill>
-              <a:srgbClr val="EEF2F4"/>
-            </a:solidFill>
-            <a:prstDash val="solid"/>
-          </a:ln>
-        </p:spPr>
-      </p:sp>
-      <p:sp>
-        <p:nvSpPr>
-          <p:cNvPr id="13" name="Text 11"/>
-          <p:cNvSpPr txBox="1"/>
-          <p:nvPr/>
-        </p:nvSpPr>
-        <p:spPr>
-          <a:xfrm>
-            <a:off x="8321040" y="2971800"/>
-            <a:ext cx="3093415" cy="365760"/>
-          </a:xfrm>
-          <a:prstGeom prst="rect">
-            <a:avLst/>
-          </a:prstGeom>
-          <a:noFill/>
-          <a:ln/>
-        </p:spPr>
-        <p:txBody>
-          <a:bodyPr wrap="square" lIns="0" tIns="0" rIns="0" bIns="0" rtlCol="0" anchor="t"/>
-          <a:lstStyle/>
-          <a:p>
-            <a:pPr indent="0" marL="0">
-              <a:buNone/>
-            </a:pPr>
-            <a:r>
-              <a:rPr lang="en-US" sz="1500" b="1" dirty="0">
-                <a:solidFill>
-                  <a:srgbClr val="2F7D4F"/>
-                </a:solidFill>
-                <a:latin typeface="Calibri" pitchFamily="34" charset="0"/>
-                <a:ea typeface="Calibri" pitchFamily="34" charset="-122"/>
-                <a:cs typeface="Calibri" pitchFamily="34" charset="-120"/>
-              </a:rPr>
-              <a:t>You should see</a:t>
-            </a:r>
-            <a:endParaRPr lang="en-US" sz="1500" dirty="0"/>
-          </a:p>
-        </p:txBody>
-      </p:sp>
-      <p:sp>
-        <p:nvSpPr>
-          <p:cNvPr id="14" name="Text 12"/>
-          <p:cNvSpPr txBox="1"/>
-          <p:nvPr/>
-        </p:nvSpPr>
-        <p:spPr>
-          <a:xfrm>
-            <a:off x="8321040" y="3429000"/>
-            <a:ext cx="3093415" cy="2606040"/>
-          </a:xfrm>
-          <a:prstGeom prst="rect">
-            <a:avLst/>
-          </a:prstGeom>
-          <a:noFill/>
-          <a:ln/>
-        </p:spPr>
-        <p:txBody>
-          <a:bodyPr wrap="square" lIns="0" tIns="0" rIns="0" bIns="0" rtlCol="0" anchor="t"/>
-          <a:lstStyle/>
-          <a:p>
-            <a:pPr indent="0" marL="0">
-              <a:buNone/>
-            </a:pPr>
-            <a:r>
-              <a:rPr lang="en-US" sz="2200" dirty="0">
-                <a:solidFill>
-                  <a:srgbClr val="1B2530"/>
-                </a:solidFill>
-                <a:latin typeface="Calibri" pitchFamily="34" charset="0"/>
-                <a:ea typeface="Calibri" pitchFamily="34" charset="-122"/>
-                <a:cs typeface="Calibri" pitchFamily="34" charset="-120"/>
-              </a:rPr>
-              <a:t>A four-note tune of your own that another pair can play back.</a:t>
-            </a:r>
-            <a:endParaRPr lang="en-US" sz="2200" dirty="0"/>
+              <a:t>You hear note 64</a:t>
+            </a:r>
+            <a:endParaRPr lang="en-US" sz="2700" dirty="0"/>
           </a:p>
         </p:txBody>
       </p:sp>
@@ -8637,14 +8322,16 @@
       </p:grpSpPr>
       <p:sp>
         <p:nvSpPr>
-          <p:cNvPr id="2" name="Text 0"/>
-          <p:cNvSpPr txBox="1"/>
-          <p:nvPr/>
-        </p:nvSpPr>
-        <p:spPr>
-          <a:xfrm>
-            <a:off x="548640" y="1371600"/>
-            <a:ext cx="2743200" cy="1188720"/>
+          <p:cNvPr id="2" name="Text 1"/>
+          <p:cNvSpPr/>
+          <p:nvPr>
+            <p:ph idx="101" type="title" hasCustomPrompt="1"/>
+          </p:nvPr>
+        </p:nvSpPr>
+        <p:spPr>
+          <a:xfrm>
+            <a:off x="548640" y="384048"/>
+            <a:ext cx="11094415" cy="868680"/>
           </a:xfrm>
           <a:prstGeom prst="rect">
             <a:avLst/>
@@ -8653,24 +8340,24 @@
           <a:ln/>
         </p:spPr>
         <p:txBody>
-          <a:bodyPr wrap="square" lIns="0" tIns="0" rIns="0" bIns="0" rtlCol="0" anchor="t"/>
-          <a:lstStyle/>
-          <a:p>
-            <a:pPr indent="0" marL="0">
-              <a:buNone/>
-            </a:pPr>
-            <a:r>
-              <a:rPr lang="en-US" sz="8000" b="1" dirty="0">
-                <a:solidFill>
-                  <a:srgbClr val="B9A4E3"/>
+          <a:bodyPr wrap="square" lIns="0" tIns="0" rIns="0" bIns="0" rtlCol="0" anchor="ctr"/>
+          <a:lstStyle/>
+          <a:p>
+            <a:pPr algn="l" indent="0" marL="0">
+              <a:buNone/>
+            </a:pPr>
+            <a:r>
+              <a:rPr lang="en-US" sz="3000" b="1" dirty="0">
+                <a:solidFill>
+                  <a:srgbClr val="2E4A62"/>
                 </a:solidFill>
                 <a:latin typeface="Cambria" pitchFamily="34" charset="0"/>
                 <a:ea typeface="Cambria" pitchFamily="34" charset="-122"/>
                 <a:cs typeface="Cambria" pitchFamily="34" charset="-120"/>
               </a:rPr>
-              <a:t>03</a:t>
-            </a:r>
-            <a:endParaRPr lang="en-US" sz="8000" dirty="0"/>
+              <a:t>Your own tune</a:t>
+            </a:r>
+            <a:endParaRPr lang="en-US" sz="3000" dirty="0"/>
           </a:p>
         </p:txBody>
       </p:sp>
@@ -8682,8 +8369,55 @@
         </p:nvSpPr>
         <p:spPr>
           <a:xfrm>
-            <a:off x="548640" y="2834640"/>
-            <a:ext cx="11094415" cy="1371600"/>
+            <a:off x="548640" y="1481328"/>
+            <a:ext cx="438912" cy="438912"/>
+          </a:xfrm>
+          <a:prstGeom prst="roundRect">
+            <a:avLst>
+              <a:gd name="adj" fmla="val 16667"/>
+            </a:avLst>
+          </a:prstGeom>
+          <a:solidFill>
+            <a:srgbClr val="6B4FA0"/>
+          </a:solidFill>
+          <a:ln>
+            <a:solidFill>
+              <a:srgbClr val="6B4FA0"/>
+            </a:solidFill>
+          </a:ln>
+        </p:spPr>
+        <p:txBody>
+          <a:bodyPr wrap="square" lIns="0" tIns="0" rIns="0" bIns="0" rtlCol="0" anchor="ctr"/>
+          <a:lstStyle/>
+          <a:p>
+            <a:pPr algn="ctr" indent="0" marL="0">
+              <a:buNone/>
+            </a:pPr>
+            <a:r>
+              <a:rPr lang="en-US" sz="1600" b="1" dirty="0">
+                <a:solidFill>
+                  <a:srgbClr val="FFFFFF"/>
+                </a:solidFill>
+                <a:latin typeface="Calibri" pitchFamily="34" charset="0"/>
+                <a:ea typeface="Calibri" pitchFamily="34" charset="-122"/>
+                <a:cs typeface="Calibri" pitchFamily="34" charset="-120"/>
+              </a:rPr>
+              <a:t>1</a:t>
+            </a:r>
+            <a:endParaRPr lang="en-US" sz="1600" dirty="0"/>
+          </a:p>
+        </p:txBody>
+      </p:sp>
+      <p:sp>
+        <p:nvSpPr>
+          <p:cNvPr id="4" name="Text 2"/>
+          <p:cNvSpPr txBox="1"/>
+          <p:nvPr/>
+        </p:nvSpPr>
+        <p:spPr>
+          <a:xfrm>
+            <a:off x="1234440" y="1463040"/>
+            <a:ext cx="6446520" cy="475488"/>
           </a:xfrm>
           <a:prstGeom prst="rect">
             <a:avLst/>
@@ -8699,7 +8433,245 @@
               <a:buNone/>
             </a:pPr>
             <a:r>
-              <a:rPr lang="en-US" sz="4200" b="1" dirty="0">
+              <a:rPr lang="en-US" sz="2400" dirty="0">
+                <a:solidFill>
+                  <a:srgbClr val="1B2530"/>
+                </a:solidFill>
+                <a:latin typeface="Calibri" pitchFamily="34" charset="0"/>
+                <a:ea typeface="Calibri" pitchFamily="34" charset="-122"/>
+                <a:cs typeface="Calibri" pitchFamily="34" charset="-120"/>
+              </a:rPr>
+              <a:t>Change the four note numbers</a:t>
+            </a:r>
+            <a:endParaRPr lang="en-US" sz="2400" dirty="0"/>
+          </a:p>
+        </p:txBody>
+      </p:sp>
+      <p:sp>
+        <p:nvSpPr>
+          <p:cNvPr id="5" name="Text 3"/>
+          <p:cNvSpPr txBox="1"/>
+          <p:nvPr/>
+        </p:nvSpPr>
+        <p:spPr>
+          <a:xfrm>
+            <a:off x="548640" y="3115056"/>
+            <a:ext cx="438912" cy="438912"/>
+          </a:xfrm>
+          <a:prstGeom prst="roundRect">
+            <a:avLst>
+              <a:gd name="adj" fmla="val 16667"/>
+            </a:avLst>
+          </a:prstGeom>
+          <a:solidFill>
+            <a:srgbClr val="6B4FA0"/>
+          </a:solidFill>
+          <a:ln>
+            <a:solidFill>
+              <a:srgbClr val="6B4FA0"/>
+            </a:solidFill>
+          </a:ln>
+        </p:spPr>
+        <p:txBody>
+          <a:bodyPr wrap="square" lIns="0" tIns="0" rIns="0" bIns="0" rtlCol="0" anchor="ctr"/>
+          <a:lstStyle/>
+          <a:p>
+            <a:pPr algn="ctr" indent="0" marL="0">
+              <a:buNone/>
+            </a:pPr>
+            <a:r>
+              <a:rPr lang="en-US" sz="1600" b="1" dirty="0">
+                <a:solidFill>
+                  <a:srgbClr val="FFFFFF"/>
+                </a:solidFill>
+                <a:latin typeface="Calibri" pitchFamily="34" charset="0"/>
+                <a:ea typeface="Calibri" pitchFamily="34" charset="-122"/>
+                <a:cs typeface="Calibri" pitchFamily="34" charset="-120"/>
+              </a:rPr>
+              <a:t>2</a:t>
+            </a:r>
+            <a:endParaRPr lang="en-US" sz="1600" dirty="0"/>
+          </a:p>
+        </p:txBody>
+      </p:sp>
+      <p:sp>
+        <p:nvSpPr>
+          <p:cNvPr id="6" name="Text 4"/>
+          <p:cNvSpPr txBox="1"/>
+          <p:nvPr/>
+        </p:nvSpPr>
+        <p:spPr>
+          <a:xfrm>
+            <a:off x="1234440" y="3096768"/>
+            <a:ext cx="6446520" cy="1487424"/>
+          </a:xfrm>
+          <a:prstGeom prst="rect">
+            <a:avLst/>
+          </a:prstGeom>
+          <a:noFill/>
+          <a:ln/>
+        </p:spPr>
+        <p:txBody>
+          <a:bodyPr wrap="square" lIns="0" tIns="0" rIns="0" bIns="0" rtlCol="0" anchor="t"/>
+          <a:lstStyle/>
+          <a:p>
+            <a:pPr indent="0" marL="0">
+              <a:buNone/>
+            </a:pPr>
+            <a:r>
+              <a:rPr lang="en-US" sz="2400" dirty="0">
+                <a:solidFill>
+                  <a:srgbClr val="1B2530"/>
+                </a:solidFill>
+                <a:latin typeface="Calibri" pitchFamily="34" charset="0"/>
+                <a:ea typeface="Calibri" pitchFamily="34" charset="-122"/>
+                <a:cs typeface="Calibri" pitchFamily="34" charset="-120"/>
+              </a:rPr>
+              <a:t>Use the note table: 60 62 64 65 67 69 71 72</a:t>
+            </a:r>
+            <a:endParaRPr lang="en-US" sz="2400" dirty="0"/>
+          </a:p>
+        </p:txBody>
+      </p:sp>
+      <p:sp>
+        <p:nvSpPr>
+          <p:cNvPr id="7" name="Text 5"/>
+          <p:cNvSpPr txBox="1"/>
+          <p:nvPr/>
+        </p:nvSpPr>
+        <p:spPr>
+          <a:xfrm>
+            <a:off x="548640" y="4748784"/>
+            <a:ext cx="438912" cy="438912"/>
+          </a:xfrm>
+          <a:prstGeom prst="roundRect">
+            <a:avLst>
+              <a:gd name="adj" fmla="val 16667"/>
+            </a:avLst>
+          </a:prstGeom>
+          <a:solidFill>
+            <a:srgbClr val="6B4FA0"/>
+          </a:solidFill>
+          <a:ln>
+            <a:solidFill>
+              <a:srgbClr val="6B4FA0"/>
+            </a:solidFill>
+          </a:ln>
+        </p:spPr>
+        <p:txBody>
+          <a:bodyPr wrap="square" lIns="0" tIns="0" rIns="0" bIns="0" rtlCol="0" anchor="ctr"/>
+          <a:lstStyle/>
+          <a:p>
+            <a:pPr algn="ctr" indent="0" marL="0">
+              <a:buNone/>
+            </a:pPr>
+            <a:r>
+              <a:rPr lang="en-US" sz="1600" b="1" dirty="0">
+                <a:solidFill>
+                  <a:srgbClr val="FFFFFF"/>
+                </a:solidFill>
+                <a:latin typeface="Calibri" pitchFamily="34" charset="0"/>
+                <a:ea typeface="Calibri" pitchFamily="34" charset="-122"/>
+                <a:cs typeface="Calibri" pitchFamily="34" charset="-120"/>
+              </a:rPr>
+              <a:t>3</a:t>
+            </a:r>
+            <a:endParaRPr lang="en-US" sz="1600" dirty="0"/>
+          </a:p>
+        </p:txBody>
+      </p:sp>
+      <p:sp>
+        <p:nvSpPr>
+          <p:cNvPr id="8" name="Text 6"/>
+          <p:cNvSpPr txBox="1"/>
+          <p:nvPr/>
+        </p:nvSpPr>
+        <p:spPr>
+          <a:xfrm>
+            <a:off x="1234440" y="4730496"/>
+            <a:ext cx="6446520" cy="475488"/>
+          </a:xfrm>
+          <a:prstGeom prst="rect">
+            <a:avLst/>
+          </a:prstGeom>
+          <a:noFill/>
+          <a:ln/>
+        </p:spPr>
+        <p:txBody>
+          <a:bodyPr wrap="square" lIns="0" tIns="0" rIns="0" bIns="0" rtlCol="0" anchor="ctr"/>
+          <a:lstStyle/>
+          <a:p>
+            <a:pPr indent="0" marL="0">
+              <a:buNone/>
+            </a:pPr>
+            <a:r>
+              <a:rPr lang="en-US" sz="2400" dirty="0">
+                <a:solidFill>
+                  <a:srgbClr val="1B2530"/>
+                </a:solidFill>
+                <a:latin typeface="Calibri" pitchFamily="34" charset="0"/>
+                <a:ea typeface="Calibri" pitchFamily="34" charset="-122"/>
+                <a:cs typeface="Calibri" pitchFamily="34" charset="-120"/>
+              </a:rPr>
+              <a:t>Teach your tune to another pair</a:t>
+            </a:r>
+            <a:endParaRPr lang="en-US" sz="2400" dirty="0"/>
+          </a:p>
+        </p:txBody>
+      </p:sp>
+      <p:sp>
+        <p:nvSpPr>
+          <p:cNvPr id="9" name="Shape 7"/>
+          <p:cNvSpPr/>
+          <p:nvPr/>
+        </p:nvSpPr>
+        <p:spPr>
+          <a:xfrm>
+            <a:off x="8092440" y="1463040"/>
+            <a:ext cx="3550615" cy="1143000"/>
+          </a:xfrm>
+          <a:prstGeom prst="roundRect">
+            <a:avLst>
+              <a:gd name="adj" fmla="val 6400"/>
+            </a:avLst>
+          </a:prstGeom>
+          <a:solidFill>
+            <a:srgbClr val="1B2530"/>
+          </a:solidFill>
+          <a:ln w="12700">
+            <a:solidFill>
+              <a:srgbClr val="1B2530"/>
+            </a:solidFill>
+            <a:prstDash val="solid"/>
+          </a:ln>
+        </p:spPr>
+      </p:sp>
+      <p:sp>
+        <p:nvSpPr>
+          <p:cNvPr id="10" name="Text 8"/>
+          <p:cNvSpPr txBox="1"/>
+          <p:nvPr/>
+        </p:nvSpPr>
+        <p:spPr>
+          <a:xfrm>
+            <a:off x="8321040" y="1600200"/>
+            <a:ext cx="3093415" cy="457200"/>
+          </a:xfrm>
+          <a:prstGeom prst="rect">
+            <a:avLst/>
+          </a:prstGeom>
+          <a:noFill/>
+          <a:ln/>
+        </p:spPr>
+        <p:txBody>
+          <a:bodyPr wrap="square" lIns="0" tIns="0" rIns="0" bIns="0" rtlCol="0" anchor="t"/>
+          <a:lstStyle/>
+          <a:p>
+            <a:pPr indent="0" marL="0">
+              <a:buNone/>
+            </a:pPr>
+            <a:r>
+              <a:rPr lang="en-US" sz="2200" b="1" dirty="0">
                 <a:solidFill>
                   <a:srgbClr val="FFFFFF"/>
                 </a:solidFill>
@@ -8707,22 +8679,22 @@
                 <a:ea typeface="Cambria" pitchFamily="34" charset="-122"/>
                 <a:cs typeface="Cambria" pitchFamily="34" charset="-120"/>
               </a:rPr>
-              <a:t>Sprite Lab</a:t>
-            </a:r>
-            <a:endParaRPr lang="en-US" sz="4200" dirty="0"/>
-          </a:p>
-        </p:txBody>
-      </p:sp>
-      <p:sp>
-        <p:nvSpPr>
-          <p:cNvPr id="4" name="Text 2"/>
-          <p:cNvSpPr txBox="1"/>
-          <p:nvPr/>
-        </p:nvSpPr>
-        <p:spPr>
-          <a:xfrm>
-            <a:off x="548640" y="4389120"/>
-            <a:ext cx="11094415" cy="1097280"/>
+              <a:t>Step 7</a:t>
+            </a:r>
+            <a:endParaRPr lang="en-US" sz="2200" dirty="0"/>
+          </a:p>
+        </p:txBody>
+      </p:sp>
+      <p:sp>
+        <p:nvSpPr>
+          <p:cNvPr id="11" name="Text 9"/>
+          <p:cNvSpPr txBox="1"/>
+          <p:nvPr/>
+        </p:nvSpPr>
+        <p:spPr>
+          <a:xfrm>
+            <a:off x="8321040" y="2084832"/>
+            <a:ext cx="3093415" cy="365760"/>
           </a:xfrm>
           <a:prstGeom prst="rect">
             <a:avLst/>
@@ -8738,15 +8710,120 @@
               <a:buNone/>
             </a:pPr>
             <a:r>
+              <a:rPr lang="en-US" sz="1600" dirty="0">
+                <a:solidFill>
+                  <a:srgbClr val="CFE3EA"/>
+                </a:solidFill>
+                <a:latin typeface="Calibri" pitchFamily="34" charset="0"/>
+                <a:ea typeface="Calibri" pitchFamily="34" charset="-122"/>
+                <a:cs typeface="Calibri" pitchFamily="34" charset="-120"/>
+              </a:rPr>
+              <a:t>about 4 min</a:t>
+            </a:r>
+            <a:endParaRPr lang="en-US" sz="1600" dirty="0"/>
+          </a:p>
+        </p:txBody>
+      </p:sp>
+      <p:sp>
+        <p:nvSpPr>
+          <p:cNvPr id="12" name="Shape 10"/>
+          <p:cNvSpPr/>
+          <p:nvPr/>
+        </p:nvSpPr>
+        <p:spPr>
+          <a:xfrm>
+            <a:off x="8092440" y="2788920"/>
+            <a:ext cx="3550615" cy="3429000"/>
+          </a:xfrm>
+          <a:prstGeom prst="roundRect">
+            <a:avLst>
+              <a:gd name="adj" fmla="val 2133"/>
+            </a:avLst>
+          </a:prstGeom>
+          <a:solidFill>
+            <a:srgbClr val="EEF2F4"/>
+          </a:solidFill>
+          <a:ln w="12700">
+            <a:solidFill>
+              <a:srgbClr val="EEF2F4"/>
+            </a:solidFill>
+            <a:prstDash val="solid"/>
+          </a:ln>
+        </p:spPr>
+      </p:sp>
+      <p:sp>
+        <p:nvSpPr>
+          <p:cNvPr id="13" name="Text 11"/>
+          <p:cNvSpPr txBox="1"/>
+          <p:nvPr/>
+        </p:nvSpPr>
+        <p:spPr>
+          <a:xfrm>
+            <a:off x="8321040" y="2880360"/>
+            <a:ext cx="3093415" cy="310896"/>
+          </a:xfrm>
+          <a:prstGeom prst="rect">
+            <a:avLst/>
+          </a:prstGeom>
+          <a:noFill/>
+          <a:ln/>
+        </p:spPr>
+        <p:txBody>
+          <a:bodyPr wrap="square" lIns="0" tIns="0" rIns="0" bIns="0" rtlCol="0" anchor="t"/>
+          <a:lstStyle/>
+          <a:p>
+            <a:pPr indent="0" marL="0">
+              <a:buNone/>
+            </a:pPr>
+            <a:r>
+              <a:rPr lang="en-US" sz="1400" b="1" dirty="0">
+                <a:solidFill>
+                  <a:srgbClr val="2F7D4F"/>
+                </a:solidFill>
+                <a:latin typeface="Calibri" pitchFamily="34" charset="0"/>
+                <a:ea typeface="Calibri" pitchFamily="34" charset="-122"/>
+                <a:cs typeface="Calibri" pitchFamily="34" charset="-120"/>
+              </a:rPr>
+              <a:t>You should see</a:t>
+            </a:r>
+            <a:endParaRPr lang="en-US" sz="1400" dirty="0"/>
+          </a:p>
+        </p:txBody>
+      </p:sp>
+      <p:sp>
+        <p:nvSpPr>
+          <p:cNvPr id="14" name="Text 12"/>
+          <p:cNvSpPr txBox="1"/>
+          <p:nvPr/>
+        </p:nvSpPr>
+        <p:spPr>
+          <a:xfrm>
+            <a:off x="8321040" y="3246120"/>
+            <a:ext cx="3093415" cy="2862072"/>
+          </a:xfrm>
+          <a:prstGeom prst="rect">
+            <a:avLst/>
+          </a:prstGeom>
+          <a:noFill/>
+          <a:ln/>
+        </p:spPr>
+        <p:txBody>
+          <a:bodyPr wrap="square" lIns="0" tIns="0" rIns="0" bIns="0" rtlCol="0" anchor="t"/>
+          <a:lstStyle/>
+          <a:p>
+            <a:pPr indent="0" marL="0">
+              <a:buNone/>
+            </a:pPr>
+            <a:r>
               <a:rPr lang="en-US" sz="2200" dirty="0">
                 <a:solidFill>
-                  <a:srgbClr val="CFE3EA"/>
-                </a:solidFill>
-                <a:latin typeface="Calibri" pitchFamily="34" charset="0"/>
-                <a:ea typeface="Calibri" pitchFamily="34" charset="-122"/>
-                <a:cs typeface="Calibri" pitchFamily="34" charset="-120"/>
-              </a:rPr>
-              <a:t>Paint with pixels</a:t>
+                  <a:srgbClr val="1B2530"/>
+                </a:solidFill>
+                <a:latin typeface="Calibri" pitchFamily="34" charset="0"/>
+                <a:ea typeface="Calibri" pitchFamily="34" charset="-122"/>
+                <a:cs typeface="Calibri" pitchFamily="34" charset="-120"/>
+              </a:rPr>
+              <a:t>A four-note tune of your own that another pair can play back.</a:t>
             </a:r>
             <a:endParaRPr lang="en-US" sz="2200" dirty="0"/>
           </a:p>
@@ -8782,7 +8859,7 @@
             <a:lvl1pPr>
               <a:defRPr sz="1000">
                 <a:solidFill>
-                  <a:srgbClr val="CFE3EA"/>
+                  <a:srgbClr val="5B6B78"/>
                 </a:solidFill>
                 <a:latin typeface="Calibri"/>
                 <a:ea typeface="Calibri"/>
@@ -8827,16 +8904,14 @@
       </p:grpSpPr>
       <p:sp>
         <p:nvSpPr>
-          <p:cNvPr id="2" name="Text 1"/>
-          <p:cNvSpPr/>
-          <p:nvPr>
-            <p:ph idx="101" type="title" hasCustomPrompt="1"/>
-          </p:nvPr>
-        </p:nvSpPr>
-        <p:spPr>
-          <a:xfrm>
-            <a:off x="548640" y="384048"/>
-            <a:ext cx="11094415" cy="868680"/>
+          <p:cNvPr id="2" name="Text 0"/>
+          <p:cNvSpPr txBox="1"/>
+          <p:nvPr/>
+        </p:nvSpPr>
+        <p:spPr>
+          <a:xfrm>
+            <a:off x="548640" y="1371600"/>
+            <a:ext cx="2743200" cy="1188720"/>
           </a:xfrm>
           <a:prstGeom prst="rect">
             <a:avLst/>
@@ -8845,24 +8920,24 @@
           <a:ln/>
         </p:spPr>
         <p:txBody>
-          <a:bodyPr wrap="square" lIns="0" tIns="0" rIns="0" bIns="0" rtlCol="0" anchor="ctr"/>
-          <a:lstStyle/>
-          <a:p>
-            <a:pPr algn="l" indent="0" marL="0">
-              <a:buNone/>
-            </a:pPr>
-            <a:r>
-              <a:rPr lang="en-US" sz="3000" b="1" dirty="0">
-                <a:solidFill>
-                  <a:srgbClr val="2E4A62"/>
+          <a:bodyPr wrap="square" lIns="0" tIns="0" rIns="0" bIns="0" rtlCol="0" anchor="t"/>
+          <a:lstStyle/>
+          <a:p>
+            <a:pPr indent="0" marL="0">
+              <a:buNone/>
+            </a:pPr>
+            <a:r>
+              <a:rPr lang="en-US" sz="8000" b="1" dirty="0">
+                <a:solidFill>
+                  <a:srgbClr val="B9A4E3"/>
                 </a:solidFill>
                 <a:latin typeface="Cambria" pitchFamily="34" charset="0"/>
                 <a:ea typeface="Cambria" pitchFamily="34" charset="-122"/>
                 <a:cs typeface="Cambria" pitchFamily="34" charset="-120"/>
               </a:rPr>
-              <a:t>A lemon with a face</a:t>
-            </a:r>
-            <a:endParaRPr lang="en-US" sz="3000" dirty="0"/>
+              <a:t>03</a:t>
+            </a:r>
+            <a:endParaRPr lang="en-US" sz="8000" dirty="0"/>
           </a:p>
         </p:txBody>
       </p:sp>
@@ -8874,55 +8949,8 @@
         </p:nvSpPr>
         <p:spPr>
           <a:xfrm>
-            <a:off x="548640" y="1481328"/>
-            <a:ext cx="438912" cy="438912"/>
-          </a:xfrm>
-          <a:prstGeom prst="roundRect">
-            <a:avLst>
-              <a:gd name="adj" fmla="val 16667"/>
-            </a:avLst>
-          </a:prstGeom>
-          <a:solidFill>
-            <a:srgbClr val="6B4FA0"/>
-          </a:solidFill>
-          <a:ln>
-            <a:solidFill>
-              <a:srgbClr val="6B4FA0"/>
-            </a:solidFill>
-          </a:ln>
-        </p:spPr>
-        <p:txBody>
-          <a:bodyPr wrap="square" lIns="0" tIns="0" rIns="0" bIns="0" rtlCol="0" anchor="ctr"/>
-          <a:lstStyle/>
-          <a:p>
-            <a:pPr algn="ctr" indent="0" marL="0">
-              <a:buNone/>
-            </a:pPr>
-            <a:r>
-              <a:rPr lang="en-US" sz="1600" b="1" dirty="0">
-                <a:solidFill>
-                  <a:srgbClr val="FFFFFF"/>
-                </a:solidFill>
-                <a:latin typeface="Calibri" pitchFamily="34" charset="0"/>
-                <a:ea typeface="Calibri" pitchFamily="34" charset="-122"/>
-                <a:cs typeface="Calibri" pitchFamily="34" charset="-120"/>
-              </a:rPr>
-              <a:t>1</a:t>
-            </a:r>
-            <a:endParaRPr lang="en-US" sz="1600" dirty="0"/>
-          </a:p>
-        </p:txBody>
-      </p:sp>
-      <p:sp>
-        <p:nvSpPr>
-          <p:cNvPr id="4" name="Text 2"/>
-          <p:cNvSpPr txBox="1"/>
-          <p:nvPr/>
-        </p:nvSpPr>
-        <p:spPr>
-          <a:xfrm>
-            <a:off x="1234440" y="1463040"/>
-            <a:ext cx="6446520" cy="475488"/>
+            <a:off x="548640" y="2834640"/>
+            <a:ext cx="11094415" cy="1371600"/>
           </a:xfrm>
           <a:prstGeom prst="rect">
             <a:avLst/>
@@ -8938,331 +8966,7 @@
               <a:buNone/>
             </a:pPr>
             <a:r>
-              <a:rPr lang="en-US" sz="2400" dirty="0">
-                <a:solidFill>
-                  <a:srgbClr val="1B2530"/>
-                </a:solidFill>
-                <a:latin typeface="Calibri" pitchFamily="34" charset="0"/>
-                <a:ea typeface="Calibri" pitchFamily="34" charset="-122"/>
-                <a:cs typeface="Calibri" pitchFamily="34" charset="-120"/>
-              </a:rPr>
-              <a:t>Click Sprite Lab at the top</a:t>
-            </a:r>
-            <a:endParaRPr lang="en-US" sz="2400" dirty="0"/>
-          </a:p>
-        </p:txBody>
-      </p:sp>
-      <p:sp>
-        <p:nvSpPr>
-          <p:cNvPr id="5" name="Text 3"/>
-          <p:cNvSpPr txBox="1"/>
-          <p:nvPr/>
-        </p:nvSpPr>
-        <p:spPr>
-          <a:xfrm>
-            <a:off x="548640" y="2706624"/>
-            <a:ext cx="438912" cy="438912"/>
-          </a:xfrm>
-          <a:prstGeom prst="roundRect">
-            <a:avLst>
-              <a:gd name="adj" fmla="val 16667"/>
-            </a:avLst>
-          </a:prstGeom>
-          <a:solidFill>
-            <a:srgbClr val="6B4FA0"/>
-          </a:solidFill>
-          <a:ln>
-            <a:solidFill>
-              <a:srgbClr val="6B4FA0"/>
-            </a:solidFill>
-          </a:ln>
-        </p:spPr>
-        <p:txBody>
-          <a:bodyPr wrap="square" lIns="0" tIns="0" rIns="0" bIns="0" rtlCol="0" anchor="ctr"/>
-          <a:lstStyle/>
-          <a:p>
-            <a:pPr algn="ctr" indent="0" marL="0">
-              <a:buNone/>
-            </a:pPr>
-            <a:r>
-              <a:rPr lang="en-US" sz="1600" b="1" dirty="0">
-                <a:solidFill>
-                  <a:srgbClr val="FFFFFF"/>
-                </a:solidFill>
-                <a:latin typeface="Calibri" pitchFamily="34" charset="0"/>
-                <a:ea typeface="Calibri" pitchFamily="34" charset="-122"/>
-                <a:cs typeface="Calibri" pitchFamily="34" charset="-120"/>
-              </a:rPr>
-              <a:t>2</a:t>
-            </a:r>
-            <a:endParaRPr lang="en-US" sz="1600" dirty="0"/>
-          </a:p>
-        </p:txBody>
-      </p:sp>
-      <p:sp>
-        <p:nvSpPr>
-          <p:cNvPr id="6" name="Text 4"/>
-          <p:cNvSpPr txBox="1"/>
-          <p:nvPr/>
-        </p:nvSpPr>
-        <p:spPr>
-          <a:xfrm>
-            <a:off x="1234440" y="2688336"/>
-            <a:ext cx="6446520" cy="475488"/>
-          </a:xfrm>
-          <a:prstGeom prst="rect">
-            <a:avLst/>
-          </a:prstGeom>
-          <a:noFill/>
-          <a:ln/>
-        </p:spPr>
-        <p:txBody>
-          <a:bodyPr wrap="square" lIns="0" tIns="0" rIns="0" bIns="0" rtlCol="0" anchor="ctr"/>
-          <a:lstStyle/>
-          <a:p>
-            <a:pPr indent="0" marL="0">
-              <a:buNone/>
-            </a:pPr>
-            <a:r>
-              <a:rPr lang="en-US" sz="2400" dirty="0">
-                <a:solidFill>
-                  <a:srgbClr val="1B2530"/>
-                </a:solidFill>
-                <a:latin typeface="Calibri" pitchFamily="34" charset="0"/>
-                <a:ea typeface="Calibri" pitchFamily="34" charset="-122"/>
-                <a:cs typeface="Calibri" pitchFamily="34" charset="-120"/>
-              </a:rPr>
-              <a:t>New Sprite: name it lemon, 16 by 16</a:t>
-            </a:r>
-            <a:endParaRPr lang="en-US" sz="2400" dirty="0"/>
-          </a:p>
-        </p:txBody>
-      </p:sp>
-      <p:sp>
-        <p:nvSpPr>
-          <p:cNvPr id="7" name="Text 5"/>
-          <p:cNvSpPr txBox="1"/>
-          <p:nvPr/>
-        </p:nvSpPr>
-        <p:spPr>
-          <a:xfrm>
-            <a:off x="548640" y="3931920"/>
-            <a:ext cx="438912" cy="438912"/>
-          </a:xfrm>
-          <a:prstGeom prst="roundRect">
-            <a:avLst>
-              <a:gd name="adj" fmla="val 16667"/>
-            </a:avLst>
-          </a:prstGeom>
-          <a:solidFill>
-            <a:srgbClr val="6B4FA0"/>
-          </a:solidFill>
-          <a:ln>
-            <a:solidFill>
-              <a:srgbClr val="6B4FA0"/>
-            </a:solidFill>
-          </a:ln>
-        </p:spPr>
-        <p:txBody>
-          <a:bodyPr wrap="square" lIns="0" tIns="0" rIns="0" bIns="0" rtlCol="0" anchor="ctr"/>
-          <a:lstStyle/>
-          <a:p>
-            <a:pPr algn="ctr" indent="0" marL="0">
-              <a:buNone/>
-            </a:pPr>
-            <a:r>
-              <a:rPr lang="en-US" sz="1600" b="1" dirty="0">
-                <a:solidFill>
-                  <a:srgbClr val="FFFFFF"/>
-                </a:solidFill>
-                <a:latin typeface="Calibri" pitchFamily="34" charset="0"/>
-                <a:ea typeface="Calibri" pitchFamily="34" charset="-122"/>
-                <a:cs typeface="Calibri" pitchFamily="34" charset="-120"/>
-              </a:rPr>
-              <a:t>3</a:t>
-            </a:r>
-            <a:endParaRPr lang="en-US" sz="1600" dirty="0"/>
-          </a:p>
-        </p:txBody>
-      </p:sp>
-      <p:sp>
-        <p:nvSpPr>
-          <p:cNvPr id="8" name="Text 6"/>
-          <p:cNvSpPr txBox="1"/>
-          <p:nvPr/>
-        </p:nvSpPr>
-        <p:spPr>
-          <a:xfrm>
-            <a:off x="1234440" y="3913632"/>
-            <a:ext cx="6446520" cy="1078992"/>
-          </a:xfrm>
-          <a:prstGeom prst="rect">
-            <a:avLst/>
-          </a:prstGeom>
-          <a:noFill/>
-          <a:ln/>
-        </p:spPr>
-        <p:txBody>
-          <a:bodyPr wrap="square" lIns="0" tIns="0" rIns="0" bIns="0" rtlCol="0" anchor="t"/>
-          <a:lstStyle/>
-          <a:p>
-            <a:pPr indent="0" marL="0">
-              <a:buNone/>
-            </a:pPr>
-            <a:r>
-              <a:rPr lang="en-US" sz="2400" dirty="0">
-                <a:solidFill>
-                  <a:srgbClr val="1B2530"/>
-                </a:solidFill>
-                <a:latin typeface="Calibri" pitchFamily="34" charset="0"/>
-                <a:ea typeface="Calibri" pitchFamily="34" charset="-122"/>
-                <a:cs typeface="Calibri" pitchFamily="34" charset="-120"/>
-              </a:rPr>
-              <a:t>Paint a yellow lemon; give it eyes and a smile</a:t>
-            </a:r>
-            <a:endParaRPr lang="en-US" sz="2400" dirty="0"/>
-          </a:p>
-        </p:txBody>
-      </p:sp>
-      <p:sp>
-        <p:nvSpPr>
-          <p:cNvPr id="9" name="Text 7"/>
-          <p:cNvSpPr txBox="1"/>
-          <p:nvPr/>
-        </p:nvSpPr>
-        <p:spPr>
-          <a:xfrm>
-            <a:off x="548640" y="5157216"/>
-            <a:ext cx="438912" cy="438912"/>
-          </a:xfrm>
-          <a:prstGeom prst="roundRect">
-            <a:avLst>
-              <a:gd name="adj" fmla="val 16667"/>
-            </a:avLst>
-          </a:prstGeom>
-          <a:solidFill>
-            <a:srgbClr val="6B4FA0"/>
-          </a:solidFill>
-          <a:ln>
-            <a:solidFill>
-              <a:srgbClr val="6B4FA0"/>
-            </a:solidFill>
-          </a:ln>
-        </p:spPr>
-        <p:txBody>
-          <a:bodyPr wrap="square" lIns="0" tIns="0" rIns="0" bIns="0" rtlCol="0" anchor="ctr"/>
-          <a:lstStyle/>
-          <a:p>
-            <a:pPr algn="ctr" indent="0" marL="0">
-              <a:buNone/>
-            </a:pPr>
-            <a:r>
-              <a:rPr lang="en-US" sz="1600" b="1" dirty="0">
-                <a:solidFill>
-                  <a:srgbClr val="FFFFFF"/>
-                </a:solidFill>
-                <a:latin typeface="Calibri" pitchFamily="34" charset="0"/>
-                <a:ea typeface="Calibri" pitchFamily="34" charset="-122"/>
-                <a:cs typeface="Calibri" pitchFamily="34" charset="-120"/>
-              </a:rPr>
-              <a:t>4</a:t>
-            </a:r>
-            <a:endParaRPr lang="en-US" sz="1600" dirty="0"/>
-          </a:p>
-        </p:txBody>
-      </p:sp>
-      <p:sp>
-        <p:nvSpPr>
-          <p:cNvPr id="10" name="Text 8"/>
-          <p:cNvSpPr txBox="1"/>
-          <p:nvPr/>
-        </p:nvSpPr>
-        <p:spPr>
-          <a:xfrm>
-            <a:off x="1234440" y="5138928"/>
-            <a:ext cx="6446520" cy="475488"/>
-          </a:xfrm>
-          <a:prstGeom prst="rect">
-            <a:avLst/>
-          </a:prstGeom>
-          <a:noFill/>
-          <a:ln/>
-        </p:spPr>
-        <p:txBody>
-          <a:bodyPr wrap="square" lIns="0" tIns="0" rIns="0" bIns="0" rtlCol="0" anchor="ctr"/>
-          <a:lstStyle/>
-          <a:p>
-            <a:pPr indent="0" marL="0">
-              <a:buNone/>
-            </a:pPr>
-            <a:r>
-              <a:rPr lang="en-US" sz="2400" dirty="0">
-                <a:solidFill>
-                  <a:srgbClr val="1B2530"/>
-                </a:solidFill>
-                <a:latin typeface="Calibri" pitchFamily="34" charset="0"/>
-                <a:ea typeface="Calibri" pitchFamily="34" charset="-122"/>
-                <a:cs typeface="Calibri" pitchFamily="34" charset="-120"/>
-              </a:rPr>
-              <a:t>Click Save</a:t>
-            </a:r>
-            <a:endParaRPr lang="en-US" sz="2400" dirty="0"/>
-          </a:p>
-        </p:txBody>
-      </p:sp>
-      <p:sp>
-        <p:nvSpPr>
-          <p:cNvPr id="11" name="Shape 9"/>
-          <p:cNvSpPr/>
-          <p:nvPr/>
-        </p:nvSpPr>
-        <p:spPr>
-          <a:xfrm>
-            <a:off x="8092440" y="1463040"/>
-            <a:ext cx="3550615" cy="1143000"/>
-          </a:xfrm>
-          <a:prstGeom prst="roundRect">
-            <a:avLst>
-              <a:gd name="adj" fmla="val 6400"/>
-            </a:avLst>
-          </a:prstGeom>
-          <a:solidFill>
-            <a:srgbClr val="1B2530"/>
-          </a:solidFill>
-          <a:ln w="12700">
-            <a:solidFill>
-              <a:srgbClr val="1B2530"/>
-            </a:solidFill>
-            <a:prstDash val="solid"/>
-          </a:ln>
-        </p:spPr>
-      </p:sp>
-      <p:sp>
-        <p:nvSpPr>
-          <p:cNvPr id="12" name="Text 10"/>
-          <p:cNvSpPr txBox="1"/>
-          <p:nvPr/>
-        </p:nvSpPr>
-        <p:spPr>
-          <a:xfrm>
-            <a:off x="8321040" y="1600200"/>
-            <a:ext cx="3093415" cy="457200"/>
-          </a:xfrm>
-          <a:prstGeom prst="rect">
-            <a:avLst/>
-          </a:prstGeom>
-          <a:noFill/>
-          <a:ln/>
-        </p:spPr>
-        <p:txBody>
-          <a:bodyPr wrap="square" lIns="0" tIns="0" rIns="0" bIns="0" rtlCol="0" anchor="t"/>
-          <a:lstStyle/>
-          <a:p>
-            <a:pPr indent="0" marL="0">
-              <a:buNone/>
-            </a:pPr>
-            <a:r>
-              <a:rPr lang="en-US" sz="2200" b="1" dirty="0">
+              <a:rPr lang="en-US" sz="4200" b="1" dirty="0">
                 <a:solidFill>
                   <a:srgbClr val="FFFFFF"/>
                 </a:solidFill>
@@ -9270,22 +8974,22 @@
                 <a:ea typeface="Cambria" pitchFamily="34" charset="-122"/>
                 <a:cs typeface="Cambria" pitchFamily="34" charset="-120"/>
               </a:rPr>
-              <a:t>Step 8</a:t>
-            </a:r>
-            <a:endParaRPr lang="en-US" sz="2200" dirty="0"/>
-          </a:p>
-        </p:txBody>
-      </p:sp>
-      <p:sp>
-        <p:nvSpPr>
-          <p:cNvPr id="13" name="Text 11"/>
-          <p:cNvSpPr txBox="1"/>
-          <p:nvPr/>
-        </p:nvSpPr>
-        <p:spPr>
-          <a:xfrm>
-            <a:off x="8321040" y="2084832"/>
-            <a:ext cx="3093415" cy="365760"/>
+              <a:t>Sprite Lab</a:t>
+            </a:r>
+            <a:endParaRPr lang="en-US" sz="4200" dirty="0"/>
+          </a:p>
+        </p:txBody>
+      </p:sp>
+      <p:sp>
+        <p:nvSpPr>
+          <p:cNvPr id="4" name="Text 2"/>
+          <p:cNvSpPr txBox="1"/>
+          <p:nvPr/>
+        </p:nvSpPr>
+        <p:spPr>
+          <a:xfrm>
+            <a:off x="548640" y="4389120"/>
+            <a:ext cx="11094415" cy="1097280"/>
           </a:xfrm>
           <a:prstGeom prst="rect">
             <a:avLst/>
@@ -9301,7 +9005,7 @@
               <a:buNone/>
             </a:pPr>
             <a:r>
-              <a:rPr lang="en-US" sz="1600" dirty="0">
+              <a:rPr lang="en-US" sz="2200" dirty="0">
                 <a:solidFill>
                   <a:srgbClr val="CFE3EA"/>
                 </a:solidFill>
@@ -9309,112 +9013,7 @@
                 <a:ea typeface="Calibri" pitchFamily="34" charset="-122"/>
                 <a:cs typeface="Calibri" pitchFamily="34" charset="-120"/>
               </a:rPr>
-              <a:t>about 7 min</a:t>
-            </a:r>
-            <a:endParaRPr lang="en-US" sz="1600" dirty="0"/>
-          </a:p>
-        </p:txBody>
-      </p:sp>
-      <p:sp>
-        <p:nvSpPr>
-          <p:cNvPr id="14" name="Shape 12"/>
-          <p:cNvSpPr/>
-          <p:nvPr/>
-        </p:nvSpPr>
-        <p:spPr>
-          <a:xfrm>
-            <a:off x="8092440" y="2834640"/>
-            <a:ext cx="3550615" cy="3383280"/>
-          </a:xfrm>
-          <a:prstGeom prst="roundRect">
-            <a:avLst>
-              <a:gd name="adj" fmla="val 2162"/>
-            </a:avLst>
-          </a:prstGeom>
-          <a:solidFill>
-            <a:srgbClr val="EEF2F4"/>
-          </a:solidFill>
-          <a:ln w="12700">
-            <a:solidFill>
-              <a:srgbClr val="EEF2F4"/>
-            </a:solidFill>
-            <a:prstDash val="solid"/>
-          </a:ln>
-        </p:spPr>
-      </p:sp>
-      <p:sp>
-        <p:nvSpPr>
-          <p:cNvPr id="15" name="Text 13"/>
-          <p:cNvSpPr txBox="1"/>
-          <p:nvPr/>
-        </p:nvSpPr>
-        <p:spPr>
-          <a:xfrm>
-            <a:off x="8321040" y="2971800"/>
-            <a:ext cx="3093415" cy="365760"/>
-          </a:xfrm>
-          <a:prstGeom prst="rect">
-            <a:avLst/>
-          </a:prstGeom>
-          <a:noFill/>
-          <a:ln/>
-        </p:spPr>
-        <p:txBody>
-          <a:bodyPr wrap="square" lIns="0" tIns="0" rIns="0" bIns="0" rtlCol="0" anchor="t"/>
-          <a:lstStyle/>
-          <a:p>
-            <a:pPr indent="0" marL="0">
-              <a:buNone/>
-            </a:pPr>
-            <a:r>
-              <a:rPr lang="en-US" sz="1500" b="1" dirty="0">
-                <a:solidFill>
-                  <a:srgbClr val="2F7D4F"/>
-                </a:solidFill>
-                <a:latin typeface="Calibri" pitchFamily="34" charset="0"/>
-                <a:ea typeface="Calibri" pitchFamily="34" charset="-122"/>
-                <a:cs typeface="Calibri" pitchFamily="34" charset="-120"/>
-              </a:rPr>
-              <a:t>You should see</a:t>
-            </a:r>
-            <a:endParaRPr lang="en-US" sz="1500" dirty="0"/>
-          </a:p>
-        </p:txBody>
-      </p:sp>
-      <p:sp>
-        <p:nvSpPr>
-          <p:cNvPr id="16" name="Text 14"/>
-          <p:cNvSpPr txBox="1"/>
-          <p:nvPr/>
-        </p:nvSpPr>
-        <p:spPr>
-          <a:xfrm>
-            <a:off x="8321040" y="3429000"/>
-            <a:ext cx="3093415" cy="2606040"/>
-          </a:xfrm>
-          <a:prstGeom prst="rect">
-            <a:avLst/>
-          </a:prstGeom>
-          <a:noFill/>
-          <a:ln/>
-        </p:spPr>
-        <p:txBody>
-          <a:bodyPr wrap="square" lIns="0" tIns="0" rIns="0" bIns="0" rtlCol="0" anchor="t"/>
-          <a:lstStyle/>
-          <a:p>
-            <a:pPr indent="0" marL="0">
-              <a:buNone/>
-            </a:pPr>
-            <a:r>
-              <a:rPr lang="en-US" sz="2200" dirty="0">
-                <a:solidFill>
-                  <a:srgbClr val="1B2530"/>
-                </a:solidFill>
-                <a:latin typeface="Calibri" pitchFamily="34" charset="0"/>
-                <a:ea typeface="Calibri" pitchFamily="34" charset="-122"/>
-                <a:cs typeface="Calibri" pitchFamily="34" charset="-120"/>
-              </a:rPr>
-              <a:t>Your own 16 by 16 picture, saved with your name on it.</a:t>
+              <a:t>Paint with pixels</a:t>
             </a:r>
             <a:endParaRPr lang="en-US" sz="2200" dirty="0"/>
           </a:p>
@@ -9450,7 +9049,7 @@
             <a:lvl1pPr>
               <a:defRPr sz="1000">
                 <a:solidFill>
-                  <a:srgbClr val="5B6B78"/>
+                  <a:srgbClr val="CFE3EA"/>
                 </a:solidFill>
                 <a:latin typeface="Calibri"/>
                 <a:ea typeface="Calibri"/>
@@ -10072,7 +9671,7 @@
                 <a:ea typeface="Cambria" pitchFamily="34" charset="-122"/>
                 <a:cs typeface="Cambria" pitchFamily="34" charset="-120"/>
               </a:rPr>
-              <a:t>Count the pixels</a:t>
+              <a:t>A lemon with a face</a:t>
             </a:r>
             <a:endParaRPr lang="en-US" sz="3000" dirty="0"/>
           </a:p>
@@ -10158,7 +9757,7 @@
                 <a:ea typeface="Calibri" pitchFamily="34" charset="-122"/>
                 <a:cs typeface="Calibri" pitchFamily="34" charset="-120"/>
               </a:rPr>
-              <a:t>How many pixels across?</a:t>
+              <a:t>Click Sprite Lab at the top</a:t>
             </a:r>
             <a:endParaRPr lang="en-US" sz="2400" dirty="0"/>
           </a:p>
@@ -10244,7 +9843,7 @@
                 <a:ea typeface="Calibri" pitchFamily="34" charset="-122"/>
                 <a:cs typeface="Calibri" pitchFamily="34" charset="-120"/>
               </a:rPr>
-              <a:t>How many down?</a:t>
+              <a:t>New Sprite: name it lemon, 16 by 16</a:t>
             </a:r>
             <a:endParaRPr lang="en-US" sz="2400" dirty="0"/>
           </a:p>
@@ -10306,7 +9905,7 @@
         <p:spPr>
           <a:xfrm>
             <a:off x="1234440" y="3913632"/>
-            <a:ext cx="6446520" cy="475488"/>
+            <a:ext cx="6446520" cy="1078992"/>
           </a:xfrm>
           <a:prstGeom prst="rect">
             <a:avLst/>
@@ -10315,7 +9914,7 @@
           <a:ln/>
         </p:spPr>
         <p:txBody>
-          <a:bodyPr wrap="square" lIns="0" tIns="0" rIns="0" bIns="0" rtlCol="0" anchor="ctr"/>
+          <a:bodyPr wrap="square" lIns="0" tIns="0" rIns="0" bIns="0" rtlCol="0" anchor="t"/>
           <a:lstStyle/>
           <a:p>
             <a:pPr indent="0" marL="0">
@@ -10330,7 +9929,7 @@
                 <a:ea typeface="Calibri" pitchFamily="34" charset="-122"/>
                 <a:cs typeface="Calibri" pitchFamily="34" charset="-120"/>
               </a:rPr>
-              <a:t>How many altogether? (16 times 16)</a:t>
+              <a:t>Paint a yellow lemon; give it eyes and a smile</a:t>
             </a:r>
             <a:endParaRPr lang="en-US" sz="2400" dirty="0"/>
           </a:p>
@@ -10392,7 +9991,7 @@
         <p:spPr>
           <a:xfrm>
             <a:off x="1234440" y="5138928"/>
-            <a:ext cx="6446520" cy="1078992"/>
+            <a:ext cx="6446520" cy="475488"/>
           </a:xfrm>
           <a:prstGeom prst="rect">
             <a:avLst/>
@@ -10401,7 +10000,7 @@
           <a:ln/>
         </p:spPr>
         <p:txBody>
-          <a:bodyPr wrap="square" lIns="0" tIns="0" rIns="0" bIns="0" rtlCol="0" anchor="t"/>
+          <a:bodyPr wrap="square" lIns="0" tIns="0" rIns="0" bIns="0" rtlCol="0" anchor="ctr"/>
           <a:lstStyle/>
           <a:p>
             <a:pPr indent="0" marL="0">
@@ -10416,7 +10015,7 @@
                 <a:ea typeface="Calibri" pitchFamily="34" charset="-122"/>
                 <a:cs typeface="Calibri" pitchFamily="34" charset="-120"/>
               </a:rPr>
-              <a:t>Click Convert to C: how many numbers do you see?</a:t>
+              <a:t>Click Save</a:t>
             </a:r>
             <a:endParaRPr lang="en-US" sz="2400" dirty="0"/>
           </a:p>
@@ -10482,7 +10081,7 @@
                 <a:ea typeface="Cambria" pitchFamily="34" charset="-122"/>
                 <a:cs typeface="Cambria" pitchFamily="34" charset="-120"/>
               </a:rPr>
-              <a:t>Step 9</a:t>
+              <a:t>Step 8</a:t>
             </a:r>
             <a:endParaRPr lang="en-US" sz="2200" dirty="0"/>
           </a:p>
@@ -10521,7 +10120,7 @@
                 <a:ea typeface="Calibri" pitchFamily="34" charset="-122"/>
                 <a:cs typeface="Calibri" pitchFamily="34" charset="-120"/>
               </a:rPr>
-              <a:t>about 2 min</a:t>
+              <a:t>about 7 min</a:t>
             </a:r>
             <a:endParaRPr lang="en-US" sz="1600" dirty="0"/>
           </a:p>
@@ -10535,12 +10134,12 @@
         </p:nvSpPr>
         <p:spPr>
           <a:xfrm>
-            <a:off x="8092440" y="2834640"/>
-            <a:ext cx="3550615" cy="3383280"/>
+            <a:off x="8092440" y="2788920"/>
+            <a:ext cx="3550615" cy="3429000"/>
           </a:xfrm>
           <a:prstGeom prst="roundRect">
             <a:avLst>
-              <a:gd name="adj" fmla="val 2162"/>
+              <a:gd name="adj" fmla="val 2133"/>
             </a:avLst>
           </a:prstGeom>
           <a:solidFill>
@@ -10562,8 +10161,8 @@
         </p:nvSpPr>
         <p:spPr>
           <a:xfrm>
-            <a:off x="8321040" y="2971800"/>
-            <a:ext cx="3093415" cy="365760"/>
+            <a:off x="8321040" y="2880360"/>
+            <a:ext cx="3093415" cy="310896"/>
           </a:xfrm>
           <a:prstGeom prst="rect">
             <a:avLst/>
@@ -10579,7 +10178,7 @@
               <a:buNone/>
             </a:pPr>
             <a:r>
-              <a:rPr lang="en-US" sz="1500" b="1" dirty="0">
+              <a:rPr lang="en-US" sz="1400" b="1" dirty="0">
                 <a:solidFill>
                   <a:srgbClr val="2F7D4F"/>
                 </a:solidFill>
@@ -10589,7 +10188,7 @@
               </a:rPr>
               <a:t>You should see</a:t>
             </a:r>
-            <a:endParaRPr lang="en-US" sz="1500" dirty="0"/>
+            <a:endParaRPr lang="en-US" sz="1400" dirty="0"/>
           </a:p>
         </p:txBody>
       </p:sp>
@@ -10601,8 +10200,8 @@
         </p:nvSpPr>
         <p:spPr>
           <a:xfrm>
-            <a:off x="8321040" y="3429000"/>
-            <a:ext cx="3093415" cy="2606040"/>
+            <a:off x="8321040" y="3246120"/>
+            <a:ext cx="3093415" cy="2862072"/>
           </a:xfrm>
           <a:prstGeom prst="rect">
             <a:avLst/>
@@ -10626,7 +10225,7 @@
                 <a:ea typeface="Calibri" pitchFamily="34" charset="-122"/>
                 <a:cs typeface="Calibri" pitchFamily="34" charset="-120"/>
               </a:rPr>
-              <a:t>16 across, 16 down, 256 in all. The C shows 256 numbers: one for each pixel.</a:t>
+              <a:t>Your own 16 by 16 picture, saved with your name on it.</a:t>
             </a:r>
             <a:endParaRPr lang="en-US" sz="2200" dirty="0"/>
           </a:p>
@@ -10707,14 +10306,16 @@
       </p:grpSpPr>
       <p:sp>
         <p:nvSpPr>
-          <p:cNvPr id="2" name="Text 0"/>
-          <p:cNvSpPr txBox="1"/>
-          <p:nvPr/>
-        </p:nvSpPr>
-        <p:spPr>
-          <a:xfrm>
-            <a:off x="548640" y="1371600"/>
-            <a:ext cx="2743200" cy="1188720"/>
+          <p:cNvPr id="2" name="Text 1"/>
+          <p:cNvSpPr/>
+          <p:nvPr>
+            <p:ph idx="101" type="title" hasCustomPrompt="1"/>
+          </p:nvPr>
+        </p:nvSpPr>
+        <p:spPr>
+          <a:xfrm>
+            <a:off x="548640" y="384048"/>
+            <a:ext cx="11094415" cy="868680"/>
           </a:xfrm>
           <a:prstGeom prst="rect">
             <a:avLst/>
@@ -10723,24 +10324,24 @@
           <a:ln/>
         </p:spPr>
         <p:txBody>
-          <a:bodyPr wrap="square" lIns="0" tIns="0" rIns="0" bIns="0" rtlCol="0" anchor="t"/>
-          <a:lstStyle/>
-          <a:p>
-            <a:pPr indent="0" marL="0">
-              <a:buNone/>
-            </a:pPr>
-            <a:r>
-              <a:rPr lang="en-US" sz="8000" b="1" dirty="0">
-                <a:solidFill>
-                  <a:srgbClr val="B9A4E3"/>
+          <a:bodyPr wrap="square" lIns="0" tIns="0" rIns="0" bIns="0" rtlCol="0" anchor="ctr"/>
+          <a:lstStyle/>
+          <a:p>
+            <a:pPr algn="l" indent="0" marL="0">
+              <a:buNone/>
+            </a:pPr>
+            <a:r>
+              <a:rPr lang="en-US" sz="3000" b="1" dirty="0">
+                <a:solidFill>
+                  <a:srgbClr val="2E4A62"/>
                 </a:solidFill>
                 <a:latin typeface="Cambria" pitchFamily="34" charset="0"/>
                 <a:ea typeface="Cambria" pitchFamily="34" charset="-122"/>
                 <a:cs typeface="Cambria" pitchFamily="34" charset="-120"/>
               </a:rPr>
-              <a:t>04</a:t>
-            </a:r>
-            <a:endParaRPr lang="en-US" sz="8000" dirty="0"/>
+              <a:t>Count the pixels</a:t>
+            </a:r>
+            <a:endParaRPr lang="en-US" sz="3000" dirty="0"/>
           </a:p>
         </p:txBody>
       </p:sp>
@@ -10752,8 +10353,55 @@
         </p:nvSpPr>
         <p:spPr>
           <a:xfrm>
-            <a:off x="548640" y="2834640"/>
-            <a:ext cx="11094415" cy="1371600"/>
+            <a:off x="548640" y="1481328"/>
+            <a:ext cx="438912" cy="438912"/>
+          </a:xfrm>
+          <a:prstGeom prst="roundRect">
+            <a:avLst>
+              <a:gd name="adj" fmla="val 16667"/>
+            </a:avLst>
+          </a:prstGeom>
+          <a:solidFill>
+            <a:srgbClr val="6B4FA0"/>
+          </a:solidFill>
+          <a:ln>
+            <a:solidFill>
+              <a:srgbClr val="6B4FA0"/>
+            </a:solidFill>
+          </a:ln>
+        </p:spPr>
+        <p:txBody>
+          <a:bodyPr wrap="square" lIns="0" tIns="0" rIns="0" bIns="0" rtlCol="0" anchor="ctr"/>
+          <a:lstStyle/>
+          <a:p>
+            <a:pPr algn="ctr" indent="0" marL="0">
+              <a:buNone/>
+            </a:pPr>
+            <a:r>
+              <a:rPr lang="en-US" sz="1600" b="1" dirty="0">
+                <a:solidFill>
+                  <a:srgbClr val="FFFFFF"/>
+                </a:solidFill>
+                <a:latin typeface="Calibri" pitchFamily="34" charset="0"/>
+                <a:ea typeface="Calibri" pitchFamily="34" charset="-122"/>
+                <a:cs typeface="Calibri" pitchFamily="34" charset="-120"/>
+              </a:rPr>
+              <a:t>1</a:t>
+            </a:r>
+            <a:endParaRPr lang="en-US" sz="1600" dirty="0"/>
+          </a:p>
+        </p:txBody>
+      </p:sp>
+      <p:sp>
+        <p:nvSpPr>
+          <p:cNvPr id="4" name="Text 2"/>
+          <p:cNvSpPr txBox="1"/>
+          <p:nvPr/>
+        </p:nvSpPr>
+        <p:spPr>
+          <a:xfrm>
+            <a:off x="1234440" y="1463040"/>
+            <a:ext cx="6446520" cy="475488"/>
           </a:xfrm>
           <a:prstGeom prst="rect">
             <a:avLst/>
@@ -10769,7 +10417,331 @@
               <a:buNone/>
             </a:pPr>
             <a:r>
-              <a:rPr lang="en-US" sz="4200" b="1" dirty="0">
+              <a:rPr lang="en-US" sz="2400" dirty="0">
+                <a:solidFill>
+                  <a:srgbClr val="1B2530"/>
+                </a:solidFill>
+                <a:latin typeface="Calibri" pitchFamily="34" charset="0"/>
+                <a:ea typeface="Calibri" pitchFamily="34" charset="-122"/>
+                <a:cs typeface="Calibri" pitchFamily="34" charset="-120"/>
+              </a:rPr>
+              <a:t>How many pixels across?</a:t>
+            </a:r>
+            <a:endParaRPr lang="en-US" sz="2400" dirty="0"/>
+          </a:p>
+        </p:txBody>
+      </p:sp>
+      <p:sp>
+        <p:nvSpPr>
+          <p:cNvPr id="5" name="Text 3"/>
+          <p:cNvSpPr txBox="1"/>
+          <p:nvPr/>
+        </p:nvSpPr>
+        <p:spPr>
+          <a:xfrm>
+            <a:off x="548640" y="2706624"/>
+            <a:ext cx="438912" cy="438912"/>
+          </a:xfrm>
+          <a:prstGeom prst="roundRect">
+            <a:avLst>
+              <a:gd name="adj" fmla="val 16667"/>
+            </a:avLst>
+          </a:prstGeom>
+          <a:solidFill>
+            <a:srgbClr val="6B4FA0"/>
+          </a:solidFill>
+          <a:ln>
+            <a:solidFill>
+              <a:srgbClr val="6B4FA0"/>
+            </a:solidFill>
+          </a:ln>
+        </p:spPr>
+        <p:txBody>
+          <a:bodyPr wrap="square" lIns="0" tIns="0" rIns="0" bIns="0" rtlCol="0" anchor="ctr"/>
+          <a:lstStyle/>
+          <a:p>
+            <a:pPr algn="ctr" indent="0" marL="0">
+              <a:buNone/>
+            </a:pPr>
+            <a:r>
+              <a:rPr lang="en-US" sz="1600" b="1" dirty="0">
+                <a:solidFill>
+                  <a:srgbClr val="FFFFFF"/>
+                </a:solidFill>
+                <a:latin typeface="Calibri" pitchFamily="34" charset="0"/>
+                <a:ea typeface="Calibri" pitchFamily="34" charset="-122"/>
+                <a:cs typeface="Calibri" pitchFamily="34" charset="-120"/>
+              </a:rPr>
+              <a:t>2</a:t>
+            </a:r>
+            <a:endParaRPr lang="en-US" sz="1600" dirty="0"/>
+          </a:p>
+        </p:txBody>
+      </p:sp>
+      <p:sp>
+        <p:nvSpPr>
+          <p:cNvPr id="6" name="Text 4"/>
+          <p:cNvSpPr txBox="1"/>
+          <p:nvPr/>
+        </p:nvSpPr>
+        <p:spPr>
+          <a:xfrm>
+            <a:off x="1234440" y="2688336"/>
+            <a:ext cx="6446520" cy="475488"/>
+          </a:xfrm>
+          <a:prstGeom prst="rect">
+            <a:avLst/>
+          </a:prstGeom>
+          <a:noFill/>
+          <a:ln/>
+        </p:spPr>
+        <p:txBody>
+          <a:bodyPr wrap="square" lIns="0" tIns="0" rIns="0" bIns="0" rtlCol="0" anchor="ctr"/>
+          <a:lstStyle/>
+          <a:p>
+            <a:pPr indent="0" marL="0">
+              <a:buNone/>
+            </a:pPr>
+            <a:r>
+              <a:rPr lang="en-US" sz="2400" dirty="0">
+                <a:solidFill>
+                  <a:srgbClr val="1B2530"/>
+                </a:solidFill>
+                <a:latin typeface="Calibri" pitchFamily="34" charset="0"/>
+                <a:ea typeface="Calibri" pitchFamily="34" charset="-122"/>
+                <a:cs typeface="Calibri" pitchFamily="34" charset="-120"/>
+              </a:rPr>
+              <a:t>How many down?</a:t>
+            </a:r>
+            <a:endParaRPr lang="en-US" sz="2400" dirty="0"/>
+          </a:p>
+        </p:txBody>
+      </p:sp>
+      <p:sp>
+        <p:nvSpPr>
+          <p:cNvPr id="7" name="Text 5"/>
+          <p:cNvSpPr txBox="1"/>
+          <p:nvPr/>
+        </p:nvSpPr>
+        <p:spPr>
+          <a:xfrm>
+            <a:off x="548640" y="3931920"/>
+            <a:ext cx="438912" cy="438912"/>
+          </a:xfrm>
+          <a:prstGeom prst="roundRect">
+            <a:avLst>
+              <a:gd name="adj" fmla="val 16667"/>
+            </a:avLst>
+          </a:prstGeom>
+          <a:solidFill>
+            <a:srgbClr val="6B4FA0"/>
+          </a:solidFill>
+          <a:ln>
+            <a:solidFill>
+              <a:srgbClr val="6B4FA0"/>
+            </a:solidFill>
+          </a:ln>
+        </p:spPr>
+        <p:txBody>
+          <a:bodyPr wrap="square" lIns="0" tIns="0" rIns="0" bIns="0" rtlCol="0" anchor="ctr"/>
+          <a:lstStyle/>
+          <a:p>
+            <a:pPr algn="ctr" indent="0" marL="0">
+              <a:buNone/>
+            </a:pPr>
+            <a:r>
+              <a:rPr lang="en-US" sz="1600" b="1" dirty="0">
+                <a:solidFill>
+                  <a:srgbClr val="FFFFFF"/>
+                </a:solidFill>
+                <a:latin typeface="Calibri" pitchFamily="34" charset="0"/>
+                <a:ea typeface="Calibri" pitchFamily="34" charset="-122"/>
+                <a:cs typeface="Calibri" pitchFamily="34" charset="-120"/>
+              </a:rPr>
+              <a:t>3</a:t>
+            </a:r>
+            <a:endParaRPr lang="en-US" sz="1600" dirty="0"/>
+          </a:p>
+        </p:txBody>
+      </p:sp>
+      <p:sp>
+        <p:nvSpPr>
+          <p:cNvPr id="8" name="Text 6"/>
+          <p:cNvSpPr txBox="1"/>
+          <p:nvPr/>
+        </p:nvSpPr>
+        <p:spPr>
+          <a:xfrm>
+            <a:off x="1234440" y="3913632"/>
+            <a:ext cx="6446520" cy="475488"/>
+          </a:xfrm>
+          <a:prstGeom prst="rect">
+            <a:avLst/>
+          </a:prstGeom>
+          <a:noFill/>
+          <a:ln/>
+        </p:spPr>
+        <p:txBody>
+          <a:bodyPr wrap="square" lIns="0" tIns="0" rIns="0" bIns="0" rtlCol="0" anchor="ctr"/>
+          <a:lstStyle/>
+          <a:p>
+            <a:pPr indent="0" marL="0">
+              <a:buNone/>
+            </a:pPr>
+            <a:r>
+              <a:rPr lang="en-US" sz="2400" dirty="0">
+                <a:solidFill>
+                  <a:srgbClr val="1B2530"/>
+                </a:solidFill>
+                <a:latin typeface="Calibri" pitchFamily="34" charset="0"/>
+                <a:ea typeface="Calibri" pitchFamily="34" charset="-122"/>
+                <a:cs typeface="Calibri" pitchFamily="34" charset="-120"/>
+              </a:rPr>
+              <a:t>How many altogether? (16 times 16)</a:t>
+            </a:r>
+            <a:endParaRPr lang="en-US" sz="2400" dirty="0"/>
+          </a:p>
+        </p:txBody>
+      </p:sp>
+      <p:sp>
+        <p:nvSpPr>
+          <p:cNvPr id="9" name="Text 7"/>
+          <p:cNvSpPr txBox="1"/>
+          <p:nvPr/>
+        </p:nvSpPr>
+        <p:spPr>
+          <a:xfrm>
+            <a:off x="548640" y="5157216"/>
+            <a:ext cx="438912" cy="438912"/>
+          </a:xfrm>
+          <a:prstGeom prst="roundRect">
+            <a:avLst>
+              <a:gd name="adj" fmla="val 16667"/>
+            </a:avLst>
+          </a:prstGeom>
+          <a:solidFill>
+            <a:srgbClr val="6B4FA0"/>
+          </a:solidFill>
+          <a:ln>
+            <a:solidFill>
+              <a:srgbClr val="6B4FA0"/>
+            </a:solidFill>
+          </a:ln>
+        </p:spPr>
+        <p:txBody>
+          <a:bodyPr wrap="square" lIns="0" tIns="0" rIns="0" bIns="0" rtlCol="0" anchor="ctr"/>
+          <a:lstStyle/>
+          <a:p>
+            <a:pPr algn="ctr" indent="0" marL="0">
+              <a:buNone/>
+            </a:pPr>
+            <a:r>
+              <a:rPr lang="en-US" sz="1600" b="1" dirty="0">
+                <a:solidFill>
+                  <a:srgbClr val="FFFFFF"/>
+                </a:solidFill>
+                <a:latin typeface="Calibri" pitchFamily="34" charset="0"/>
+                <a:ea typeface="Calibri" pitchFamily="34" charset="-122"/>
+                <a:cs typeface="Calibri" pitchFamily="34" charset="-120"/>
+              </a:rPr>
+              <a:t>4</a:t>
+            </a:r>
+            <a:endParaRPr lang="en-US" sz="1600" dirty="0"/>
+          </a:p>
+        </p:txBody>
+      </p:sp>
+      <p:sp>
+        <p:nvSpPr>
+          <p:cNvPr id="10" name="Text 8"/>
+          <p:cNvSpPr txBox="1"/>
+          <p:nvPr/>
+        </p:nvSpPr>
+        <p:spPr>
+          <a:xfrm>
+            <a:off x="1234440" y="5138928"/>
+            <a:ext cx="6446520" cy="1078992"/>
+          </a:xfrm>
+          <a:prstGeom prst="rect">
+            <a:avLst/>
+          </a:prstGeom>
+          <a:noFill/>
+          <a:ln/>
+        </p:spPr>
+        <p:txBody>
+          <a:bodyPr wrap="square" lIns="0" tIns="0" rIns="0" bIns="0" rtlCol="0" anchor="t"/>
+          <a:lstStyle/>
+          <a:p>
+            <a:pPr indent="0" marL="0">
+              <a:buNone/>
+            </a:pPr>
+            <a:r>
+              <a:rPr lang="en-US" sz="2400" dirty="0">
+                <a:solidFill>
+                  <a:srgbClr val="1B2530"/>
+                </a:solidFill>
+                <a:latin typeface="Calibri" pitchFamily="34" charset="0"/>
+                <a:ea typeface="Calibri" pitchFamily="34" charset="-122"/>
+                <a:cs typeface="Calibri" pitchFamily="34" charset="-120"/>
+              </a:rPr>
+              <a:t>Click Convert to C: how many numbers do you see?</a:t>
+            </a:r>
+            <a:endParaRPr lang="en-US" sz="2400" dirty="0"/>
+          </a:p>
+        </p:txBody>
+      </p:sp>
+      <p:sp>
+        <p:nvSpPr>
+          <p:cNvPr id="11" name="Shape 9"/>
+          <p:cNvSpPr/>
+          <p:nvPr/>
+        </p:nvSpPr>
+        <p:spPr>
+          <a:xfrm>
+            <a:off x="8092440" y="1463040"/>
+            <a:ext cx="3550615" cy="1143000"/>
+          </a:xfrm>
+          <a:prstGeom prst="roundRect">
+            <a:avLst>
+              <a:gd name="adj" fmla="val 6400"/>
+            </a:avLst>
+          </a:prstGeom>
+          <a:solidFill>
+            <a:srgbClr val="1B2530"/>
+          </a:solidFill>
+          <a:ln w="12700">
+            <a:solidFill>
+              <a:srgbClr val="1B2530"/>
+            </a:solidFill>
+            <a:prstDash val="solid"/>
+          </a:ln>
+        </p:spPr>
+      </p:sp>
+      <p:sp>
+        <p:nvSpPr>
+          <p:cNvPr id="12" name="Text 10"/>
+          <p:cNvSpPr txBox="1"/>
+          <p:nvPr/>
+        </p:nvSpPr>
+        <p:spPr>
+          <a:xfrm>
+            <a:off x="8321040" y="1600200"/>
+            <a:ext cx="3093415" cy="457200"/>
+          </a:xfrm>
+          <a:prstGeom prst="rect">
+            <a:avLst/>
+          </a:prstGeom>
+          <a:noFill/>
+          <a:ln/>
+        </p:spPr>
+        <p:txBody>
+          <a:bodyPr wrap="square" lIns="0" tIns="0" rIns="0" bIns="0" rtlCol="0" anchor="t"/>
+          <a:lstStyle/>
+          <a:p>
+            <a:pPr indent="0" marL="0">
+              <a:buNone/>
+            </a:pPr>
+            <a:r>
+              <a:rPr lang="en-US" sz="2200" b="1" dirty="0">
                 <a:solidFill>
                   <a:srgbClr val="FFFFFF"/>
                 </a:solidFill>
@@ -10777,22 +10749,22 @@
                 <a:ea typeface="Cambria" pitchFamily="34" charset="-122"/>
                 <a:cs typeface="Cambria" pitchFamily="34" charset="-120"/>
               </a:rPr>
-              <a:t>Peek at the C</a:t>
-            </a:r>
-            <a:endParaRPr lang="en-US" sz="4200" dirty="0"/>
-          </a:p>
-        </p:txBody>
-      </p:sp>
-      <p:sp>
-        <p:nvSpPr>
-          <p:cNvPr id="4" name="Text 2"/>
-          <p:cNvSpPr txBox="1"/>
-          <p:nvPr/>
-        </p:nvSpPr>
-        <p:spPr>
-          <a:xfrm>
-            <a:off x="548640" y="4389120"/>
-            <a:ext cx="11094415" cy="1097280"/>
+              <a:t>Step 9</a:t>
+            </a:r>
+            <a:endParaRPr lang="en-US" sz="2200" dirty="0"/>
+          </a:p>
+        </p:txBody>
+      </p:sp>
+      <p:sp>
+        <p:nvSpPr>
+          <p:cNvPr id="13" name="Text 11"/>
+          <p:cNvSpPr txBox="1"/>
+          <p:nvPr/>
+        </p:nvSpPr>
+        <p:spPr>
+          <a:xfrm>
+            <a:off x="8321040" y="2084832"/>
+            <a:ext cx="3093415" cy="365760"/>
           </a:xfrm>
           <a:prstGeom prst="rect">
             <a:avLst/>
@@ -10808,15 +10780,120 @@
               <a:buNone/>
             </a:pPr>
             <a:r>
+              <a:rPr lang="en-US" sz="1600" dirty="0">
+                <a:solidFill>
+                  <a:srgbClr val="CFE3EA"/>
+                </a:solidFill>
+                <a:latin typeface="Calibri" pitchFamily="34" charset="0"/>
+                <a:ea typeface="Calibri" pitchFamily="34" charset="-122"/>
+                <a:cs typeface="Calibri" pitchFamily="34" charset="-120"/>
+              </a:rPr>
+              <a:t>about 2 min</a:t>
+            </a:r>
+            <a:endParaRPr lang="en-US" sz="1600" dirty="0"/>
+          </a:p>
+        </p:txBody>
+      </p:sp>
+      <p:sp>
+        <p:nvSpPr>
+          <p:cNvPr id="14" name="Shape 12"/>
+          <p:cNvSpPr/>
+          <p:nvPr/>
+        </p:nvSpPr>
+        <p:spPr>
+          <a:xfrm>
+            <a:off x="8092440" y="2788920"/>
+            <a:ext cx="3550615" cy="3429000"/>
+          </a:xfrm>
+          <a:prstGeom prst="roundRect">
+            <a:avLst>
+              <a:gd name="adj" fmla="val 2133"/>
+            </a:avLst>
+          </a:prstGeom>
+          <a:solidFill>
+            <a:srgbClr val="EEF2F4"/>
+          </a:solidFill>
+          <a:ln w="12700">
+            <a:solidFill>
+              <a:srgbClr val="EEF2F4"/>
+            </a:solidFill>
+            <a:prstDash val="solid"/>
+          </a:ln>
+        </p:spPr>
+      </p:sp>
+      <p:sp>
+        <p:nvSpPr>
+          <p:cNvPr id="15" name="Text 13"/>
+          <p:cNvSpPr txBox="1"/>
+          <p:nvPr/>
+        </p:nvSpPr>
+        <p:spPr>
+          <a:xfrm>
+            <a:off x="8321040" y="2880360"/>
+            <a:ext cx="3093415" cy="310896"/>
+          </a:xfrm>
+          <a:prstGeom prst="rect">
+            <a:avLst/>
+          </a:prstGeom>
+          <a:noFill/>
+          <a:ln/>
+        </p:spPr>
+        <p:txBody>
+          <a:bodyPr wrap="square" lIns="0" tIns="0" rIns="0" bIns="0" rtlCol="0" anchor="t"/>
+          <a:lstStyle/>
+          <a:p>
+            <a:pPr indent="0" marL="0">
+              <a:buNone/>
+            </a:pPr>
+            <a:r>
+              <a:rPr lang="en-US" sz="1400" b="1" dirty="0">
+                <a:solidFill>
+                  <a:srgbClr val="2F7D4F"/>
+                </a:solidFill>
+                <a:latin typeface="Calibri" pitchFamily="34" charset="0"/>
+                <a:ea typeface="Calibri" pitchFamily="34" charset="-122"/>
+                <a:cs typeface="Calibri" pitchFamily="34" charset="-120"/>
+              </a:rPr>
+              <a:t>You should see</a:t>
+            </a:r>
+            <a:endParaRPr lang="en-US" sz="1400" dirty="0"/>
+          </a:p>
+        </p:txBody>
+      </p:sp>
+      <p:sp>
+        <p:nvSpPr>
+          <p:cNvPr id="16" name="Text 14"/>
+          <p:cNvSpPr txBox="1"/>
+          <p:nvPr/>
+        </p:nvSpPr>
+        <p:spPr>
+          <a:xfrm>
+            <a:off x="8321040" y="3246120"/>
+            <a:ext cx="3093415" cy="2862072"/>
+          </a:xfrm>
+          <a:prstGeom prst="rect">
+            <a:avLst/>
+          </a:prstGeom>
+          <a:noFill/>
+          <a:ln/>
+        </p:spPr>
+        <p:txBody>
+          <a:bodyPr wrap="square" lIns="0" tIns="0" rIns="0" bIns="0" rtlCol="0" anchor="t"/>
+          <a:lstStyle/>
+          <a:p>
+            <a:pPr indent="0" marL="0">
+              <a:buNone/>
+            </a:pPr>
+            <a:r>
               <a:rPr lang="en-US" sz="2200" dirty="0">
                 <a:solidFill>
-                  <a:srgbClr val="CFE3EA"/>
-                </a:solidFill>
-                <a:latin typeface="Calibri" pitchFamily="34" charset="0"/>
-                <a:ea typeface="Calibri" pitchFamily="34" charset="-122"/>
-                <a:cs typeface="Calibri" pitchFamily="34" charset="-120"/>
-              </a:rPr>
-              <a:t>Under the blocks</a:t>
+                  <a:srgbClr val="1B2530"/>
+                </a:solidFill>
+                <a:latin typeface="Calibri" pitchFamily="34" charset="0"/>
+                <a:ea typeface="Calibri" pitchFamily="34" charset="-122"/>
+                <a:cs typeface="Calibri" pitchFamily="34" charset="-120"/>
+              </a:rPr>
+              <a:t>16 across, 16 down, 256 in all. The C shows 256 numbers: one for each pixel.</a:t>
             </a:r>
             <a:endParaRPr lang="en-US" sz="2200" dirty="0"/>
           </a:p>
@@ -10852,7 +10929,7 @@
             <a:lvl1pPr>
               <a:defRPr sz="1000">
                 <a:solidFill>
-                  <a:srgbClr val="CFE3EA"/>
+                  <a:srgbClr val="5B6B78"/>
                 </a:solidFill>
                 <a:latin typeface="Calibri"/>
                 <a:ea typeface="Calibri"/>
@@ -10897,16 +10974,14 @@
       </p:grpSpPr>
       <p:sp>
         <p:nvSpPr>
-          <p:cNvPr id="2" name="Text 1"/>
-          <p:cNvSpPr/>
-          <p:nvPr>
-            <p:ph idx="101" type="title" hasCustomPrompt="1"/>
-          </p:nvPr>
-        </p:nvSpPr>
-        <p:spPr>
-          <a:xfrm>
-            <a:off x="548640" y="384048"/>
-            <a:ext cx="11094415" cy="868680"/>
+          <p:cNvPr id="2" name="Text 0"/>
+          <p:cNvSpPr txBox="1"/>
+          <p:nvPr/>
+        </p:nvSpPr>
+        <p:spPr>
+          <a:xfrm>
+            <a:off x="548640" y="1371600"/>
+            <a:ext cx="2743200" cy="1188720"/>
           </a:xfrm>
           <a:prstGeom prst="rect">
             <a:avLst/>
@@ -10915,24 +10990,24 @@
           <a:ln/>
         </p:spPr>
         <p:txBody>
-          <a:bodyPr wrap="square" lIns="0" tIns="0" rIns="0" bIns="0" rtlCol="0" anchor="ctr"/>
-          <a:lstStyle/>
-          <a:p>
-            <a:pPr algn="l" indent="0" marL="0">
-              <a:buNone/>
-            </a:pPr>
-            <a:r>
-              <a:rPr lang="en-US" sz="3000" b="1" dirty="0">
-                <a:solidFill>
-                  <a:srgbClr val="2E4A62"/>
+          <a:bodyPr wrap="square" lIns="0" tIns="0" rIns="0" bIns="0" rtlCol="0" anchor="t"/>
+          <a:lstStyle/>
+          <a:p>
+            <a:pPr indent="0" marL="0">
+              <a:buNone/>
+            </a:pPr>
+            <a:r>
+              <a:rPr lang="en-US" sz="8000" b="1" dirty="0">
+                <a:solidFill>
+                  <a:srgbClr val="B9A4E3"/>
                 </a:solidFill>
                 <a:latin typeface="Cambria" pitchFamily="34" charset="0"/>
                 <a:ea typeface="Cambria" pitchFamily="34" charset="-122"/>
                 <a:cs typeface="Cambria" pitchFamily="34" charset="-120"/>
               </a:rPr>
-              <a:t>Find your blocks</a:t>
-            </a:r>
-            <a:endParaRPr lang="en-US" sz="3000" dirty="0"/>
+              <a:t>04</a:t>
+            </a:r>
+            <a:endParaRPr lang="en-US" sz="8000" dirty="0"/>
           </a:p>
         </p:txBody>
       </p:sp>
@@ -10944,55 +11019,8 @@
         </p:nvSpPr>
         <p:spPr>
           <a:xfrm>
-            <a:off x="548640" y="1481328"/>
-            <a:ext cx="438912" cy="438912"/>
-          </a:xfrm>
-          <a:prstGeom prst="roundRect">
-            <a:avLst>
-              <a:gd name="adj" fmla="val 16667"/>
-            </a:avLst>
-          </a:prstGeom>
-          <a:solidFill>
-            <a:srgbClr val="6B4FA0"/>
-          </a:solidFill>
-          <a:ln>
-            <a:solidFill>
-              <a:srgbClr val="6B4FA0"/>
-            </a:solidFill>
-          </a:ln>
-        </p:spPr>
-        <p:txBody>
-          <a:bodyPr wrap="square" lIns="0" tIns="0" rIns="0" bIns="0" rtlCol="0" anchor="ctr"/>
-          <a:lstStyle/>
-          <a:p>
-            <a:pPr algn="ctr" indent="0" marL="0">
-              <a:buNone/>
-            </a:pPr>
-            <a:r>
-              <a:rPr lang="en-US" sz="1600" b="1" dirty="0">
-                <a:solidFill>
-                  <a:srgbClr val="FFFFFF"/>
-                </a:solidFill>
-                <a:latin typeface="Calibri" pitchFamily="34" charset="0"/>
-                <a:ea typeface="Calibri" pitchFamily="34" charset="-122"/>
-                <a:cs typeface="Calibri" pitchFamily="34" charset="-120"/>
-              </a:rPr>
-              <a:t>1</a:t>
-            </a:r>
-            <a:endParaRPr lang="en-US" sz="1600" dirty="0"/>
-          </a:p>
-        </p:txBody>
-      </p:sp>
-      <p:sp>
-        <p:nvSpPr>
-          <p:cNvPr id="4" name="Text 2"/>
-          <p:cNvSpPr txBox="1"/>
-          <p:nvPr/>
-        </p:nvSpPr>
-        <p:spPr>
-          <a:xfrm>
-            <a:off x="1234440" y="1463040"/>
-            <a:ext cx="6446520" cy="475488"/>
+            <a:off x="548640" y="2834640"/>
+            <a:ext cx="11094415" cy="1371600"/>
           </a:xfrm>
           <a:prstGeom prst="rect">
             <a:avLst/>
@@ -11008,331 +11036,7 @@
               <a:buNone/>
             </a:pPr>
             <a:r>
-              <a:rPr lang="en-US" sz="2400" dirty="0">
-                <a:solidFill>
-                  <a:srgbClr val="1B2530"/>
-                </a:solidFill>
-                <a:latin typeface="Calibri" pitchFamily="34" charset="0"/>
-                <a:ea typeface="Calibri" pitchFamily="34" charset="-122"/>
-                <a:cs typeface="Calibri" pitchFamily="34" charset="-120"/>
-              </a:rPr>
-              <a:t>Open Lemon Catcher</a:t>
-            </a:r>
-            <a:endParaRPr lang="en-US" sz="2400" dirty="0"/>
-          </a:p>
-        </p:txBody>
-      </p:sp>
-      <p:sp>
-        <p:nvSpPr>
-          <p:cNvPr id="5" name="Text 3"/>
-          <p:cNvSpPr txBox="1"/>
-          <p:nvPr/>
-        </p:nvSpPr>
-        <p:spPr>
-          <a:xfrm>
-            <a:off x="548640" y="2706624"/>
-            <a:ext cx="438912" cy="438912"/>
-          </a:xfrm>
-          <a:prstGeom prst="roundRect">
-            <a:avLst>
-              <a:gd name="adj" fmla="val 16667"/>
-            </a:avLst>
-          </a:prstGeom>
-          <a:solidFill>
-            <a:srgbClr val="6B4FA0"/>
-          </a:solidFill>
-          <a:ln>
-            <a:solidFill>
-              <a:srgbClr val="6B4FA0"/>
-            </a:solidFill>
-          </a:ln>
-        </p:spPr>
-        <p:txBody>
-          <a:bodyPr wrap="square" lIns="0" tIns="0" rIns="0" bIns="0" rtlCol="0" anchor="ctr"/>
-          <a:lstStyle/>
-          <a:p>
-            <a:pPr algn="ctr" indent="0" marL="0">
-              <a:buNone/>
-            </a:pPr>
-            <a:r>
-              <a:rPr lang="en-US" sz="1600" b="1" dirty="0">
-                <a:solidFill>
-                  <a:srgbClr val="FFFFFF"/>
-                </a:solidFill>
-                <a:latin typeface="Calibri" pitchFamily="34" charset="0"/>
-                <a:ea typeface="Calibri" pitchFamily="34" charset="-122"/>
-                <a:cs typeface="Calibri" pitchFamily="34" charset="-120"/>
-              </a:rPr>
-              <a:t>2</a:t>
-            </a:r>
-            <a:endParaRPr lang="en-US" sz="1600" dirty="0"/>
-          </a:p>
-        </p:txBody>
-      </p:sp>
-      <p:sp>
-        <p:nvSpPr>
-          <p:cNvPr id="6" name="Text 4"/>
-          <p:cNvSpPr txBox="1"/>
-          <p:nvPr/>
-        </p:nvSpPr>
-        <p:spPr>
-          <a:xfrm>
-            <a:off x="1234440" y="2688336"/>
-            <a:ext cx="6446520" cy="475488"/>
-          </a:xfrm>
-          <a:prstGeom prst="rect">
-            <a:avLst/>
-          </a:prstGeom>
-          <a:noFill/>
-          <a:ln/>
-        </p:spPr>
-        <p:txBody>
-          <a:bodyPr wrap="square" lIns="0" tIns="0" rIns="0" bIns="0" rtlCol="0" anchor="ctr"/>
-          <a:lstStyle/>
-          <a:p>
-            <a:pPr indent="0" marL="0">
-              <a:buNone/>
-            </a:pPr>
-            <a:r>
-              <a:rPr lang="en-US" sz="2400" dirty="0">
-                <a:solidFill>
-                  <a:srgbClr val="1B2530"/>
-                </a:solidFill>
-                <a:latin typeface="Calibri" pitchFamily="34" charset="0"/>
-                <a:ea typeface="Calibri" pitchFamily="34" charset="-122"/>
-                <a:cs typeface="Calibri" pitchFamily="34" charset="-120"/>
-              </a:rPr>
-              <a:t>Click Generate C</a:t>
-            </a:r>
-            <a:endParaRPr lang="en-US" sz="2400" dirty="0"/>
-          </a:p>
-        </p:txBody>
-      </p:sp>
-      <p:sp>
-        <p:nvSpPr>
-          <p:cNvPr id="7" name="Text 5"/>
-          <p:cNvSpPr txBox="1"/>
-          <p:nvPr/>
-        </p:nvSpPr>
-        <p:spPr>
-          <a:xfrm>
-            <a:off x="548640" y="3931920"/>
-            <a:ext cx="438912" cy="438912"/>
-          </a:xfrm>
-          <a:prstGeom prst="roundRect">
-            <a:avLst>
-              <a:gd name="adj" fmla="val 16667"/>
-            </a:avLst>
-          </a:prstGeom>
-          <a:solidFill>
-            <a:srgbClr val="6B4FA0"/>
-          </a:solidFill>
-          <a:ln>
-            <a:solidFill>
-              <a:srgbClr val="6B4FA0"/>
-            </a:solidFill>
-          </a:ln>
-        </p:spPr>
-        <p:txBody>
-          <a:bodyPr wrap="square" lIns="0" tIns="0" rIns="0" bIns="0" rtlCol="0" anchor="ctr"/>
-          <a:lstStyle/>
-          <a:p>
-            <a:pPr algn="ctr" indent="0" marL="0">
-              <a:buNone/>
-            </a:pPr>
-            <a:r>
-              <a:rPr lang="en-US" sz="1600" b="1" dirty="0">
-                <a:solidFill>
-                  <a:srgbClr val="FFFFFF"/>
-                </a:solidFill>
-                <a:latin typeface="Calibri" pitchFamily="34" charset="0"/>
-                <a:ea typeface="Calibri" pitchFamily="34" charset="-122"/>
-                <a:cs typeface="Calibri" pitchFamily="34" charset="-120"/>
-              </a:rPr>
-              <a:t>3</a:t>
-            </a:r>
-            <a:endParaRPr lang="en-US" sz="1600" dirty="0"/>
-          </a:p>
-        </p:txBody>
-      </p:sp>
-      <p:sp>
-        <p:nvSpPr>
-          <p:cNvPr id="8" name="Text 6"/>
-          <p:cNvSpPr txBox="1"/>
-          <p:nvPr/>
-        </p:nvSpPr>
-        <p:spPr>
-          <a:xfrm>
-            <a:off x="1234440" y="3913632"/>
-            <a:ext cx="6446520" cy="475488"/>
-          </a:xfrm>
-          <a:prstGeom prst="rect">
-            <a:avLst/>
-          </a:prstGeom>
-          <a:noFill/>
-          <a:ln/>
-        </p:spPr>
-        <p:txBody>
-          <a:bodyPr wrap="square" lIns="0" tIns="0" rIns="0" bIns="0" rtlCol="0" anchor="ctr"/>
-          <a:lstStyle/>
-          <a:p>
-            <a:pPr indent="0" marL="0">
-              <a:buNone/>
-            </a:pPr>
-            <a:r>
-              <a:rPr lang="en-US" sz="2400" dirty="0">
-                <a:solidFill>
-                  <a:srgbClr val="1B2530"/>
-                </a:solidFill>
-                <a:latin typeface="Calibri" pitchFamily="34" charset="0"/>
-                <a:ea typeface="Calibri" pitchFamily="34" charset="-122"/>
-                <a:cs typeface="Calibri" pitchFamily="34" charset="-120"/>
-              </a:rPr>
-              <a:t>Find the line for 'change score by 1'</a:t>
-            </a:r>
-            <a:endParaRPr lang="en-US" sz="2400" dirty="0"/>
-          </a:p>
-        </p:txBody>
-      </p:sp>
-      <p:sp>
-        <p:nvSpPr>
-          <p:cNvPr id="9" name="Text 7"/>
-          <p:cNvSpPr txBox="1"/>
-          <p:nvPr/>
-        </p:nvSpPr>
-        <p:spPr>
-          <a:xfrm>
-            <a:off x="548640" y="5157216"/>
-            <a:ext cx="438912" cy="438912"/>
-          </a:xfrm>
-          <a:prstGeom prst="roundRect">
-            <a:avLst>
-              <a:gd name="adj" fmla="val 16667"/>
-            </a:avLst>
-          </a:prstGeom>
-          <a:solidFill>
-            <a:srgbClr val="6B4FA0"/>
-          </a:solidFill>
-          <a:ln>
-            <a:solidFill>
-              <a:srgbClr val="6B4FA0"/>
-            </a:solidFill>
-          </a:ln>
-        </p:spPr>
-        <p:txBody>
-          <a:bodyPr wrap="square" lIns="0" tIns="0" rIns="0" bIns="0" rtlCol="0" anchor="ctr"/>
-          <a:lstStyle/>
-          <a:p>
-            <a:pPr algn="ctr" indent="0" marL="0">
-              <a:buNone/>
-            </a:pPr>
-            <a:r>
-              <a:rPr lang="en-US" sz="1600" b="1" dirty="0">
-                <a:solidFill>
-                  <a:srgbClr val="FFFFFF"/>
-                </a:solidFill>
-                <a:latin typeface="Calibri" pitchFamily="34" charset="0"/>
-                <a:ea typeface="Calibri" pitchFamily="34" charset="-122"/>
-                <a:cs typeface="Calibri" pitchFamily="34" charset="-120"/>
-              </a:rPr>
-              <a:t>4</a:t>
-            </a:r>
-            <a:endParaRPr lang="en-US" sz="1600" dirty="0"/>
-          </a:p>
-        </p:txBody>
-      </p:sp>
-      <p:sp>
-        <p:nvSpPr>
-          <p:cNvPr id="10" name="Text 8"/>
-          <p:cNvSpPr txBox="1"/>
-          <p:nvPr/>
-        </p:nvSpPr>
-        <p:spPr>
-          <a:xfrm>
-            <a:off x="1234440" y="5138928"/>
-            <a:ext cx="6446520" cy="1078992"/>
-          </a:xfrm>
-          <a:prstGeom prst="rect">
-            <a:avLst/>
-          </a:prstGeom>
-          <a:noFill/>
-          <a:ln/>
-        </p:spPr>
-        <p:txBody>
-          <a:bodyPr wrap="square" lIns="0" tIns="0" rIns="0" bIns="0" rtlCol="0" anchor="t"/>
-          <a:lstStyle/>
-          <a:p>
-            <a:pPr indent="0" marL="0">
-              <a:buNone/>
-            </a:pPr>
-            <a:r>
-              <a:rPr lang="en-US" sz="2400" dirty="0">
-                <a:solidFill>
-                  <a:srgbClr val="1B2530"/>
-                </a:solidFill>
-                <a:latin typeface="Calibri" pitchFamily="34" charset="0"/>
-                <a:ea typeface="Calibri" pitchFamily="34" charset="-122"/>
-                <a:cs typeface="Calibri" pitchFamily="34" charset="-120"/>
-              </a:rPr>
-              <a:t>Find the lines for 'keep basket_x between 0 and 288'</a:t>
-            </a:r>
-            <a:endParaRPr lang="en-US" sz="2400" dirty="0"/>
-          </a:p>
-        </p:txBody>
-      </p:sp>
-      <p:sp>
-        <p:nvSpPr>
-          <p:cNvPr id="11" name="Shape 9"/>
-          <p:cNvSpPr/>
-          <p:nvPr/>
-        </p:nvSpPr>
-        <p:spPr>
-          <a:xfrm>
-            <a:off x="8092440" y="1463040"/>
-            <a:ext cx="3550615" cy="1143000"/>
-          </a:xfrm>
-          <a:prstGeom prst="roundRect">
-            <a:avLst>
-              <a:gd name="adj" fmla="val 6400"/>
-            </a:avLst>
-          </a:prstGeom>
-          <a:solidFill>
-            <a:srgbClr val="1B2530"/>
-          </a:solidFill>
-          <a:ln w="12700">
-            <a:solidFill>
-              <a:srgbClr val="1B2530"/>
-            </a:solidFill>
-            <a:prstDash val="solid"/>
-          </a:ln>
-        </p:spPr>
-      </p:sp>
-      <p:sp>
-        <p:nvSpPr>
-          <p:cNvPr id="12" name="Text 10"/>
-          <p:cNvSpPr txBox="1"/>
-          <p:nvPr/>
-        </p:nvSpPr>
-        <p:spPr>
-          <a:xfrm>
-            <a:off x="8321040" y="1600200"/>
-            <a:ext cx="3093415" cy="457200"/>
-          </a:xfrm>
-          <a:prstGeom prst="rect">
-            <a:avLst/>
-          </a:prstGeom>
-          <a:noFill/>
-          <a:ln/>
-        </p:spPr>
-        <p:txBody>
-          <a:bodyPr wrap="square" lIns="0" tIns="0" rIns="0" bIns="0" rtlCol="0" anchor="t"/>
-          <a:lstStyle/>
-          <a:p>
-            <a:pPr indent="0" marL="0">
-              <a:buNone/>
-            </a:pPr>
-            <a:r>
-              <a:rPr lang="en-US" sz="2200" b="1" dirty="0">
+              <a:rPr lang="en-US" sz="4200" b="1" dirty="0">
                 <a:solidFill>
                   <a:srgbClr val="FFFFFF"/>
                 </a:solidFill>
@@ -11340,22 +11044,22 @@
                 <a:ea typeface="Cambria" pitchFamily="34" charset="-122"/>
                 <a:cs typeface="Cambria" pitchFamily="34" charset="-120"/>
               </a:rPr>
-              <a:t>Step 10</a:t>
-            </a:r>
-            <a:endParaRPr lang="en-US" sz="2200" dirty="0"/>
-          </a:p>
-        </p:txBody>
-      </p:sp>
-      <p:sp>
-        <p:nvSpPr>
-          <p:cNvPr id="13" name="Text 11"/>
-          <p:cNvSpPr txBox="1"/>
-          <p:nvPr/>
-        </p:nvSpPr>
-        <p:spPr>
-          <a:xfrm>
-            <a:off x="8321040" y="2084832"/>
-            <a:ext cx="3093415" cy="365760"/>
+              <a:t>Peek at the C</a:t>
+            </a:r>
+            <a:endParaRPr lang="en-US" sz="4200" dirty="0"/>
+          </a:p>
+        </p:txBody>
+      </p:sp>
+      <p:sp>
+        <p:nvSpPr>
+          <p:cNvPr id="4" name="Text 2"/>
+          <p:cNvSpPr txBox="1"/>
+          <p:nvPr/>
+        </p:nvSpPr>
+        <p:spPr>
+          <a:xfrm>
+            <a:off x="548640" y="4389120"/>
+            <a:ext cx="11094415" cy="1097280"/>
           </a:xfrm>
           <a:prstGeom prst="rect">
             <a:avLst/>
@@ -11371,7 +11075,7 @@
               <a:buNone/>
             </a:pPr>
             <a:r>
-              <a:rPr lang="en-US" sz="1600" dirty="0">
+              <a:rPr lang="en-US" sz="2200" dirty="0">
                 <a:solidFill>
                   <a:srgbClr val="CFE3EA"/>
                 </a:solidFill>
@@ -11379,112 +11083,7 @@
                 <a:ea typeface="Calibri" pitchFamily="34" charset="-122"/>
                 <a:cs typeface="Calibri" pitchFamily="34" charset="-120"/>
               </a:rPr>
-              <a:t>about 4 min</a:t>
-            </a:r>
-            <a:endParaRPr lang="en-US" sz="1600" dirty="0"/>
-          </a:p>
-        </p:txBody>
-      </p:sp>
-      <p:sp>
-        <p:nvSpPr>
-          <p:cNvPr id="14" name="Shape 12"/>
-          <p:cNvSpPr/>
-          <p:nvPr/>
-        </p:nvSpPr>
-        <p:spPr>
-          <a:xfrm>
-            <a:off x="8092440" y="2834640"/>
-            <a:ext cx="3550615" cy="3383280"/>
-          </a:xfrm>
-          <a:prstGeom prst="roundRect">
-            <a:avLst>
-              <a:gd name="adj" fmla="val 2162"/>
-            </a:avLst>
-          </a:prstGeom>
-          <a:solidFill>
-            <a:srgbClr val="EEF2F4"/>
-          </a:solidFill>
-          <a:ln w="12700">
-            <a:solidFill>
-              <a:srgbClr val="EEF2F4"/>
-            </a:solidFill>
-            <a:prstDash val="solid"/>
-          </a:ln>
-        </p:spPr>
-      </p:sp>
-      <p:sp>
-        <p:nvSpPr>
-          <p:cNvPr id="15" name="Text 13"/>
-          <p:cNvSpPr txBox="1"/>
-          <p:nvPr/>
-        </p:nvSpPr>
-        <p:spPr>
-          <a:xfrm>
-            <a:off x="8321040" y="2971800"/>
-            <a:ext cx="3093415" cy="365760"/>
-          </a:xfrm>
-          <a:prstGeom prst="rect">
-            <a:avLst/>
-          </a:prstGeom>
-          <a:noFill/>
-          <a:ln/>
-        </p:spPr>
-        <p:txBody>
-          <a:bodyPr wrap="square" lIns="0" tIns="0" rIns="0" bIns="0" rtlCol="0" anchor="t"/>
-          <a:lstStyle/>
-          <a:p>
-            <a:pPr indent="0" marL="0">
-              <a:buNone/>
-            </a:pPr>
-            <a:r>
-              <a:rPr lang="en-US" sz="1500" b="1" dirty="0">
-                <a:solidFill>
-                  <a:srgbClr val="2F7D4F"/>
-                </a:solidFill>
-                <a:latin typeface="Calibri" pitchFamily="34" charset="0"/>
-                <a:ea typeface="Calibri" pitchFamily="34" charset="-122"/>
-                <a:cs typeface="Calibri" pitchFamily="34" charset="-120"/>
-              </a:rPr>
-              <a:t>You should see</a:t>
-            </a:r>
-            <a:endParaRPr lang="en-US" sz="1500" dirty="0"/>
-          </a:p>
-        </p:txBody>
-      </p:sp>
-      <p:sp>
-        <p:nvSpPr>
-          <p:cNvPr id="16" name="Text 14"/>
-          <p:cNvSpPr txBox="1"/>
-          <p:nvPr/>
-        </p:nvSpPr>
-        <p:spPr>
-          <a:xfrm>
-            <a:off x="8321040" y="3429000"/>
-            <a:ext cx="3093415" cy="2606040"/>
-          </a:xfrm>
-          <a:prstGeom prst="rect">
-            <a:avLst/>
-          </a:prstGeom>
-          <a:noFill/>
-          <a:ln/>
-        </p:spPr>
-        <p:txBody>
-          <a:bodyPr wrap="square" lIns="0" tIns="0" rIns="0" bIns="0" rtlCol="0" anchor="t"/>
-          <a:lstStyle/>
-          <a:p>
-            <a:pPr indent="0" marL="0">
-              <a:buNone/>
-            </a:pPr>
-            <a:r>
-              <a:rPr lang="en-US" sz="2200" dirty="0">
-                <a:solidFill>
-                  <a:srgbClr val="1B2530"/>
-                </a:solidFill>
-                <a:latin typeface="Calibri" pitchFamily="34" charset="0"/>
-                <a:ea typeface="Calibri" pitchFamily="34" charset="-122"/>
-                <a:cs typeface="Calibri" pitchFamily="34" charset="-120"/>
-              </a:rPr>
-              <a:t>score += 1; and two lines that start with if. One block can become more than one line.</a:t>
+              <a:t>Under the blocks</a:t>
             </a:r>
             <a:endParaRPr lang="en-US" sz="2200" dirty="0"/>
           </a:p>
@@ -11520,7 +11119,7 @@
             <a:lvl1pPr>
               <a:defRPr sz="1000">
                 <a:solidFill>
-                  <a:srgbClr val="5B6B78"/>
+                  <a:srgbClr val="CFE3EA"/>
                 </a:solidFill>
                 <a:latin typeface="Calibri"/>
                 <a:ea typeface="Calibri"/>
@@ -11598,7 +11197,7 @@
                 <a:ea typeface="Cambria" pitchFamily="34" charset="-122"/>
                 <a:cs typeface="Cambria" pitchFamily="34" charset="-120"/>
               </a:rPr>
-              <a:t>Quick question</a:t>
+              <a:t>Find your blocks</a:t>
             </a:r>
             <a:endParaRPr lang="en-US" sz="3000" dirty="0"/>
           </a:p>
@@ -11612,8 +11211,55 @@
         </p:nvSpPr>
         <p:spPr>
           <a:xfrm>
-            <a:off x="548640" y="1463040"/>
-            <a:ext cx="11094415" cy="1188720"/>
+            <a:off x="548640" y="1481328"/>
+            <a:ext cx="438912" cy="438912"/>
+          </a:xfrm>
+          <a:prstGeom prst="roundRect">
+            <a:avLst>
+              <a:gd name="adj" fmla="val 16667"/>
+            </a:avLst>
+          </a:prstGeom>
+          <a:solidFill>
+            <a:srgbClr val="6B4FA0"/>
+          </a:solidFill>
+          <a:ln>
+            <a:solidFill>
+              <a:srgbClr val="6B4FA0"/>
+            </a:solidFill>
+          </a:ln>
+        </p:spPr>
+        <p:txBody>
+          <a:bodyPr wrap="square" lIns="0" tIns="0" rIns="0" bIns="0" rtlCol="0" anchor="ctr"/>
+          <a:lstStyle/>
+          <a:p>
+            <a:pPr algn="ctr" indent="0" marL="0">
+              <a:buNone/>
+            </a:pPr>
+            <a:r>
+              <a:rPr lang="en-US" sz="1600" b="1" dirty="0">
+                <a:solidFill>
+                  <a:srgbClr val="FFFFFF"/>
+                </a:solidFill>
+                <a:latin typeface="Calibri" pitchFamily="34" charset="0"/>
+                <a:ea typeface="Calibri" pitchFamily="34" charset="-122"/>
+                <a:cs typeface="Calibri" pitchFamily="34" charset="-120"/>
+              </a:rPr>
+              <a:t>1</a:t>
+            </a:r>
+            <a:endParaRPr lang="en-US" sz="1600" dirty="0"/>
+          </a:p>
+        </p:txBody>
+      </p:sp>
+      <p:sp>
+        <p:nvSpPr>
+          <p:cNvPr id="4" name="Text 2"/>
+          <p:cNvSpPr txBox="1"/>
+          <p:nvPr/>
+        </p:nvSpPr>
+        <p:spPr>
+          <a:xfrm>
+            <a:off x="1234440" y="1463040"/>
+            <a:ext cx="6446520" cy="475488"/>
           </a:xfrm>
           <a:prstGeom prst="rect">
             <a:avLst/>
@@ -11629,34 +11275,397 @@
               <a:buNone/>
             </a:pPr>
             <a:r>
-              <a:rPr lang="en-US" sz="2600" b="1" dirty="0">
+              <a:rPr lang="en-US" sz="2400" dirty="0">
                 <a:solidFill>
                   <a:srgbClr val="1B2530"/>
+                </a:solidFill>
+                <a:latin typeface="Calibri" pitchFamily="34" charset="0"/>
+                <a:ea typeface="Calibri" pitchFamily="34" charset="-122"/>
+                <a:cs typeface="Calibri" pitchFamily="34" charset="-120"/>
+              </a:rPr>
+              <a:t>Open Lemon Catcher</a:t>
+            </a:r>
+            <a:endParaRPr lang="en-US" sz="2400" dirty="0"/>
+          </a:p>
+        </p:txBody>
+      </p:sp>
+      <p:sp>
+        <p:nvSpPr>
+          <p:cNvPr id="5" name="Text 3"/>
+          <p:cNvSpPr txBox="1"/>
+          <p:nvPr/>
+        </p:nvSpPr>
+        <p:spPr>
+          <a:xfrm>
+            <a:off x="548640" y="2706624"/>
+            <a:ext cx="438912" cy="438912"/>
+          </a:xfrm>
+          <a:prstGeom prst="roundRect">
+            <a:avLst>
+              <a:gd name="adj" fmla="val 16667"/>
+            </a:avLst>
+          </a:prstGeom>
+          <a:solidFill>
+            <a:srgbClr val="6B4FA0"/>
+          </a:solidFill>
+          <a:ln>
+            <a:solidFill>
+              <a:srgbClr val="6B4FA0"/>
+            </a:solidFill>
+          </a:ln>
+        </p:spPr>
+        <p:txBody>
+          <a:bodyPr wrap="square" lIns="0" tIns="0" rIns="0" bIns="0" rtlCol="0" anchor="ctr"/>
+          <a:lstStyle/>
+          <a:p>
+            <a:pPr algn="ctr" indent="0" marL="0">
+              <a:buNone/>
+            </a:pPr>
+            <a:r>
+              <a:rPr lang="en-US" sz="1600" b="1" dirty="0">
+                <a:solidFill>
+                  <a:srgbClr val="FFFFFF"/>
+                </a:solidFill>
+                <a:latin typeface="Calibri" pitchFamily="34" charset="0"/>
+                <a:ea typeface="Calibri" pitchFamily="34" charset="-122"/>
+                <a:cs typeface="Calibri" pitchFamily="34" charset="-120"/>
+              </a:rPr>
+              <a:t>2</a:t>
+            </a:r>
+            <a:endParaRPr lang="en-US" sz="1600" dirty="0"/>
+          </a:p>
+        </p:txBody>
+      </p:sp>
+      <p:sp>
+        <p:nvSpPr>
+          <p:cNvPr id="6" name="Text 4"/>
+          <p:cNvSpPr txBox="1"/>
+          <p:nvPr/>
+        </p:nvSpPr>
+        <p:spPr>
+          <a:xfrm>
+            <a:off x="1234440" y="2688336"/>
+            <a:ext cx="6446520" cy="475488"/>
+          </a:xfrm>
+          <a:prstGeom prst="rect">
+            <a:avLst/>
+          </a:prstGeom>
+          <a:noFill/>
+          <a:ln/>
+        </p:spPr>
+        <p:txBody>
+          <a:bodyPr wrap="square" lIns="0" tIns="0" rIns="0" bIns="0" rtlCol="0" anchor="ctr"/>
+          <a:lstStyle/>
+          <a:p>
+            <a:pPr indent="0" marL="0">
+              <a:buNone/>
+            </a:pPr>
+            <a:r>
+              <a:rPr lang="en-US" sz="2400" dirty="0">
+                <a:solidFill>
+                  <a:srgbClr val="1B2530"/>
+                </a:solidFill>
+                <a:latin typeface="Calibri" pitchFamily="34" charset="0"/>
+                <a:ea typeface="Calibri" pitchFamily="34" charset="-122"/>
+                <a:cs typeface="Calibri" pitchFamily="34" charset="-120"/>
+              </a:rPr>
+              <a:t>Click Generate C</a:t>
+            </a:r>
+            <a:endParaRPr lang="en-US" sz="2400" dirty="0"/>
+          </a:p>
+        </p:txBody>
+      </p:sp>
+      <p:sp>
+        <p:nvSpPr>
+          <p:cNvPr id="7" name="Text 5"/>
+          <p:cNvSpPr txBox="1"/>
+          <p:nvPr/>
+        </p:nvSpPr>
+        <p:spPr>
+          <a:xfrm>
+            <a:off x="548640" y="3931920"/>
+            <a:ext cx="438912" cy="438912"/>
+          </a:xfrm>
+          <a:prstGeom prst="roundRect">
+            <a:avLst>
+              <a:gd name="adj" fmla="val 16667"/>
+            </a:avLst>
+          </a:prstGeom>
+          <a:solidFill>
+            <a:srgbClr val="6B4FA0"/>
+          </a:solidFill>
+          <a:ln>
+            <a:solidFill>
+              <a:srgbClr val="6B4FA0"/>
+            </a:solidFill>
+          </a:ln>
+        </p:spPr>
+        <p:txBody>
+          <a:bodyPr wrap="square" lIns="0" tIns="0" rIns="0" bIns="0" rtlCol="0" anchor="ctr"/>
+          <a:lstStyle/>
+          <a:p>
+            <a:pPr algn="ctr" indent="0" marL="0">
+              <a:buNone/>
+            </a:pPr>
+            <a:r>
+              <a:rPr lang="en-US" sz="1600" b="1" dirty="0">
+                <a:solidFill>
+                  <a:srgbClr val="FFFFFF"/>
+                </a:solidFill>
+                <a:latin typeface="Calibri" pitchFamily="34" charset="0"/>
+                <a:ea typeface="Calibri" pitchFamily="34" charset="-122"/>
+                <a:cs typeface="Calibri" pitchFamily="34" charset="-120"/>
+              </a:rPr>
+              <a:t>3</a:t>
+            </a:r>
+            <a:endParaRPr lang="en-US" sz="1600" dirty="0"/>
+          </a:p>
+        </p:txBody>
+      </p:sp>
+      <p:sp>
+        <p:nvSpPr>
+          <p:cNvPr id="8" name="Text 6"/>
+          <p:cNvSpPr txBox="1"/>
+          <p:nvPr/>
+        </p:nvSpPr>
+        <p:spPr>
+          <a:xfrm>
+            <a:off x="1234440" y="3913632"/>
+            <a:ext cx="6446520" cy="475488"/>
+          </a:xfrm>
+          <a:prstGeom prst="rect">
+            <a:avLst/>
+          </a:prstGeom>
+          <a:noFill/>
+          <a:ln/>
+        </p:spPr>
+        <p:txBody>
+          <a:bodyPr wrap="square" lIns="0" tIns="0" rIns="0" bIns="0" rtlCol="0" anchor="ctr"/>
+          <a:lstStyle/>
+          <a:p>
+            <a:pPr indent="0" marL="0">
+              <a:buNone/>
+            </a:pPr>
+            <a:r>
+              <a:rPr lang="en-US" sz="2400" dirty="0">
+                <a:solidFill>
+                  <a:srgbClr val="1B2530"/>
+                </a:solidFill>
+                <a:latin typeface="Calibri" pitchFamily="34" charset="0"/>
+                <a:ea typeface="Calibri" pitchFamily="34" charset="-122"/>
+                <a:cs typeface="Calibri" pitchFamily="34" charset="-120"/>
+              </a:rPr>
+              <a:t>Find the line for 'change score by 1'</a:t>
+            </a:r>
+            <a:endParaRPr lang="en-US" sz="2400" dirty="0"/>
+          </a:p>
+        </p:txBody>
+      </p:sp>
+      <p:sp>
+        <p:nvSpPr>
+          <p:cNvPr id="9" name="Text 7"/>
+          <p:cNvSpPr txBox="1"/>
+          <p:nvPr/>
+        </p:nvSpPr>
+        <p:spPr>
+          <a:xfrm>
+            <a:off x="548640" y="5157216"/>
+            <a:ext cx="438912" cy="438912"/>
+          </a:xfrm>
+          <a:prstGeom prst="roundRect">
+            <a:avLst>
+              <a:gd name="adj" fmla="val 16667"/>
+            </a:avLst>
+          </a:prstGeom>
+          <a:solidFill>
+            <a:srgbClr val="6B4FA0"/>
+          </a:solidFill>
+          <a:ln>
+            <a:solidFill>
+              <a:srgbClr val="6B4FA0"/>
+            </a:solidFill>
+          </a:ln>
+        </p:spPr>
+        <p:txBody>
+          <a:bodyPr wrap="square" lIns="0" tIns="0" rIns="0" bIns="0" rtlCol="0" anchor="ctr"/>
+          <a:lstStyle/>
+          <a:p>
+            <a:pPr algn="ctr" indent="0" marL="0">
+              <a:buNone/>
+            </a:pPr>
+            <a:r>
+              <a:rPr lang="en-US" sz="1600" b="1" dirty="0">
+                <a:solidFill>
+                  <a:srgbClr val="FFFFFF"/>
+                </a:solidFill>
+                <a:latin typeface="Calibri" pitchFamily="34" charset="0"/>
+                <a:ea typeface="Calibri" pitchFamily="34" charset="-122"/>
+                <a:cs typeface="Calibri" pitchFamily="34" charset="-120"/>
+              </a:rPr>
+              <a:t>4</a:t>
+            </a:r>
+            <a:endParaRPr lang="en-US" sz="1600" dirty="0"/>
+          </a:p>
+        </p:txBody>
+      </p:sp>
+      <p:sp>
+        <p:nvSpPr>
+          <p:cNvPr id="10" name="Text 8"/>
+          <p:cNvSpPr txBox="1"/>
+          <p:nvPr/>
+        </p:nvSpPr>
+        <p:spPr>
+          <a:xfrm>
+            <a:off x="1234440" y="5138928"/>
+            <a:ext cx="6446520" cy="1078992"/>
+          </a:xfrm>
+          <a:prstGeom prst="rect">
+            <a:avLst/>
+          </a:prstGeom>
+          <a:noFill/>
+          <a:ln/>
+        </p:spPr>
+        <p:txBody>
+          <a:bodyPr wrap="square" lIns="0" tIns="0" rIns="0" bIns="0" rtlCol="0" anchor="t"/>
+          <a:lstStyle/>
+          <a:p>
+            <a:pPr indent="0" marL="0">
+              <a:buNone/>
+            </a:pPr>
+            <a:r>
+              <a:rPr lang="en-US" sz="2400" dirty="0">
+                <a:solidFill>
+                  <a:srgbClr val="1B2530"/>
+                </a:solidFill>
+                <a:latin typeface="Calibri" pitchFamily="34" charset="0"/>
+                <a:ea typeface="Calibri" pitchFamily="34" charset="-122"/>
+                <a:cs typeface="Calibri" pitchFamily="34" charset="-120"/>
+              </a:rPr>
+              <a:t>Find the lines for 'keep basket_x between 0 and 288'</a:t>
+            </a:r>
+            <a:endParaRPr lang="en-US" sz="2400" dirty="0"/>
+          </a:p>
+        </p:txBody>
+      </p:sp>
+      <p:sp>
+        <p:nvSpPr>
+          <p:cNvPr id="11" name="Shape 9"/>
+          <p:cNvSpPr/>
+          <p:nvPr/>
+        </p:nvSpPr>
+        <p:spPr>
+          <a:xfrm>
+            <a:off x="8092440" y="1463040"/>
+            <a:ext cx="3550615" cy="1143000"/>
+          </a:xfrm>
+          <a:prstGeom prst="roundRect">
+            <a:avLst>
+              <a:gd name="adj" fmla="val 6400"/>
+            </a:avLst>
+          </a:prstGeom>
+          <a:solidFill>
+            <a:srgbClr val="1B2530"/>
+          </a:solidFill>
+          <a:ln w="12700">
+            <a:solidFill>
+              <a:srgbClr val="1B2530"/>
+            </a:solidFill>
+            <a:prstDash val="solid"/>
+          </a:ln>
+        </p:spPr>
+      </p:sp>
+      <p:sp>
+        <p:nvSpPr>
+          <p:cNvPr id="12" name="Text 10"/>
+          <p:cNvSpPr txBox="1"/>
+          <p:nvPr/>
+        </p:nvSpPr>
+        <p:spPr>
+          <a:xfrm>
+            <a:off x="8321040" y="1600200"/>
+            <a:ext cx="3093415" cy="457200"/>
+          </a:xfrm>
+          <a:prstGeom prst="rect">
+            <a:avLst/>
+          </a:prstGeom>
+          <a:noFill/>
+          <a:ln/>
+        </p:spPr>
+        <p:txBody>
+          <a:bodyPr wrap="square" lIns="0" tIns="0" rIns="0" bIns="0" rtlCol="0" anchor="t"/>
+          <a:lstStyle/>
+          <a:p>
+            <a:pPr indent="0" marL="0">
+              <a:buNone/>
+            </a:pPr>
+            <a:r>
+              <a:rPr lang="en-US" sz="2200" b="1" dirty="0">
+                <a:solidFill>
+                  <a:srgbClr val="FFFFFF"/>
                 </a:solidFill>
                 <a:latin typeface="Cambria" pitchFamily="34" charset="0"/>
                 <a:ea typeface="Cambria" pitchFamily="34" charset="-122"/>
                 <a:cs typeface="Cambria" pitchFamily="34" charset="-120"/>
               </a:rPr>
-              <a:t>In C, 'change score by 1' is written...</a:t>
-            </a:r>
-            <a:endParaRPr lang="en-US" sz="2600" dirty="0"/>
-          </a:p>
-        </p:txBody>
-      </p:sp>
-      <p:sp>
-        <p:nvSpPr>
-          <p:cNvPr id="4" name="Shape 2"/>
+              <a:t>Step 10</a:t>
+            </a:r>
+            <a:endParaRPr lang="en-US" sz="2200" dirty="0"/>
+          </a:p>
+        </p:txBody>
+      </p:sp>
+      <p:sp>
+        <p:nvSpPr>
+          <p:cNvPr id="13" name="Text 11"/>
+          <p:cNvSpPr txBox="1"/>
+          <p:nvPr/>
+        </p:nvSpPr>
+        <p:spPr>
+          <a:xfrm>
+            <a:off x="8321040" y="2084832"/>
+            <a:ext cx="3093415" cy="365760"/>
+          </a:xfrm>
+          <a:prstGeom prst="rect">
+            <a:avLst/>
+          </a:prstGeom>
+          <a:noFill/>
+          <a:ln/>
+        </p:spPr>
+        <p:txBody>
+          <a:bodyPr wrap="square" lIns="0" tIns="0" rIns="0" bIns="0" rtlCol="0" anchor="t"/>
+          <a:lstStyle/>
+          <a:p>
+            <a:pPr indent="0" marL="0">
+              <a:buNone/>
+            </a:pPr>
+            <a:r>
+              <a:rPr lang="en-US" sz="1600" dirty="0">
+                <a:solidFill>
+                  <a:srgbClr val="CFE3EA"/>
+                </a:solidFill>
+                <a:latin typeface="Calibri" pitchFamily="34" charset="0"/>
+                <a:ea typeface="Calibri" pitchFamily="34" charset="-122"/>
+                <a:cs typeface="Calibri" pitchFamily="34" charset="-120"/>
+              </a:rPr>
+              <a:t>about 4 min</a:t>
+            </a:r>
+            <a:endParaRPr lang="en-US" sz="1600" dirty="0"/>
+          </a:p>
+        </p:txBody>
+      </p:sp>
+      <p:sp>
+        <p:nvSpPr>
+          <p:cNvPr id="14" name="Shape 12"/>
           <p:cNvSpPr/>
           <p:nvPr/>
         </p:nvSpPr>
         <p:spPr>
           <a:xfrm>
-            <a:off x="548640" y="2880360"/>
-            <a:ext cx="5432908" cy="1554480"/>
+            <a:off x="8092440" y="2788920"/>
+            <a:ext cx="3550615" cy="3429000"/>
           </a:xfrm>
           <a:prstGeom prst="roundRect">
             <a:avLst>
-              <a:gd name="adj" fmla="val 4706"/>
+              <a:gd name="adj" fmla="val 2133"/>
             </a:avLst>
           </a:prstGeom>
           <a:solidFill>
@@ -11672,61 +11681,14 @@
       </p:sp>
       <p:sp>
         <p:nvSpPr>
-          <p:cNvPr id="5" name="Text 3"/>
-          <p:cNvSpPr txBox="1"/>
-          <p:nvPr/>
-        </p:nvSpPr>
-        <p:spPr>
-          <a:xfrm>
-            <a:off x="731520" y="3438144"/>
-            <a:ext cx="438912" cy="438912"/>
-          </a:xfrm>
-          <a:prstGeom prst="roundRect">
-            <a:avLst>
-              <a:gd name="adj" fmla="val 16667"/>
-            </a:avLst>
-          </a:prstGeom>
-          <a:solidFill>
-            <a:srgbClr val="2E4A62"/>
-          </a:solidFill>
-          <a:ln>
-            <a:solidFill>
-              <a:srgbClr val="2E4A62"/>
-            </a:solidFill>
-          </a:ln>
-        </p:spPr>
-        <p:txBody>
-          <a:bodyPr wrap="square" lIns="0" tIns="0" rIns="0" bIns="0" rtlCol="0" anchor="ctr"/>
-          <a:lstStyle/>
-          <a:p>
-            <a:pPr algn="ctr" indent="0" marL="0">
-              <a:buNone/>
-            </a:pPr>
-            <a:r>
-              <a:rPr lang="en-US" sz="1600" b="1" dirty="0">
-                <a:solidFill>
-                  <a:srgbClr val="FFFFFF"/>
-                </a:solidFill>
-                <a:latin typeface="Calibri" pitchFamily="34" charset="0"/>
-                <a:ea typeface="Calibri" pitchFamily="34" charset="-122"/>
-                <a:cs typeface="Calibri" pitchFamily="34" charset="-120"/>
-              </a:rPr>
-              <a:t>A</a:t>
-            </a:r>
-            <a:endParaRPr lang="en-US" sz="1600" dirty="0"/>
-          </a:p>
-        </p:txBody>
-      </p:sp>
-      <p:sp>
-        <p:nvSpPr>
-          <p:cNvPr id="6" name="Text 4"/>
-          <p:cNvSpPr txBox="1"/>
-          <p:nvPr/>
-        </p:nvSpPr>
-        <p:spPr>
-          <a:xfrm>
-            <a:off x="1371600" y="2971800"/>
-            <a:ext cx="4427068" cy="1371600"/>
+          <p:cNvPr id="15" name="Text 13"/>
+          <p:cNvSpPr txBox="1"/>
+          <p:nvPr/>
+        </p:nvSpPr>
+        <p:spPr>
+          <a:xfrm>
+            <a:off x="8321040" y="2880360"/>
+            <a:ext cx="3093415" cy="310896"/>
           </a:xfrm>
           <a:prstGeom prst="rect">
             <a:avLst/>
@@ -11735,111 +11697,37 @@
           <a:ln/>
         </p:spPr>
         <p:txBody>
-          <a:bodyPr wrap="square" lIns="0" tIns="0" rIns="0" bIns="0" rtlCol="0" anchor="ctr"/>
+          <a:bodyPr wrap="square" lIns="0" tIns="0" rIns="0" bIns="0" rtlCol="0" anchor="t"/>
           <a:lstStyle/>
           <a:p>
             <a:pPr indent="0" marL="0">
               <a:buNone/>
             </a:pPr>
             <a:r>
-              <a:rPr lang="en-US" sz="2200" dirty="0">
-                <a:solidFill>
-                  <a:srgbClr val="1B2530"/>
-                </a:solidFill>
-                <a:latin typeface="Calibri" pitchFamily="34" charset="0"/>
-                <a:ea typeface="Calibri" pitchFamily="34" charset="-122"/>
-                <a:cs typeface="Calibri" pitchFamily="34" charset="-120"/>
-              </a:rPr>
-              <a:t>score = 1;</a:t>
-            </a:r>
-            <a:endParaRPr lang="en-US" sz="2200" dirty="0"/>
-          </a:p>
-        </p:txBody>
-      </p:sp>
-      <p:sp>
-        <p:nvSpPr>
-          <p:cNvPr id="7" name="Shape 5"/>
-          <p:cNvSpPr/>
-          <p:nvPr/>
-        </p:nvSpPr>
-        <p:spPr>
-          <a:xfrm>
-            <a:off x="6210148" y="2880360"/>
-            <a:ext cx="5432908" cy="1554480"/>
-          </a:xfrm>
-          <a:prstGeom prst="roundRect">
-            <a:avLst>
-              <a:gd name="adj" fmla="val 4706"/>
-            </a:avLst>
-          </a:prstGeom>
-          <a:solidFill>
-            <a:srgbClr val="EEF2F4"/>
-          </a:solidFill>
-          <a:ln w="12700">
-            <a:solidFill>
-              <a:srgbClr val="EEF2F4"/>
-            </a:solidFill>
-            <a:prstDash val="solid"/>
-          </a:ln>
-        </p:spPr>
-      </p:sp>
-      <p:sp>
-        <p:nvSpPr>
-          <p:cNvPr id="8" name="Text 6"/>
-          <p:cNvSpPr txBox="1"/>
-          <p:nvPr/>
-        </p:nvSpPr>
-        <p:spPr>
-          <a:xfrm>
-            <a:off x="6393028" y="3438144"/>
-            <a:ext cx="438912" cy="438912"/>
-          </a:xfrm>
-          <a:prstGeom prst="roundRect">
-            <a:avLst>
-              <a:gd name="adj" fmla="val 16667"/>
-            </a:avLst>
-          </a:prstGeom>
-          <a:solidFill>
-            <a:srgbClr val="2E4A62"/>
-          </a:solidFill>
-          <a:ln>
-            <a:solidFill>
-              <a:srgbClr val="2E4A62"/>
-            </a:solidFill>
-          </a:ln>
-        </p:spPr>
-        <p:txBody>
-          <a:bodyPr wrap="square" lIns="0" tIns="0" rIns="0" bIns="0" rtlCol="0" anchor="ctr"/>
-          <a:lstStyle/>
-          <a:p>
-            <a:pPr algn="ctr" indent="0" marL="0">
-              <a:buNone/>
-            </a:pPr>
-            <a:r>
-              <a:rPr lang="en-US" sz="1600" b="1" dirty="0">
-                <a:solidFill>
-                  <a:srgbClr val="FFFFFF"/>
-                </a:solidFill>
-                <a:latin typeface="Calibri" pitchFamily="34" charset="0"/>
-                <a:ea typeface="Calibri" pitchFamily="34" charset="-122"/>
-                <a:cs typeface="Calibri" pitchFamily="34" charset="-120"/>
-              </a:rPr>
-              <a:t>B</a:t>
-            </a:r>
-            <a:endParaRPr lang="en-US" sz="1600" dirty="0"/>
-          </a:p>
-        </p:txBody>
-      </p:sp>
-      <p:sp>
-        <p:nvSpPr>
-          <p:cNvPr id="9" name="Text 7"/>
-          <p:cNvSpPr txBox="1"/>
-          <p:nvPr/>
-        </p:nvSpPr>
-        <p:spPr>
-          <a:xfrm>
-            <a:off x="7033108" y="2971800"/>
-            <a:ext cx="4427068" cy="1371600"/>
+              <a:rPr lang="en-US" sz="1400" b="1" dirty="0">
+                <a:solidFill>
+                  <a:srgbClr val="2F7D4F"/>
+                </a:solidFill>
+                <a:latin typeface="Calibri" pitchFamily="34" charset="0"/>
+                <a:ea typeface="Calibri" pitchFamily="34" charset="-122"/>
+                <a:cs typeface="Calibri" pitchFamily="34" charset="-120"/>
+              </a:rPr>
+              <a:t>You should see</a:t>
+            </a:r>
+            <a:endParaRPr lang="en-US" sz="1400" dirty="0"/>
+          </a:p>
+        </p:txBody>
+      </p:sp>
+      <p:sp>
+        <p:nvSpPr>
+          <p:cNvPr id="16" name="Text 14"/>
+          <p:cNvSpPr txBox="1"/>
+          <p:nvPr/>
+        </p:nvSpPr>
+        <p:spPr>
+          <a:xfrm>
+            <a:off x="8321040" y="3246120"/>
+            <a:ext cx="3093415" cy="2862072"/>
           </a:xfrm>
           <a:prstGeom prst="rect">
             <a:avLst/>
@@ -11848,7 +11736,7 @@
           <a:ln/>
         </p:spPr>
         <p:txBody>
-          <a:bodyPr wrap="square" lIns="0" tIns="0" rIns="0" bIns="0" rtlCol="0" anchor="ctr"/>
+          <a:bodyPr wrap="square" lIns="0" tIns="0" rIns="0" bIns="0" rtlCol="0" anchor="t"/>
           <a:lstStyle/>
           <a:p>
             <a:pPr indent="0" marL="0">
@@ -11863,233 +11751,7 @@
                 <a:ea typeface="Calibri" pitchFamily="34" charset="-122"/>
                 <a:cs typeface="Calibri" pitchFamily="34" charset="-120"/>
               </a:rPr>
-              <a:t>score += 1;</a:t>
-            </a:r>
-            <a:endParaRPr lang="en-US" sz="2200" dirty="0"/>
-          </a:p>
-        </p:txBody>
-      </p:sp>
-      <p:sp>
-        <p:nvSpPr>
-          <p:cNvPr id="10" name="Shape 8"/>
-          <p:cNvSpPr/>
-          <p:nvPr/>
-        </p:nvSpPr>
-        <p:spPr>
-          <a:xfrm>
-            <a:off x="548640" y="4663440"/>
-            <a:ext cx="5432908" cy="1554480"/>
-          </a:xfrm>
-          <a:prstGeom prst="roundRect">
-            <a:avLst>
-              <a:gd name="adj" fmla="val 4706"/>
-            </a:avLst>
-          </a:prstGeom>
-          <a:solidFill>
-            <a:srgbClr val="EEF2F4"/>
-          </a:solidFill>
-          <a:ln w="12700">
-            <a:solidFill>
-              <a:srgbClr val="EEF2F4"/>
-            </a:solidFill>
-            <a:prstDash val="solid"/>
-          </a:ln>
-        </p:spPr>
-      </p:sp>
-      <p:sp>
-        <p:nvSpPr>
-          <p:cNvPr id="11" name="Text 9"/>
-          <p:cNvSpPr txBox="1"/>
-          <p:nvPr/>
-        </p:nvSpPr>
-        <p:spPr>
-          <a:xfrm>
-            <a:off x="731520" y="5221224"/>
-            <a:ext cx="438912" cy="438912"/>
-          </a:xfrm>
-          <a:prstGeom prst="roundRect">
-            <a:avLst>
-              <a:gd name="adj" fmla="val 16667"/>
-            </a:avLst>
-          </a:prstGeom>
-          <a:solidFill>
-            <a:srgbClr val="2E4A62"/>
-          </a:solidFill>
-          <a:ln>
-            <a:solidFill>
-              <a:srgbClr val="2E4A62"/>
-            </a:solidFill>
-          </a:ln>
-        </p:spPr>
-        <p:txBody>
-          <a:bodyPr wrap="square" lIns="0" tIns="0" rIns="0" bIns="0" rtlCol="0" anchor="ctr"/>
-          <a:lstStyle/>
-          <a:p>
-            <a:pPr algn="ctr" indent="0" marL="0">
-              <a:buNone/>
-            </a:pPr>
-            <a:r>
-              <a:rPr lang="en-US" sz="1600" b="1" dirty="0">
-                <a:solidFill>
-                  <a:srgbClr val="FFFFFF"/>
-                </a:solidFill>
-                <a:latin typeface="Calibri" pitchFamily="34" charset="0"/>
-                <a:ea typeface="Calibri" pitchFamily="34" charset="-122"/>
-                <a:cs typeface="Calibri" pitchFamily="34" charset="-120"/>
-              </a:rPr>
-              <a:t>C</a:t>
-            </a:r>
-            <a:endParaRPr lang="en-US" sz="1600" dirty="0"/>
-          </a:p>
-        </p:txBody>
-      </p:sp>
-      <p:sp>
-        <p:nvSpPr>
-          <p:cNvPr id="12" name="Text 10"/>
-          <p:cNvSpPr txBox="1"/>
-          <p:nvPr/>
-        </p:nvSpPr>
-        <p:spPr>
-          <a:xfrm>
-            <a:off x="1371600" y="4754880"/>
-            <a:ext cx="4427068" cy="1371600"/>
-          </a:xfrm>
-          <a:prstGeom prst="rect">
-            <a:avLst/>
-          </a:prstGeom>
-          <a:noFill/>
-          <a:ln/>
-        </p:spPr>
-        <p:txBody>
-          <a:bodyPr wrap="square" lIns="0" tIns="0" rIns="0" bIns="0" rtlCol="0" anchor="ctr"/>
-          <a:lstStyle/>
-          <a:p>
-            <a:pPr indent="0" marL="0">
-              <a:buNone/>
-            </a:pPr>
-            <a:r>
-              <a:rPr lang="en-US" sz="2200" dirty="0">
-                <a:solidFill>
-                  <a:srgbClr val="1B2530"/>
-                </a:solidFill>
-                <a:latin typeface="Calibri" pitchFamily="34" charset="0"/>
-                <a:ea typeface="Calibri" pitchFamily="34" charset="-122"/>
-                <a:cs typeface="Calibri" pitchFamily="34" charset="-120"/>
-              </a:rPr>
-              <a:t>score == 1;</a:t>
-            </a:r>
-            <a:endParaRPr lang="en-US" sz="2200" dirty="0"/>
-          </a:p>
-        </p:txBody>
-      </p:sp>
-      <p:sp>
-        <p:nvSpPr>
-          <p:cNvPr id="13" name="Shape 11"/>
-          <p:cNvSpPr/>
-          <p:nvPr/>
-        </p:nvSpPr>
-        <p:spPr>
-          <a:xfrm>
-            <a:off x="6210148" y="4663440"/>
-            <a:ext cx="5432908" cy="1554480"/>
-          </a:xfrm>
-          <a:prstGeom prst="roundRect">
-            <a:avLst>
-              <a:gd name="adj" fmla="val 4706"/>
-            </a:avLst>
-          </a:prstGeom>
-          <a:solidFill>
-            <a:srgbClr val="EEF2F4"/>
-          </a:solidFill>
-          <a:ln w="12700">
-            <a:solidFill>
-              <a:srgbClr val="EEF2F4"/>
-            </a:solidFill>
-            <a:prstDash val="solid"/>
-          </a:ln>
-        </p:spPr>
-      </p:sp>
-      <p:sp>
-        <p:nvSpPr>
-          <p:cNvPr id="14" name="Text 12"/>
-          <p:cNvSpPr txBox="1"/>
-          <p:nvPr/>
-        </p:nvSpPr>
-        <p:spPr>
-          <a:xfrm>
-            <a:off x="6393028" y="5221224"/>
-            <a:ext cx="438912" cy="438912"/>
-          </a:xfrm>
-          <a:prstGeom prst="roundRect">
-            <a:avLst>
-              <a:gd name="adj" fmla="val 16667"/>
-            </a:avLst>
-          </a:prstGeom>
-          <a:solidFill>
-            <a:srgbClr val="2E4A62"/>
-          </a:solidFill>
-          <a:ln>
-            <a:solidFill>
-              <a:srgbClr val="2E4A62"/>
-            </a:solidFill>
-          </a:ln>
-        </p:spPr>
-        <p:txBody>
-          <a:bodyPr wrap="square" lIns="0" tIns="0" rIns="0" bIns="0" rtlCol="0" anchor="ctr"/>
-          <a:lstStyle/>
-          <a:p>
-            <a:pPr algn="ctr" indent="0" marL="0">
-              <a:buNone/>
-            </a:pPr>
-            <a:r>
-              <a:rPr lang="en-US" sz="1600" b="1" dirty="0">
-                <a:solidFill>
-                  <a:srgbClr val="FFFFFF"/>
-                </a:solidFill>
-                <a:latin typeface="Calibri" pitchFamily="34" charset="0"/>
-                <a:ea typeface="Calibri" pitchFamily="34" charset="-122"/>
-                <a:cs typeface="Calibri" pitchFamily="34" charset="-120"/>
-              </a:rPr>
-              <a:t>D</a:t>
-            </a:r>
-            <a:endParaRPr lang="en-US" sz="1600" dirty="0"/>
-          </a:p>
-        </p:txBody>
-      </p:sp>
-      <p:sp>
-        <p:nvSpPr>
-          <p:cNvPr id="15" name="Text 13"/>
-          <p:cNvSpPr txBox="1"/>
-          <p:nvPr/>
-        </p:nvSpPr>
-        <p:spPr>
-          <a:xfrm>
-            <a:off x="7033108" y="4754880"/>
-            <a:ext cx="4427068" cy="1371600"/>
-          </a:xfrm>
-          <a:prstGeom prst="rect">
-            <a:avLst/>
-          </a:prstGeom>
-          <a:noFill/>
-          <a:ln/>
-        </p:spPr>
-        <p:txBody>
-          <a:bodyPr wrap="square" lIns="0" tIns="0" rIns="0" bIns="0" rtlCol="0" anchor="ctr"/>
-          <a:lstStyle/>
-          <a:p>
-            <a:pPr indent="0" marL="0">
-              <a:buNone/>
-            </a:pPr>
-            <a:r>
-              <a:rPr lang="en-US" sz="2200" dirty="0">
-                <a:solidFill>
-                  <a:srgbClr val="1B2530"/>
-                </a:solidFill>
-                <a:latin typeface="Calibri" pitchFamily="34" charset="0"/>
-                <a:ea typeface="Calibri" pitchFamily="34" charset="-122"/>
-                <a:cs typeface="Calibri" pitchFamily="34" charset="-120"/>
-              </a:rPr>
-              <a:t>if (score)</a:t>
+              <a:t>score += 1; and two lines that start with if. One block can become more than one line.</a:t>
             </a:r>
             <a:endParaRPr lang="en-US" sz="2200" dirty="0"/>
           </a:p>
@@ -12170,14 +11832,16 @@
       </p:grpSpPr>
       <p:sp>
         <p:nvSpPr>
-          <p:cNvPr id="2" name="Text 0"/>
-          <p:cNvSpPr txBox="1"/>
-          <p:nvPr/>
-        </p:nvSpPr>
-        <p:spPr>
-          <a:xfrm>
-            <a:off x="548640" y="1371600"/>
-            <a:ext cx="2743200" cy="1188720"/>
+          <p:cNvPr id="2" name="Text 1"/>
+          <p:cNvSpPr/>
+          <p:nvPr>
+            <p:ph idx="101" type="title" hasCustomPrompt="1"/>
+          </p:nvPr>
+        </p:nvSpPr>
+        <p:spPr>
+          <a:xfrm>
+            <a:off x="548640" y="384048"/>
+            <a:ext cx="11094415" cy="868680"/>
           </a:xfrm>
           <a:prstGeom prst="rect">
             <a:avLst/>
@@ -12186,24 +11850,24 @@
           <a:ln/>
         </p:spPr>
         <p:txBody>
-          <a:bodyPr wrap="square" lIns="0" tIns="0" rIns="0" bIns="0" rtlCol="0" anchor="t"/>
-          <a:lstStyle/>
-          <a:p>
-            <a:pPr indent="0" marL="0">
-              <a:buNone/>
-            </a:pPr>
-            <a:r>
-              <a:rPr lang="en-US" sz="8000" b="1" dirty="0">
-                <a:solidFill>
-                  <a:srgbClr val="B9A4E3"/>
+          <a:bodyPr wrap="square" lIns="0" tIns="0" rIns="0" bIns="0" rtlCol="0" anchor="ctr"/>
+          <a:lstStyle/>
+          <a:p>
+            <a:pPr algn="l" indent="0" marL="0">
+              <a:buNone/>
+            </a:pPr>
+            <a:r>
+              <a:rPr lang="en-US" sz="3000" b="1" dirty="0">
+                <a:solidFill>
+                  <a:srgbClr val="2E4A62"/>
                 </a:solidFill>
                 <a:latin typeface="Cambria" pitchFamily="34" charset="0"/>
                 <a:ea typeface="Cambria" pitchFamily="34" charset="-122"/>
                 <a:cs typeface="Cambria" pitchFamily="34" charset="-120"/>
               </a:rPr>
-              <a:t>05</a:t>
-            </a:r>
-            <a:endParaRPr lang="en-US" sz="8000" dirty="0"/>
+              <a:t>Quick question</a:t>
+            </a:r>
+            <a:endParaRPr lang="en-US" sz="3000" dirty="0"/>
           </a:p>
         </p:txBody>
       </p:sp>
@@ -12215,8 +11879,8 @@
         </p:nvSpPr>
         <p:spPr>
           <a:xfrm>
-            <a:off x="548640" y="2834640"/>
-            <a:ext cx="11094415" cy="1371600"/>
+            <a:off x="548640" y="1463040"/>
+            <a:ext cx="11094415" cy="1188720"/>
           </a:xfrm>
           <a:prstGeom prst="rect">
             <a:avLst/>
@@ -12232,30 +11896,104 @@
               <a:buNone/>
             </a:pPr>
             <a:r>
-              <a:rPr lang="en-US" sz="4200" b="1" dirty="0">
-                <a:solidFill>
-                  <a:srgbClr val="FFFFFF"/>
+              <a:rPr lang="en-US" sz="2600" b="1" dirty="0">
+                <a:solidFill>
+                  <a:srgbClr val="1B2530"/>
                 </a:solidFill>
                 <a:latin typeface="Cambria" pitchFamily="34" charset="0"/>
                 <a:ea typeface="Cambria" pitchFamily="34" charset="-122"/>
                 <a:cs typeface="Cambria" pitchFamily="34" charset="-120"/>
               </a:rPr>
-              <a:t>Mission 5</a:t>
-            </a:r>
-            <a:endParaRPr lang="en-US" sz="4200" dirty="0"/>
-          </a:p>
-        </p:txBody>
-      </p:sp>
-      <p:sp>
-        <p:nvSpPr>
-          <p:cNvPr id="4" name="Text 2"/>
-          <p:cNvSpPr txBox="1"/>
-          <p:nvPr/>
-        </p:nvSpPr>
-        <p:spPr>
-          <a:xfrm>
-            <a:off x="548640" y="4389120"/>
-            <a:ext cx="11094415" cy="1097280"/>
+              <a:t>In C, 'change score by 1' is written...</a:t>
+            </a:r>
+            <a:endParaRPr lang="en-US" sz="2600" dirty="0"/>
+          </a:p>
+        </p:txBody>
+      </p:sp>
+      <p:sp>
+        <p:nvSpPr>
+          <p:cNvPr id="4" name="Shape 2"/>
+          <p:cNvSpPr/>
+          <p:nvPr/>
+        </p:nvSpPr>
+        <p:spPr>
+          <a:xfrm>
+            <a:off x="548640" y="2880360"/>
+            <a:ext cx="5432908" cy="1554480"/>
+          </a:xfrm>
+          <a:prstGeom prst="roundRect">
+            <a:avLst>
+              <a:gd name="adj" fmla="val 4706"/>
+            </a:avLst>
+          </a:prstGeom>
+          <a:solidFill>
+            <a:srgbClr val="EEF2F4"/>
+          </a:solidFill>
+          <a:ln w="12700">
+            <a:solidFill>
+              <a:srgbClr val="EEF2F4"/>
+            </a:solidFill>
+            <a:prstDash val="solid"/>
+          </a:ln>
+        </p:spPr>
+      </p:sp>
+      <p:sp>
+        <p:nvSpPr>
+          <p:cNvPr id="5" name="Text 3"/>
+          <p:cNvSpPr txBox="1"/>
+          <p:nvPr/>
+        </p:nvSpPr>
+        <p:spPr>
+          <a:xfrm>
+            <a:off x="731520" y="3438144"/>
+            <a:ext cx="438912" cy="438912"/>
+          </a:xfrm>
+          <a:prstGeom prst="roundRect">
+            <a:avLst>
+              <a:gd name="adj" fmla="val 16667"/>
+            </a:avLst>
+          </a:prstGeom>
+          <a:solidFill>
+            <a:srgbClr val="2E4A62"/>
+          </a:solidFill>
+          <a:ln>
+            <a:solidFill>
+              <a:srgbClr val="2E4A62"/>
+            </a:solidFill>
+          </a:ln>
+        </p:spPr>
+        <p:txBody>
+          <a:bodyPr wrap="square" lIns="0" tIns="0" rIns="0" bIns="0" rtlCol="0" anchor="ctr"/>
+          <a:lstStyle/>
+          <a:p>
+            <a:pPr algn="ctr" indent="0" marL="0">
+              <a:buNone/>
+            </a:pPr>
+            <a:r>
+              <a:rPr lang="en-US" sz="1600" b="1" dirty="0">
+                <a:solidFill>
+                  <a:srgbClr val="FFFFFF"/>
+                </a:solidFill>
+                <a:latin typeface="Calibri" pitchFamily="34" charset="0"/>
+                <a:ea typeface="Calibri" pitchFamily="34" charset="-122"/>
+                <a:cs typeface="Calibri" pitchFamily="34" charset="-120"/>
+              </a:rPr>
+              <a:t>A</a:t>
+            </a:r>
+            <a:endParaRPr lang="en-US" sz="1600" dirty="0"/>
+          </a:p>
+        </p:txBody>
+      </p:sp>
+      <p:sp>
+        <p:nvSpPr>
+          <p:cNvPr id="6" name="Text 4"/>
+          <p:cNvSpPr txBox="1"/>
+          <p:nvPr/>
+        </p:nvSpPr>
+        <p:spPr>
+          <a:xfrm>
+            <a:off x="1371600" y="2971800"/>
+            <a:ext cx="4427068" cy="1371600"/>
           </a:xfrm>
           <a:prstGeom prst="rect">
             <a:avLst/>
@@ -12264,7 +12002,7 @@
           <a:ln/>
         </p:spPr>
         <p:txBody>
-          <a:bodyPr wrap="square" lIns="0" tIns="0" rIns="0" bIns="0" rtlCol="0" anchor="t"/>
+          <a:bodyPr wrap="square" lIns="0" tIns="0" rIns="0" bIns="0" rtlCol="0" anchor="ctr"/>
           <a:lstStyle/>
           <a:p>
             <a:pPr indent="0" marL="0">
@@ -12273,13 +12011,352 @@
             <a:r>
               <a:rPr lang="en-US" sz="2200" dirty="0">
                 <a:solidFill>
-                  <a:srgbClr val="CFE3EA"/>
-                </a:solidFill>
-                <a:latin typeface="Calibri" pitchFamily="34" charset="0"/>
-                <a:ea typeface="Calibri" pitchFamily="34" charset="-122"/>
-                <a:cs typeface="Calibri" pitchFamily="34" charset="-120"/>
-              </a:rPr>
-              <a:t>Your game on a cartridge</a:t>
+                  <a:srgbClr val="1B2530"/>
+                </a:solidFill>
+                <a:latin typeface="Calibri" pitchFamily="34" charset="0"/>
+                <a:ea typeface="Calibri" pitchFamily="34" charset="-122"/>
+                <a:cs typeface="Calibri" pitchFamily="34" charset="-120"/>
+              </a:rPr>
+              <a:t>score = 1;</a:t>
+            </a:r>
+            <a:endParaRPr lang="en-US" sz="2200" dirty="0"/>
+          </a:p>
+        </p:txBody>
+      </p:sp>
+      <p:sp>
+        <p:nvSpPr>
+          <p:cNvPr id="7" name="Shape 5"/>
+          <p:cNvSpPr/>
+          <p:nvPr/>
+        </p:nvSpPr>
+        <p:spPr>
+          <a:xfrm>
+            <a:off x="6210148" y="2880360"/>
+            <a:ext cx="5432908" cy="1554480"/>
+          </a:xfrm>
+          <a:prstGeom prst="roundRect">
+            <a:avLst>
+              <a:gd name="adj" fmla="val 4706"/>
+            </a:avLst>
+          </a:prstGeom>
+          <a:solidFill>
+            <a:srgbClr val="EEF2F4"/>
+          </a:solidFill>
+          <a:ln w="12700">
+            <a:solidFill>
+              <a:srgbClr val="EEF2F4"/>
+            </a:solidFill>
+            <a:prstDash val="solid"/>
+          </a:ln>
+        </p:spPr>
+      </p:sp>
+      <p:sp>
+        <p:nvSpPr>
+          <p:cNvPr id="8" name="Text 6"/>
+          <p:cNvSpPr txBox="1"/>
+          <p:nvPr/>
+        </p:nvSpPr>
+        <p:spPr>
+          <a:xfrm>
+            <a:off x="6393028" y="3438144"/>
+            <a:ext cx="438912" cy="438912"/>
+          </a:xfrm>
+          <a:prstGeom prst="roundRect">
+            <a:avLst>
+              <a:gd name="adj" fmla="val 16667"/>
+            </a:avLst>
+          </a:prstGeom>
+          <a:solidFill>
+            <a:srgbClr val="2E4A62"/>
+          </a:solidFill>
+          <a:ln>
+            <a:solidFill>
+              <a:srgbClr val="2E4A62"/>
+            </a:solidFill>
+          </a:ln>
+        </p:spPr>
+        <p:txBody>
+          <a:bodyPr wrap="square" lIns="0" tIns="0" rIns="0" bIns="0" rtlCol="0" anchor="ctr"/>
+          <a:lstStyle/>
+          <a:p>
+            <a:pPr algn="ctr" indent="0" marL="0">
+              <a:buNone/>
+            </a:pPr>
+            <a:r>
+              <a:rPr lang="en-US" sz="1600" b="1" dirty="0">
+                <a:solidFill>
+                  <a:srgbClr val="FFFFFF"/>
+                </a:solidFill>
+                <a:latin typeface="Calibri" pitchFamily="34" charset="0"/>
+                <a:ea typeface="Calibri" pitchFamily="34" charset="-122"/>
+                <a:cs typeface="Calibri" pitchFamily="34" charset="-120"/>
+              </a:rPr>
+              <a:t>B</a:t>
+            </a:r>
+            <a:endParaRPr lang="en-US" sz="1600" dirty="0"/>
+          </a:p>
+        </p:txBody>
+      </p:sp>
+      <p:sp>
+        <p:nvSpPr>
+          <p:cNvPr id="9" name="Text 7"/>
+          <p:cNvSpPr txBox="1"/>
+          <p:nvPr/>
+        </p:nvSpPr>
+        <p:spPr>
+          <a:xfrm>
+            <a:off x="7033108" y="2971800"/>
+            <a:ext cx="4427068" cy="1371600"/>
+          </a:xfrm>
+          <a:prstGeom prst="rect">
+            <a:avLst/>
+          </a:prstGeom>
+          <a:noFill/>
+          <a:ln/>
+        </p:spPr>
+        <p:txBody>
+          <a:bodyPr wrap="square" lIns="0" tIns="0" rIns="0" bIns="0" rtlCol="0" anchor="ctr"/>
+          <a:lstStyle/>
+          <a:p>
+            <a:pPr indent="0" marL="0">
+              <a:buNone/>
+            </a:pPr>
+            <a:r>
+              <a:rPr lang="en-US" sz="2200" dirty="0">
+                <a:solidFill>
+                  <a:srgbClr val="1B2530"/>
+                </a:solidFill>
+                <a:latin typeface="Calibri" pitchFamily="34" charset="0"/>
+                <a:ea typeface="Calibri" pitchFamily="34" charset="-122"/>
+                <a:cs typeface="Calibri" pitchFamily="34" charset="-120"/>
+              </a:rPr>
+              <a:t>score += 1;</a:t>
+            </a:r>
+            <a:endParaRPr lang="en-US" sz="2200" dirty="0"/>
+          </a:p>
+        </p:txBody>
+      </p:sp>
+      <p:sp>
+        <p:nvSpPr>
+          <p:cNvPr id="10" name="Shape 8"/>
+          <p:cNvSpPr/>
+          <p:nvPr/>
+        </p:nvSpPr>
+        <p:spPr>
+          <a:xfrm>
+            <a:off x="548640" y="4663440"/>
+            <a:ext cx="5432908" cy="1554480"/>
+          </a:xfrm>
+          <a:prstGeom prst="roundRect">
+            <a:avLst>
+              <a:gd name="adj" fmla="val 4706"/>
+            </a:avLst>
+          </a:prstGeom>
+          <a:solidFill>
+            <a:srgbClr val="EEF2F4"/>
+          </a:solidFill>
+          <a:ln w="12700">
+            <a:solidFill>
+              <a:srgbClr val="EEF2F4"/>
+            </a:solidFill>
+            <a:prstDash val="solid"/>
+          </a:ln>
+        </p:spPr>
+      </p:sp>
+      <p:sp>
+        <p:nvSpPr>
+          <p:cNvPr id="11" name="Text 9"/>
+          <p:cNvSpPr txBox="1"/>
+          <p:nvPr/>
+        </p:nvSpPr>
+        <p:spPr>
+          <a:xfrm>
+            <a:off x="731520" y="5221224"/>
+            <a:ext cx="438912" cy="438912"/>
+          </a:xfrm>
+          <a:prstGeom prst="roundRect">
+            <a:avLst>
+              <a:gd name="adj" fmla="val 16667"/>
+            </a:avLst>
+          </a:prstGeom>
+          <a:solidFill>
+            <a:srgbClr val="2E4A62"/>
+          </a:solidFill>
+          <a:ln>
+            <a:solidFill>
+              <a:srgbClr val="2E4A62"/>
+            </a:solidFill>
+          </a:ln>
+        </p:spPr>
+        <p:txBody>
+          <a:bodyPr wrap="square" lIns="0" tIns="0" rIns="0" bIns="0" rtlCol="0" anchor="ctr"/>
+          <a:lstStyle/>
+          <a:p>
+            <a:pPr algn="ctr" indent="0" marL="0">
+              <a:buNone/>
+            </a:pPr>
+            <a:r>
+              <a:rPr lang="en-US" sz="1600" b="1" dirty="0">
+                <a:solidFill>
+                  <a:srgbClr val="FFFFFF"/>
+                </a:solidFill>
+                <a:latin typeface="Calibri" pitchFamily="34" charset="0"/>
+                <a:ea typeface="Calibri" pitchFamily="34" charset="-122"/>
+                <a:cs typeface="Calibri" pitchFamily="34" charset="-120"/>
+              </a:rPr>
+              <a:t>C</a:t>
+            </a:r>
+            <a:endParaRPr lang="en-US" sz="1600" dirty="0"/>
+          </a:p>
+        </p:txBody>
+      </p:sp>
+      <p:sp>
+        <p:nvSpPr>
+          <p:cNvPr id="12" name="Text 10"/>
+          <p:cNvSpPr txBox="1"/>
+          <p:nvPr/>
+        </p:nvSpPr>
+        <p:spPr>
+          <a:xfrm>
+            <a:off x="1371600" y="4754880"/>
+            <a:ext cx="4427068" cy="1371600"/>
+          </a:xfrm>
+          <a:prstGeom prst="rect">
+            <a:avLst/>
+          </a:prstGeom>
+          <a:noFill/>
+          <a:ln/>
+        </p:spPr>
+        <p:txBody>
+          <a:bodyPr wrap="square" lIns="0" tIns="0" rIns="0" bIns="0" rtlCol="0" anchor="ctr"/>
+          <a:lstStyle/>
+          <a:p>
+            <a:pPr indent="0" marL="0">
+              <a:buNone/>
+            </a:pPr>
+            <a:r>
+              <a:rPr lang="en-US" sz="2200" dirty="0">
+                <a:solidFill>
+                  <a:srgbClr val="1B2530"/>
+                </a:solidFill>
+                <a:latin typeface="Calibri" pitchFamily="34" charset="0"/>
+                <a:ea typeface="Calibri" pitchFamily="34" charset="-122"/>
+                <a:cs typeface="Calibri" pitchFamily="34" charset="-120"/>
+              </a:rPr>
+              <a:t>score == 1;</a:t>
+            </a:r>
+            <a:endParaRPr lang="en-US" sz="2200" dirty="0"/>
+          </a:p>
+        </p:txBody>
+      </p:sp>
+      <p:sp>
+        <p:nvSpPr>
+          <p:cNvPr id="13" name="Shape 11"/>
+          <p:cNvSpPr/>
+          <p:nvPr/>
+        </p:nvSpPr>
+        <p:spPr>
+          <a:xfrm>
+            <a:off x="6210148" y="4663440"/>
+            <a:ext cx="5432908" cy="1554480"/>
+          </a:xfrm>
+          <a:prstGeom prst="roundRect">
+            <a:avLst>
+              <a:gd name="adj" fmla="val 4706"/>
+            </a:avLst>
+          </a:prstGeom>
+          <a:solidFill>
+            <a:srgbClr val="EEF2F4"/>
+          </a:solidFill>
+          <a:ln w="12700">
+            <a:solidFill>
+              <a:srgbClr val="EEF2F4"/>
+            </a:solidFill>
+            <a:prstDash val="solid"/>
+          </a:ln>
+        </p:spPr>
+      </p:sp>
+      <p:sp>
+        <p:nvSpPr>
+          <p:cNvPr id="14" name="Text 12"/>
+          <p:cNvSpPr txBox="1"/>
+          <p:nvPr/>
+        </p:nvSpPr>
+        <p:spPr>
+          <a:xfrm>
+            <a:off x="6393028" y="5221224"/>
+            <a:ext cx="438912" cy="438912"/>
+          </a:xfrm>
+          <a:prstGeom prst="roundRect">
+            <a:avLst>
+              <a:gd name="adj" fmla="val 16667"/>
+            </a:avLst>
+          </a:prstGeom>
+          <a:solidFill>
+            <a:srgbClr val="2E4A62"/>
+          </a:solidFill>
+          <a:ln>
+            <a:solidFill>
+              <a:srgbClr val="2E4A62"/>
+            </a:solidFill>
+          </a:ln>
+        </p:spPr>
+        <p:txBody>
+          <a:bodyPr wrap="square" lIns="0" tIns="0" rIns="0" bIns="0" rtlCol="0" anchor="ctr"/>
+          <a:lstStyle/>
+          <a:p>
+            <a:pPr algn="ctr" indent="0" marL="0">
+              <a:buNone/>
+            </a:pPr>
+            <a:r>
+              <a:rPr lang="en-US" sz="1600" b="1" dirty="0">
+                <a:solidFill>
+                  <a:srgbClr val="FFFFFF"/>
+                </a:solidFill>
+                <a:latin typeface="Calibri" pitchFamily="34" charset="0"/>
+                <a:ea typeface="Calibri" pitchFamily="34" charset="-122"/>
+                <a:cs typeface="Calibri" pitchFamily="34" charset="-120"/>
+              </a:rPr>
+              <a:t>D</a:t>
+            </a:r>
+            <a:endParaRPr lang="en-US" sz="1600" dirty="0"/>
+          </a:p>
+        </p:txBody>
+      </p:sp>
+      <p:sp>
+        <p:nvSpPr>
+          <p:cNvPr id="15" name="Text 13"/>
+          <p:cNvSpPr txBox="1"/>
+          <p:nvPr/>
+        </p:nvSpPr>
+        <p:spPr>
+          <a:xfrm>
+            <a:off x="7033108" y="4754880"/>
+            <a:ext cx="4427068" cy="1371600"/>
+          </a:xfrm>
+          <a:prstGeom prst="rect">
+            <a:avLst/>
+          </a:prstGeom>
+          <a:noFill/>
+          <a:ln/>
+        </p:spPr>
+        <p:txBody>
+          <a:bodyPr wrap="square" lIns="0" tIns="0" rIns="0" bIns="0" rtlCol="0" anchor="ctr"/>
+          <a:lstStyle/>
+          <a:p>
+            <a:pPr indent="0" marL="0">
+              <a:buNone/>
+            </a:pPr>
+            <a:r>
+              <a:rPr lang="en-US" sz="2200" dirty="0">
+                <a:solidFill>
+                  <a:srgbClr val="1B2530"/>
+                </a:solidFill>
+                <a:latin typeface="Calibri" pitchFamily="34" charset="0"/>
+                <a:ea typeface="Calibri" pitchFamily="34" charset="-122"/>
+                <a:cs typeface="Calibri" pitchFamily="34" charset="-120"/>
+              </a:rPr>
+              <a:t>if (score)</a:t>
             </a:r>
             <a:endParaRPr lang="en-US" sz="2200" dirty="0"/>
           </a:p>
@@ -12315,7 +12392,7 @@
             <a:lvl1pPr>
               <a:defRPr sz="1000">
                 <a:solidFill>
-                  <a:srgbClr val="CFE3EA"/>
+                  <a:srgbClr val="5B6B78"/>
                 </a:solidFill>
                 <a:latin typeface="Calibri"/>
                 <a:ea typeface="Calibri"/>
@@ -12360,16 +12437,14 @@
       </p:grpSpPr>
       <p:sp>
         <p:nvSpPr>
-          <p:cNvPr id="2" name="Text 1"/>
-          <p:cNvSpPr/>
-          <p:nvPr>
-            <p:ph idx="101" type="title" hasCustomPrompt="1"/>
-          </p:nvPr>
-        </p:nvSpPr>
-        <p:spPr>
-          <a:xfrm>
-            <a:off x="548640" y="384048"/>
-            <a:ext cx="11094415" cy="868680"/>
+          <p:cNvPr id="2" name="Text 0"/>
+          <p:cNvSpPr txBox="1"/>
+          <p:nvPr/>
+        </p:nvSpPr>
+        <p:spPr>
+          <a:xfrm>
+            <a:off x="548640" y="1371600"/>
+            <a:ext cx="2743200" cy="1188720"/>
           </a:xfrm>
           <a:prstGeom prst="rect">
             <a:avLst/>
@@ -12378,24 +12453,24 @@
           <a:ln/>
         </p:spPr>
         <p:txBody>
-          <a:bodyPr wrap="square" lIns="0" tIns="0" rIns="0" bIns="0" rtlCol="0" anchor="ctr"/>
-          <a:lstStyle/>
-          <a:p>
-            <a:pPr algn="l" indent="0" marL="0">
-              <a:buNone/>
-            </a:pPr>
-            <a:r>
-              <a:rPr lang="en-US" sz="3000" b="1" dirty="0">
-                <a:solidFill>
-                  <a:srgbClr val="2E4A62"/>
+          <a:bodyPr wrap="square" lIns="0" tIns="0" rIns="0" bIns="0" rtlCol="0" anchor="t"/>
+          <a:lstStyle/>
+          <a:p>
+            <a:pPr indent="0" marL="0">
+              <a:buNone/>
+            </a:pPr>
+            <a:r>
+              <a:rPr lang="en-US" sz="8000" b="1" dirty="0">
+                <a:solidFill>
+                  <a:srgbClr val="B9A4E3"/>
                 </a:solidFill>
                 <a:latin typeface="Cambria" pitchFamily="34" charset="0"/>
                 <a:ea typeface="Cambria" pitchFamily="34" charset="-122"/>
                 <a:cs typeface="Cambria" pitchFamily="34" charset="-120"/>
               </a:rPr>
-              <a:t>Get ready to share</a:t>
-            </a:r>
-            <a:endParaRPr lang="en-US" sz="3000" dirty="0"/>
+              <a:t>05</a:t>
+            </a:r>
+            <a:endParaRPr lang="en-US" sz="8000" dirty="0"/>
           </a:p>
         </p:txBody>
       </p:sp>
@@ -12407,55 +12482,8 @@
         </p:nvSpPr>
         <p:spPr>
           <a:xfrm>
-            <a:off x="548640" y="1481328"/>
-            <a:ext cx="438912" cy="438912"/>
-          </a:xfrm>
-          <a:prstGeom prst="roundRect">
-            <a:avLst>
-              <a:gd name="adj" fmla="val 16667"/>
-            </a:avLst>
-          </a:prstGeom>
-          <a:solidFill>
-            <a:srgbClr val="6B4FA0"/>
-          </a:solidFill>
-          <a:ln>
-            <a:solidFill>
-              <a:srgbClr val="6B4FA0"/>
-            </a:solidFill>
-          </a:ln>
-        </p:spPr>
-        <p:txBody>
-          <a:bodyPr wrap="square" lIns="0" tIns="0" rIns="0" bIns="0" rtlCol="0" anchor="ctr"/>
-          <a:lstStyle/>
-          <a:p>
-            <a:pPr algn="ctr" indent="0" marL="0">
-              <a:buNone/>
-            </a:pPr>
-            <a:r>
-              <a:rPr lang="en-US" sz="1600" b="1" dirty="0">
-                <a:solidFill>
-                  <a:srgbClr val="FFFFFF"/>
-                </a:solidFill>
-                <a:latin typeface="Calibri" pitchFamily="34" charset="0"/>
-                <a:ea typeface="Calibri" pitchFamily="34" charset="-122"/>
-                <a:cs typeface="Calibri" pitchFamily="34" charset="-120"/>
-              </a:rPr>
-              <a:t>1</a:t>
-            </a:r>
-            <a:endParaRPr lang="en-US" sz="1600" dirty="0"/>
-          </a:p>
-        </p:txBody>
-      </p:sp>
-      <p:sp>
-        <p:nvSpPr>
-          <p:cNvPr id="4" name="Text 2"/>
-          <p:cNvSpPr txBox="1"/>
-          <p:nvPr/>
-        </p:nvSpPr>
-        <p:spPr>
-          <a:xfrm>
-            <a:off x="1234440" y="1463040"/>
-            <a:ext cx="6446520" cy="475488"/>
+            <a:off x="548640" y="2834640"/>
+            <a:ext cx="11094415" cy="1371600"/>
           </a:xfrm>
           <a:prstGeom prst="rect">
             <a:avLst/>
@@ -12471,331 +12499,7 @@
               <a:buNone/>
             </a:pPr>
             <a:r>
-              <a:rPr lang="en-US" sz="2400" dirty="0">
-                <a:solidFill>
-                  <a:srgbClr val="1B2530"/>
-                </a:solidFill>
-                <a:latin typeface="Calibri" pitchFamily="34" charset="0"/>
-                <a:ea typeface="Calibri" pitchFamily="34" charset="-122"/>
-                <a:cs typeface="Calibri" pitchFamily="34" charset="-120"/>
-              </a:rPr>
-              <a:t>Choose your best game</a:t>
-            </a:r>
-            <a:endParaRPr lang="en-US" sz="2400" dirty="0"/>
-          </a:p>
-        </p:txBody>
-      </p:sp>
-      <p:sp>
-        <p:nvSpPr>
-          <p:cNvPr id="5" name="Text 3"/>
-          <p:cNvSpPr txBox="1"/>
-          <p:nvPr/>
-        </p:nvSpPr>
-        <p:spPr>
-          <a:xfrm>
-            <a:off x="548640" y="2706624"/>
-            <a:ext cx="438912" cy="438912"/>
-          </a:xfrm>
-          <a:prstGeom prst="roundRect">
-            <a:avLst>
-              <a:gd name="adj" fmla="val 16667"/>
-            </a:avLst>
-          </a:prstGeom>
-          <a:solidFill>
-            <a:srgbClr val="6B4FA0"/>
-          </a:solidFill>
-          <a:ln>
-            <a:solidFill>
-              <a:srgbClr val="6B4FA0"/>
-            </a:solidFill>
-          </a:ln>
-        </p:spPr>
-        <p:txBody>
-          <a:bodyPr wrap="square" lIns="0" tIns="0" rIns="0" bIns="0" rtlCol="0" anchor="ctr"/>
-          <a:lstStyle/>
-          <a:p>
-            <a:pPr algn="ctr" indent="0" marL="0">
-              <a:buNone/>
-            </a:pPr>
-            <a:r>
-              <a:rPr lang="en-US" sz="1600" b="1" dirty="0">
-                <a:solidFill>
-                  <a:srgbClr val="FFFFFF"/>
-                </a:solidFill>
-                <a:latin typeface="Calibri" pitchFamily="34" charset="0"/>
-                <a:ea typeface="Calibri" pitchFamily="34" charset="-122"/>
-                <a:cs typeface="Calibri" pitchFamily="34" charset="-120"/>
-              </a:rPr>
-              <a:t>2</a:t>
-            </a:r>
-            <a:endParaRPr lang="en-US" sz="1600" dirty="0"/>
-          </a:p>
-        </p:txBody>
-      </p:sp>
-      <p:sp>
-        <p:nvSpPr>
-          <p:cNvPr id="6" name="Text 4"/>
-          <p:cNvSpPr txBox="1"/>
-          <p:nvPr/>
-        </p:nvSpPr>
-        <p:spPr>
-          <a:xfrm>
-            <a:off x="1234440" y="2688336"/>
-            <a:ext cx="6446520" cy="475488"/>
-          </a:xfrm>
-          <a:prstGeom prst="rect">
-            <a:avLst/>
-          </a:prstGeom>
-          <a:noFill/>
-          <a:ln/>
-        </p:spPr>
-        <p:txBody>
-          <a:bodyPr wrap="square" lIns="0" tIns="0" rIns="0" bIns="0" rtlCol="0" anchor="ctr"/>
-          <a:lstStyle/>
-          <a:p>
-            <a:pPr indent="0" marL="0">
-              <a:buNone/>
-            </a:pPr>
-            <a:r>
-              <a:rPr lang="en-US" sz="2400" dirty="0">
-                <a:solidFill>
-                  <a:srgbClr val="1B2530"/>
-                </a:solidFill>
-                <a:latin typeface="Calibri" pitchFamily="34" charset="0"/>
-                <a:ea typeface="Calibri" pitchFamily="34" charset="-122"/>
-                <a:cs typeface="Calibri" pitchFamily="34" charset="-120"/>
-              </a:rPr>
-              <a:t>Check the title: is it a good name?</a:t>
-            </a:r>
-            <a:endParaRPr lang="en-US" sz="2400" dirty="0"/>
-          </a:p>
-        </p:txBody>
-      </p:sp>
-      <p:sp>
-        <p:nvSpPr>
-          <p:cNvPr id="7" name="Text 5"/>
-          <p:cNvSpPr txBox="1"/>
-          <p:nvPr/>
-        </p:nvSpPr>
-        <p:spPr>
-          <a:xfrm>
-            <a:off x="548640" y="3931920"/>
-            <a:ext cx="438912" cy="438912"/>
-          </a:xfrm>
-          <a:prstGeom prst="roundRect">
-            <a:avLst>
-              <a:gd name="adj" fmla="val 16667"/>
-            </a:avLst>
-          </a:prstGeom>
-          <a:solidFill>
-            <a:srgbClr val="6B4FA0"/>
-          </a:solidFill>
-          <a:ln>
-            <a:solidFill>
-              <a:srgbClr val="6B4FA0"/>
-            </a:solidFill>
-          </a:ln>
-        </p:spPr>
-        <p:txBody>
-          <a:bodyPr wrap="square" lIns="0" tIns="0" rIns="0" bIns="0" rtlCol="0" anchor="ctr"/>
-          <a:lstStyle/>
-          <a:p>
-            <a:pPr algn="ctr" indent="0" marL="0">
-              <a:buNone/>
-            </a:pPr>
-            <a:r>
-              <a:rPr lang="en-US" sz="1600" b="1" dirty="0">
-                <a:solidFill>
-                  <a:srgbClr val="FFFFFF"/>
-                </a:solidFill>
-                <a:latin typeface="Calibri" pitchFamily="34" charset="0"/>
-                <a:ea typeface="Calibri" pitchFamily="34" charset="-122"/>
-                <a:cs typeface="Calibri" pitchFamily="34" charset="-120"/>
-              </a:rPr>
-              <a:t>3</a:t>
-            </a:r>
-            <a:endParaRPr lang="en-US" sz="1600" dirty="0"/>
-          </a:p>
-        </p:txBody>
-      </p:sp>
-      <p:sp>
-        <p:nvSpPr>
-          <p:cNvPr id="8" name="Text 6"/>
-          <p:cNvSpPr txBox="1"/>
-          <p:nvPr/>
-        </p:nvSpPr>
-        <p:spPr>
-          <a:xfrm>
-            <a:off x="1234440" y="3913632"/>
-            <a:ext cx="6446520" cy="475488"/>
-          </a:xfrm>
-          <a:prstGeom prst="rect">
-            <a:avLst/>
-          </a:prstGeom>
-          <a:noFill/>
-          <a:ln/>
-        </p:spPr>
-        <p:txBody>
-          <a:bodyPr wrap="square" lIns="0" tIns="0" rIns="0" bIns="0" rtlCol="0" anchor="ctr"/>
-          <a:lstStyle/>
-          <a:p>
-            <a:pPr indent="0" marL="0">
-              <a:buNone/>
-            </a:pPr>
-            <a:r>
-              <a:rPr lang="en-US" sz="2400" dirty="0">
-                <a:solidFill>
-                  <a:srgbClr val="1B2530"/>
-                </a:solidFill>
-                <a:latin typeface="Calibri" pitchFamily="34" charset="0"/>
-                <a:ea typeface="Calibri" pitchFamily="34" charset="-122"/>
-                <a:cs typeface="Calibri" pitchFamily="34" charset="-120"/>
-              </a:rPr>
-              <a:t>Check: no full names, no private things</a:t>
-            </a:r>
-            <a:endParaRPr lang="en-US" sz="2400" dirty="0"/>
-          </a:p>
-        </p:txBody>
-      </p:sp>
-      <p:sp>
-        <p:nvSpPr>
-          <p:cNvPr id="9" name="Text 7"/>
-          <p:cNvSpPr txBox="1"/>
-          <p:nvPr/>
-        </p:nvSpPr>
-        <p:spPr>
-          <a:xfrm>
-            <a:off x="548640" y="5157216"/>
-            <a:ext cx="438912" cy="438912"/>
-          </a:xfrm>
-          <a:prstGeom prst="roundRect">
-            <a:avLst>
-              <a:gd name="adj" fmla="val 16667"/>
-            </a:avLst>
-          </a:prstGeom>
-          <a:solidFill>
-            <a:srgbClr val="6B4FA0"/>
-          </a:solidFill>
-          <a:ln>
-            <a:solidFill>
-              <a:srgbClr val="6B4FA0"/>
-            </a:solidFill>
-          </a:ln>
-        </p:spPr>
-        <p:txBody>
-          <a:bodyPr wrap="square" lIns="0" tIns="0" rIns="0" bIns="0" rtlCol="0" anchor="ctr"/>
-          <a:lstStyle/>
-          <a:p>
-            <a:pPr algn="ctr" indent="0" marL="0">
-              <a:buNone/>
-            </a:pPr>
-            <a:r>
-              <a:rPr lang="en-US" sz="1600" b="1" dirty="0">
-                <a:solidFill>
-                  <a:srgbClr val="FFFFFF"/>
-                </a:solidFill>
-                <a:latin typeface="Calibri" pitchFamily="34" charset="0"/>
-                <a:ea typeface="Calibri" pitchFamily="34" charset="-122"/>
-                <a:cs typeface="Calibri" pitchFamily="34" charset="-120"/>
-              </a:rPr>
-              <a:t>4</a:t>
-            </a:r>
-            <a:endParaRPr lang="en-US" sz="1600" dirty="0"/>
-          </a:p>
-        </p:txBody>
-      </p:sp>
-      <p:sp>
-        <p:nvSpPr>
-          <p:cNvPr id="10" name="Text 8"/>
-          <p:cNvSpPr txBox="1"/>
-          <p:nvPr/>
-        </p:nvSpPr>
-        <p:spPr>
-          <a:xfrm>
-            <a:off x="1234440" y="5138928"/>
-            <a:ext cx="6446520" cy="475488"/>
-          </a:xfrm>
-          <a:prstGeom prst="rect">
-            <a:avLst/>
-          </a:prstGeom>
-          <a:noFill/>
-          <a:ln/>
-        </p:spPr>
-        <p:txBody>
-          <a:bodyPr wrap="square" lIns="0" tIns="0" rIns="0" bIns="0" rtlCol="0" anchor="ctr"/>
-          <a:lstStyle/>
-          <a:p>
-            <a:pPr indent="0" marL="0">
-              <a:buNone/>
-            </a:pPr>
-            <a:r>
-              <a:rPr lang="en-US" sz="2400" dirty="0">
-                <a:solidFill>
-                  <a:srgbClr val="1B2530"/>
-                </a:solidFill>
-                <a:latin typeface="Calibri" pitchFamily="34" charset="0"/>
-                <a:ea typeface="Calibri" pitchFamily="34" charset="-122"/>
-                <a:cs typeface="Calibri" pitchFamily="34" charset="-120"/>
-              </a:rPr>
-              <a:t>Play it once more from the start</a:t>
-            </a:r>
-            <a:endParaRPr lang="en-US" sz="2400" dirty="0"/>
-          </a:p>
-        </p:txBody>
-      </p:sp>
-      <p:sp>
-        <p:nvSpPr>
-          <p:cNvPr id="11" name="Shape 9"/>
-          <p:cNvSpPr/>
-          <p:nvPr/>
-        </p:nvSpPr>
-        <p:spPr>
-          <a:xfrm>
-            <a:off x="8092440" y="1463040"/>
-            <a:ext cx="3550615" cy="1143000"/>
-          </a:xfrm>
-          <a:prstGeom prst="roundRect">
-            <a:avLst>
-              <a:gd name="adj" fmla="val 6400"/>
-            </a:avLst>
-          </a:prstGeom>
-          <a:solidFill>
-            <a:srgbClr val="1B2530"/>
-          </a:solidFill>
-          <a:ln w="12700">
-            <a:solidFill>
-              <a:srgbClr val="1B2530"/>
-            </a:solidFill>
-            <a:prstDash val="solid"/>
-          </a:ln>
-        </p:spPr>
-      </p:sp>
-      <p:sp>
-        <p:nvSpPr>
-          <p:cNvPr id="12" name="Text 10"/>
-          <p:cNvSpPr txBox="1"/>
-          <p:nvPr/>
-        </p:nvSpPr>
-        <p:spPr>
-          <a:xfrm>
-            <a:off x="8321040" y="1600200"/>
-            <a:ext cx="3093415" cy="457200"/>
-          </a:xfrm>
-          <a:prstGeom prst="rect">
-            <a:avLst/>
-          </a:prstGeom>
-          <a:noFill/>
-          <a:ln/>
-        </p:spPr>
-        <p:txBody>
-          <a:bodyPr wrap="square" lIns="0" tIns="0" rIns="0" bIns="0" rtlCol="0" anchor="t"/>
-          <a:lstStyle/>
-          <a:p>
-            <a:pPr indent="0" marL="0">
-              <a:buNone/>
-            </a:pPr>
-            <a:r>
-              <a:rPr lang="en-US" sz="2200" b="1" dirty="0">
+              <a:rPr lang="en-US" sz="4200" b="1" dirty="0">
                 <a:solidFill>
                   <a:srgbClr val="FFFFFF"/>
                 </a:solidFill>
@@ -12803,22 +12507,22 @@
                 <a:ea typeface="Cambria" pitchFamily="34" charset="-122"/>
                 <a:cs typeface="Cambria" pitchFamily="34" charset="-120"/>
               </a:rPr>
-              <a:t>Step 11</a:t>
-            </a:r>
-            <a:endParaRPr lang="en-US" sz="2200" dirty="0"/>
-          </a:p>
-        </p:txBody>
-      </p:sp>
-      <p:sp>
-        <p:nvSpPr>
-          <p:cNvPr id="13" name="Text 11"/>
-          <p:cNvSpPr txBox="1"/>
-          <p:nvPr/>
-        </p:nvSpPr>
-        <p:spPr>
-          <a:xfrm>
-            <a:off x="8321040" y="2084832"/>
-            <a:ext cx="3093415" cy="365760"/>
+              <a:t>Mission 5</a:t>
+            </a:r>
+            <a:endParaRPr lang="en-US" sz="4200" dirty="0"/>
+          </a:p>
+        </p:txBody>
+      </p:sp>
+      <p:sp>
+        <p:nvSpPr>
+          <p:cNvPr id="4" name="Text 2"/>
+          <p:cNvSpPr txBox="1"/>
+          <p:nvPr/>
+        </p:nvSpPr>
+        <p:spPr>
+          <a:xfrm>
+            <a:off x="548640" y="4389120"/>
+            <a:ext cx="11094415" cy="1097280"/>
           </a:xfrm>
           <a:prstGeom prst="rect">
             <a:avLst/>
@@ -12834,7 +12538,7 @@
               <a:buNone/>
             </a:pPr>
             <a:r>
-              <a:rPr lang="en-US" sz="1600" dirty="0">
+              <a:rPr lang="en-US" sz="2200" dirty="0">
                 <a:solidFill>
                   <a:srgbClr val="CFE3EA"/>
                 </a:solidFill>
@@ -12842,112 +12546,7 @@
                 <a:ea typeface="Calibri" pitchFamily="34" charset="-122"/>
                 <a:cs typeface="Calibri" pitchFamily="34" charset="-120"/>
               </a:rPr>
-              <a:t>about 3 min</a:t>
-            </a:r>
-            <a:endParaRPr lang="en-US" sz="1600" dirty="0"/>
-          </a:p>
-        </p:txBody>
-      </p:sp>
-      <p:sp>
-        <p:nvSpPr>
-          <p:cNvPr id="14" name="Shape 12"/>
-          <p:cNvSpPr/>
-          <p:nvPr/>
-        </p:nvSpPr>
-        <p:spPr>
-          <a:xfrm>
-            <a:off x="8092440" y="2834640"/>
-            <a:ext cx="3550615" cy="3383280"/>
-          </a:xfrm>
-          <a:prstGeom prst="roundRect">
-            <a:avLst>
-              <a:gd name="adj" fmla="val 2162"/>
-            </a:avLst>
-          </a:prstGeom>
-          <a:solidFill>
-            <a:srgbClr val="EEF2F4"/>
-          </a:solidFill>
-          <a:ln w="12700">
-            <a:solidFill>
-              <a:srgbClr val="EEF2F4"/>
-            </a:solidFill>
-            <a:prstDash val="solid"/>
-          </a:ln>
-        </p:spPr>
-      </p:sp>
-      <p:sp>
-        <p:nvSpPr>
-          <p:cNvPr id="15" name="Text 13"/>
-          <p:cNvSpPr txBox="1"/>
-          <p:nvPr/>
-        </p:nvSpPr>
-        <p:spPr>
-          <a:xfrm>
-            <a:off x="8321040" y="2971800"/>
-            <a:ext cx="3093415" cy="365760"/>
-          </a:xfrm>
-          <a:prstGeom prst="rect">
-            <a:avLst/>
-          </a:prstGeom>
-          <a:noFill/>
-          <a:ln/>
-        </p:spPr>
-        <p:txBody>
-          <a:bodyPr wrap="square" lIns="0" tIns="0" rIns="0" bIns="0" rtlCol="0" anchor="t"/>
-          <a:lstStyle/>
-          <a:p>
-            <a:pPr indent="0" marL="0">
-              <a:buNone/>
-            </a:pPr>
-            <a:r>
-              <a:rPr lang="en-US" sz="1500" b="1" dirty="0">
-                <a:solidFill>
-                  <a:srgbClr val="2F7D4F"/>
-                </a:solidFill>
-                <a:latin typeface="Calibri" pitchFamily="34" charset="0"/>
-                <a:ea typeface="Calibri" pitchFamily="34" charset="-122"/>
-                <a:cs typeface="Calibri" pitchFamily="34" charset="-120"/>
-              </a:rPr>
-              <a:t>You should see</a:t>
-            </a:r>
-            <a:endParaRPr lang="en-US" sz="1500" dirty="0"/>
-          </a:p>
-        </p:txBody>
-      </p:sp>
-      <p:sp>
-        <p:nvSpPr>
-          <p:cNvPr id="16" name="Text 14"/>
-          <p:cNvSpPr txBox="1"/>
-          <p:nvPr/>
-        </p:nvSpPr>
-        <p:spPr>
-          <a:xfrm>
-            <a:off x="8321040" y="3429000"/>
-            <a:ext cx="3093415" cy="2606040"/>
-          </a:xfrm>
-          <a:prstGeom prst="rect">
-            <a:avLst/>
-          </a:prstGeom>
-          <a:noFill/>
-          <a:ln/>
-        </p:spPr>
-        <p:txBody>
-          <a:bodyPr wrap="square" lIns="0" tIns="0" rIns="0" bIns="0" rtlCol="0" anchor="t"/>
-          <a:lstStyle/>
-          <a:p>
-            <a:pPr indent="0" marL="0">
-              <a:buNone/>
-            </a:pPr>
-            <a:r>
-              <a:rPr lang="en-US" sz="2200" dirty="0">
-                <a:solidFill>
-                  <a:srgbClr val="1B2530"/>
-                </a:solidFill>
-                <a:latin typeface="Calibri" pitchFamily="34" charset="0"/>
-                <a:ea typeface="Calibri" pitchFamily="34" charset="-122"/>
-                <a:cs typeface="Calibri" pitchFamily="34" charset="-120"/>
-              </a:rPr>
-              <a:t>A game you are proud of, with a title that is kind and safe.</a:t>
+              <a:t>Your game on a cartridge</a:t>
             </a:r>
             <a:endParaRPr lang="en-US" sz="2200" dirty="0"/>
           </a:p>
@@ -12983,7 +12582,7 @@
             <a:lvl1pPr>
               <a:defRPr sz="1000">
                 <a:solidFill>
-                  <a:srgbClr val="5B6B78"/>
+                  <a:srgbClr val="CFE3EA"/>
                 </a:solidFill>
                 <a:latin typeface="Calibri"/>
                 <a:ea typeface="Calibri"/>
@@ -13061,7 +12660,7 @@
                 <a:ea typeface="Cambria" pitchFamily="34" charset="-122"/>
                 <a:cs typeface="Cambria" pitchFamily="34" charset="-120"/>
               </a:rPr>
-              <a:t>Make the cartridge</a:t>
+              <a:t>Get ready to share</a:t>
             </a:r>
             <a:endParaRPr lang="en-US" sz="3000" dirty="0"/>
           </a:p>
@@ -13147,7 +12746,7 @@
                 <a:ea typeface="Calibri" pitchFamily="34" charset="-122"/>
                 <a:cs typeface="Calibri" pitchFamily="34" charset="-120"/>
               </a:rPr>
-              <a:t>Click Compile Cartridge</a:t>
+              <a:t>Choose your best game</a:t>
             </a:r>
             <a:endParaRPr lang="en-US" sz="2400" dirty="0"/>
           </a:p>
@@ -13161,7 +12760,7 @@
         </p:nvSpPr>
         <p:spPr>
           <a:xfrm>
-            <a:off x="548640" y="3115056"/>
+            <a:off x="548640" y="2706624"/>
             <a:ext cx="438912" cy="438912"/>
           </a:xfrm>
           <a:prstGeom prst="roundRect">
@@ -13208,7 +12807,7 @@
         </p:nvSpPr>
         <p:spPr>
           <a:xfrm>
-            <a:off x="1234440" y="3096768"/>
+            <a:off x="1234440" y="2688336"/>
             <a:ext cx="6446520" cy="475488"/>
           </a:xfrm>
           <a:prstGeom prst="rect">
@@ -13233,7 +12832,7 @@
                 <a:ea typeface="Calibri" pitchFamily="34" charset="-122"/>
                 <a:cs typeface="Calibri" pitchFamily="34" charset="-120"/>
               </a:rPr>
-              <a:t>Wait for the message</a:t>
+              <a:t>Check the title: is it a good name?</a:t>
             </a:r>
             <a:endParaRPr lang="en-US" sz="2400" dirty="0"/>
           </a:p>
@@ -13247,7 +12846,7 @@
         </p:nvSpPr>
         <p:spPr>
           <a:xfrm>
-            <a:off x="548640" y="4748784"/>
+            <a:off x="548640" y="3931920"/>
             <a:ext cx="438912" cy="438912"/>
           </a:xfrm>
           <a:prstGeom prst="roundRect">
@@ -13294,7 +12893,7 @@
         </p:nvSpPr>
         <p:spPr>
           <a:xfrm>
-            <a:off x="1234440" y="4730496"/>
+            <a:off x="1234440" y="3913632"/>
             <a:ext cx="6446520" cy="475488"/>
           </a:xfrm>
           <a:prstGeom prst="rect">
@@ -13319,7 +12918,7 @@
                 <a:ea typeface="Calibri" pitchFamily="34" charset="-122"/>
                 <a:cs typeface="Calibri" pitchFamily="34" charset="-120"/>
               </a:rPr>
-              <a:t>Look for the green download buttons</a:t>
+              <a:t>Check: no full names, no private things</a:t>
             </a:r>
             <a:endParaRPr lang="en-US" sz="2400" dirty="0"/>
           </a:p>
@@ -13327,7 +12926,93 @@
       </p:sp>
       <p:sp>
         <p:nvSpPr>
-          <p:cNvPr id="9" name="Shape 7"/>
+          <p:cNvPr id="9" name="Text 7"/>
+          <p:cNvSpPr txBox="1"/>
+          <p:nvPr/>
+        </p:nvSpPr>
+        <p:spPr>
+          <a:xfrm>
+            <a:off x="548640" y="5157216"/>
+            <a:ext cx="438912" cy="438912"/>
+          </a:xfrm>
+          <a:prstGeom prst="roundRect">
+            <a:avLst>
+              <a:gd name="adj" fmla="val 16667"/>
+            </a:avLst>
+          </a:prstGeom>
+          <a:solidFill>
+            <a:srgbClr val="6B4FA0"/>
+          </a:solidFill>
+          <a:ln>
+            <a:solidFill>
+              <a:srgbClr val="6B4FA0"/>
+            </a:solidFill>
+          </a:ln>
+        </p:spPr>
+        <p:txBody>
+          <a:bodyPr wrap="square" lIns="0" tIns="0" rIns="0" bIns="0" rtlCol="0" anchor="ctr"/>
+          <a:lstStyle/>
+          <a:p>
+            <a:pPr algn="ctr" indent="0" marL="0">
+              <a:buNone/>
+            </a:pPr>
+            <a:r>
+              <a:rPr lang="en-US" sz="1600" b="1" dirty="0">
+                <a:solidFill>
+                  <a:srgbClr val="FFFFFF"/>
+                </a:solidFill>
+                <a:latin typeface="Calibri" pitchFamily="34" charset="0"/>
+                <a:ea typeface="Calibri" pitchFamily="34" charset="-122"/>
+                <a:cs typeface="Calibri" pitchFamily="34" charset="-120"/>
+              </a:rPr>
+              <a:t>4</a:t>
+            </a:r>
+            <a:endParaRPr lang="en-US" sz="1600" dirty="0"/>
+          </a:p>
+        </p:txBody>
+      </p:sp>
+      <p:sp>
+        <p:nvSpPr>
+          <p:cNvPr id="10" name="Text 8"/>
+          <p:cNvSpPr txBox="1"/>
+          <p:nvPr/>
+        </p:nvSpPr>
+        <p:spPr>
+          <a:xfrm>
+            <a:off x="1234440" y="5138928"/>
+            <a:ext cx="6446520" cy="475488"/>
+          </a:xfrm>
+          <a:prstGeom prst="rect">
+            <a:avLst/>
+          </a:prstGeom>
+          <a:noFill/>
+          <a:ln/>
+        </p:spPr>
+        <p:txBody>
+          <a:bodyPr wrap="square" lIns="0" tIns="0" rIns="0" bIns="0" rtlCol="0" anchor="ctr"/>
+          <a:lstStyle/>
+          <a:p>
+            <a:pPr indent="0" marL="0">
+              <a:buNone/>
+            </a:pPr>
+            <a:r>
+              <a:rPr lang="en-US" sz="2400" dirty="0">
+                <a:solidFill>
+                  <a:srgbClr val="1B2530"/>
+                </a:solidFill>
+                <a:latin typeface="Calibri" pitchFamily="34" charset="0"/>
+                <a:ea typeface="Calibri" pitchFamily="34" charset="-122"/>
+                <a:cs typeface="Calibri" pitchFamily="34" charset="-120"/>
+              </a:rPr>
+              <a:t>Play it once more from the start</a:t>
+            </a:r>
+            <a:endParaRPr lang="en-US" sz="2400" dirty="0"/>
+          </a:p>
+        </p:txBody>
+      </p:sp>
+      <p:sp>
+        <p:nvSpPr>
+          <p:cNvPr id="11" name="Shape 9"/>
           <p:cNvSpPr/>
           <p:nvPr/>
         </p:nvSpPr>
@@ -13354,7 +13039,7 @@
       </p:sp>
       <p:sp>
         <p:nvSpPr>
-          <p:cNvPr id="10" name="Text 8"/>
+          <p:cNvPr id="12" name="Text 10"/>
           <p:cNvSpPr txBox="1"/>
           <p:nvPr/>
         </p:nvSpPr>
@@ -13385,7 +13070,7 @@
                 <a:ea typeface="Cambria" pitchFamily="34" charset="-122"/>
                 <a:cs typeface="Cambria" pitchFamily="34" charset="-120"/>
               </a:rPr>
-              <a:t>Step 12</a:t>
+              <a:t>Step 11</a:t>
             </a:r>
             <a:endParaRPr lang="en-US" sz="2200" dirty="0"/>
           </a:p>
@@ -13393,7 +13078,7 @@
       </p:sp>
       <p:sp>
         <p:nvSpPr>
-          <p:cNvPr id="11" name="Text 9"/>
+          <p:cNvPr id="13" name="Text 11"/>
           <p:cNvSpPr txBox="1"/>
           <p:nvPr/>
         </p:nvSpPr>
@@ -13432,18 +13117,18 @@
       </p:sp>
       <p:sp>
         <p:nvSpPr>
-          <p:cNvPr id="12" name="Shape 10"/>
+          <p:cNvPr id="14" name="Shape 12"/>
           <p:cNvSpPr/>
           <p:nvPr/>
         </p:nvSpPr>
         <p:spPr>
           <a:xfrm>
-            <a:off x="8092440" y="2834640"/>
-            <a:ext cx="3550615" cy="3383280"/>
+            <a:off x="8092440" y="2788920"/>
+            <a:ext cx="3550615" cy="3429000"/>
           </a:xfrm>
           <a:prstGeom prst="roundRect">
             <a:avLst>
-              <a:gd name="adj" fmla="val 2162"/>
+              <a:gd name="adj" fmla="val 2133"/>
             </a:avLst>
           </a:prstGeom>
           <a:solidFill>
@@ -13459,14 +13144,14 @@
       </p:sp>
       <p:sp>
         <p:nvSpPr>
-          <p:cNvPr id="13" name="Text 11"/>
-          <p:cNvSpPr txBox="1"/>
-          <p:nvPr/>
-        </p:nvSpPr>
-        <p:spPr>
-          <a:xfrm>
-            <a:off x="8321040" y="2971800"/>
-            <a:ext cx="3093415" cy="365760"/>
+          <p:cNvPr id="15" name="Text 13"/>
+          <p:cNvSpPr txBox="1"/>
+          <p:nvPr/>
+        </p:nvSpPr>
+        <p:spPr>
+          <a:xfrm>
+            <a:off x="8321040" y="2880360"/>
+            <a:ext cx="3093415" cy="310896"/>
           </a:xfrm>
           <a:prstGeom prst="rect">
             <a:avLst/>
@@ -13482,7 +13167,7 @@
               <a:buNone/>
             </a:pPr>
             <a:r>
-              <a:rPr lang="en-US" sz="1500" b="1" dirty="0">
+              <a:rPr lang="en-US" sz="1400" b="1" dirty="0">
                 <a:solidFill>
                   <a:srgbClr val="2F7D4F"/>
                 </a:solidFill>
@@ -13492,20 +13177,20 @@
               </a:rPr>
               <a:t>You should see</a:t>
             </a:r>
-            <a:endParaRPr lang="en-US" sz="1500" dirty="0"/>
-          </a:p>
-        </p:txBody>
-      </p:sp>
-      <p:sp>
-        <p:nvSpPr>
-          <p:cNvPr id="14" name="Text 12"/>
-          <p:cNvSpPr txBox="1"/>
-          <p:nvPr/>
-        </p:nvSpPr>
-        <p:spPr>
-          <a:xfrm>
-            <a:off x="8321040" y="3429000"/>
-            <a:ext cx="3093415" cy="2606040"/>
+            <a:endParaRPr lang="en-US" sz="1400" dirty="0"/>
+          </a:p>
+        </p:txBody>
+      </p:sp>
+      <p:sp>
+        <p:nvSpPr>
+          <p:cNvPr id="16" name="Text 14"/>
+          <p:cNvSpPr txBox="1"/>
+          <p:nvPr/>
+        </p:nvSpPr>
+        <p:spPr>
+          <a:xfrm>
+            <a:off x="8321040" y="3246120"/>
+            <a:ext cx="3093415" cy="2862072"/>
           </a:xfrm>
           <a:prstGeom prst="rect">
             <a:avLst/>
@@ -13529,7 +13214,7 @@
                 <a:ea typeface="Calibri" pitchFamily="34" charset="-122"/>
                 <a:cs typeface="Calibri" pitchFamily="34" charset="-120"/>
               </a:rPr>
-              <a:t>Green buttons mean a real cartridge was made. If there are none, your teacher will explain the source bundle.</a:t>
+              <a:t>A game you are proud of, with a title that is kind and safe.</a:t>
             </a:r>
             <a:endParaRPr lang="en-US" sz="2200" dirty="0"/>
           </a:p>
@@ -13643,7 +13328,7 @@
                 <a:ea typeface="Cambria" pitchFamily="34" charset="-122"/>
                 <a:cs typeface="Cambria" pitchFamily="34" charset="-120"/>
               </a:rPr>
-              <a:t>Share with your teacher</a:t>
+              <a:t>Make the cartridge</a:t>
             </a:r>
             <a:endParaRPr lang="en-US" sz="3000" dirty="0"/>
           </a:p>
@@ -13729,7 +13414,7 @@
                 <a:ea typeface="Calibri" pitchFamily="34" charset="-122"/>
                 <a:cs typeface="Calibri" pitchFamily="34" charset="-120"/>
               </a:rPr>
-              <a:t>Call your teacher over</a:t>
+              <a:t>Click Compile Cartridge</a:t>
             </a:r>
             <a:endParaRPr lang="en-US" sz="2400" dirty="0"/>
           </a:p>
@@ -13743,7 +13428,7 @@
         </p:nvSpPr>
         <p:spPr>
           <a:xfrm>
-            <a:off x="548640" y="2706624"/>
+            <a:off x="548640" y="3115056"/>
             <a:ext cx="438912" cy="438912"/>
           </a:xfrm>
           <a:prstGeom prst="roundRect">
@@ -13790,7 +13475,7 @@
         </p:nvSpPr>
         <p:spPr>
           <a:xfrm>
-            <a:off x="1234440" y="2688336"/>
+            <a:off x="1234440" y="3096768"/>
             <a:ext cx="6446520" cy="475488"/>
           </a:xfrm>
           <a:prstGeom prst="rect">
@@ -13815,7 +13500,7 @@
                 <a:ea typeface="Calibri" pitchFamily="34" charset="-122"/>
                 <a:cs typeface="Calibri" pitchFamily="34" charset="-120"/>
               </a:rPr>
-              <a:t>Open the Publish page together</a:t>
+              <a:t>Wait for the message</a:t>
             </a:r>
             <a:endParaRPr lang="en-US" sz="2400" dirty="0"/>
           </a:p>
@@ -13829,7 +13514,7 @@
         </p:nvSpPr>
         <p:spPr>
           <a:xfrm>
-            <a:off x="548640" y="3931920"/>
+            <a:off x="548640" y="4748784"/>
             <a:ext cx="438912" cy="438912"/>
           </a:xfrm>
           <a:prstGeom prst="roundRect">
@@ -13876,7 +13561,7 @@
         </p:nvSpPr>
         <p:spPr>
           <a:xfrm>
-            <a:off x="1234440" y="3913632"/>
+            <a:off x="1234440" y="4730496"/>
             <a:ext cx="6446520" cy="475488"/>
           </a:xfrm>
           <a:prstGeom prst="rect">
@@ -13901,7 +13586,7 @@
                 <a:ea typeface="Calibri" pitchFamily="34" charset="-122"/>
                 <a:cs typeface="Calibri" pitchFamily="34" charset="-120"/>
               </a:rPr>
-              <a:t>Click Publish next to your game</a:t>
+              <a:t>Look for the green download buttons</a:t>
             </a:r>
             <a:endParaRPr lang="en-US" sz="2400" dirty="0"/>
           </a:p>
@@ -13909,93 +13594,7 @@
       </p:sp>
       <p:sp>
         <p:nvSpPr>
-          <p:cNvPr id="9" name="Text 7"/>
-          <p:cNvSpPr txBox="1"/>
-          <p:nvPr/>
-        </p:nvSpPr>
-        <p:spPr>
-          <a:xfrm>
-            <a:off x="548640" y="5157216"/>
-            <a:ext cx="438912" cy="438912"/>
-          </a:xfrm>
-          <a:prstGeom prst="roundRect">
-            <a:avLst>
-              <a:gd name="adj" fmla="val 16667"/>
-            </a:avLst>
-          </a:prstGeom>
-          <a:solidFill>
-            <a:srgbClr val="6B4FA0"/>
-          </a:solidFill>
-          <a:ln>
-            <a:solidFill>
-              <a:srgbClr val="6B4FA0"/>
-            </a:solidFill>
-          </a:ln>
-        </p:spPr>
-        <p:txBody>
-          <a:bodyPr wrap="square" lIns="0" tIns="0" rIns="0" bIns="0" rtlCol="0" anchor="ctr"/>
-          <a:lstStyle/>
-          <a:p>
-            <a:pPr algn="ctr" indent="0" marL="0">
-              <a:buNone/>
-            </a:pPr>
-            <a:r>
-              <a:rPr lang="en-US" sz="1600" b="1" dirty="0">
-                <a:solidFill>
-                  <a:srgbClr val="FFFFFF"/>
-                </a:solidFill>
-                <a:latin typeface="Calibri" pitchFamily="34" charset="0"/>
-                <a:ea typeface="Calibri" pitchFamily="34" charset="-122"/>
-                <a:cs typeface="Calibri" pitchFamily="34" charset="-120"/>
-              </a:rPr>
-              <a:t>4</a:t>
-            </a:r>
-            <a:endParaRPr lang="en-US" sz="1600" dirty="0"/>
-          </a:p>
-        </p:txBody>
-      </p:sp>
-      <p:sp>
-        <p:nvSpPr>
-          <p:cNvPr id="10" name="Text 8"/>
-          <p:cNvSpPr txBox="1"/>
-          <p:nvPr/>
-        </p:nvSpPr>
-        <p:spPr>
-          <a:xfrm>
-            <a:off x="1234440" y="5138928"/>
-            <a:ext cx="6446520" cy="475488"/>
-          </a:xfrm>
-          <a:prstGeom prst="rect">
-            <a:avLst/>
-          </a:prstGeom>
-          <a:noFill/>
-          <a:ln/>
-        </p:spPr>
-        <p:txBody>
-          <a:bodyPr wrap="square" lIns="0" tIns="0" rIns="0" bIns="0" rtlCol="0" anchor="ctr"/>
-          <a:lstStyle/>
-          <a:p>
-            <a:pPr indent="0" marL="0">
-              <a:buNone/>
-            </a:pPr>
-            <a:r>
-              <a:rPr lang="en-US" sz="2400" dirty="0">
-                <a:solidFill>
-                  <a:srgbClr val="1B2530"/>
-                </a:solidFill>
-                <a:latin typeface="Calibri" pitchFamily="34" charset="0"/>
-                <a:ea typeface="Calibri" pitchFamily="34" charset="-122"/>
-                <a:cs typeface="Calibri" pitchFamily="34" charset="-120"/>
-              </a:rPr>
-              <a:t>Your teacher checks it and says yes</a:t>
-            </a:r>
-            <a:endParaRPr lang="en-US" sz="2400" dirty="0"/>
-          </a:p>
-        </p:txBody>
-      </p:sp>
-      <p:sp>
-        <p:nvSpPr>
-          <p:cNvPr id="11" name="Shape 9"/>
+          <p:cNvPr id="9" name="Shape 7"/>
           <p:cNvSpPr/>
           <p:nvPr/>
         </p:nvSpPr>
@@ -14022,7 +13621,7 @@
       </p:sp>
       <p:sp>
         <p:nvSpPr>
-          <p:cNvPr id="12" name="Text 10"/>
+          <p:cNvPr id="10" name="Text 8"/>
           <p:cNvSpPr txBox="1"/>
           <p:nvPr/>
         </p:nvSpPr>
@@ -14053,7 +13652,7 @@
                 <a:ea typeface="Cambria" pitchFamily="34" charset="-122"/>
                 <a:cs typeface="Cambria" pitchFamily="34" charset="-120"/>
               </a:rPr>
-              <a:t>Step 13</a:t>
+              <a:t>Step 12</a:t>
             </a:r>
             <a:endParaRPr lang="en-US" sz="2200" dirty="0"/>
           </a:p>
@@ -14061,7 +13660,7 @@
       </p:sp>
       <p:sp>
         <p:nvSpPr>
-          <p:cNvPr id="13" name="Text 11"/>
+          <p:cNvPr id="11" name="Text 9"/>
           <p:cNvSpPr txBox="1"/>
           <p:nvPr/>
         </p:nvSpPr>
@@ -14092,7 +13691,7 @@
                 <a:ea typeface="Calibri" pitchFamily="34" charset="-122"/>
                 <a:cs typeface="Calibri" pitchFamily="34" charset="-120"/>
               </a:rPr>
-              <a:t>about 4 min</a:t>
+              <a:t>about 3 min</a:t>
             </a:r>
             <a:endParaRPr lang="en-US" sz="1600" dirty="0"/>
           </a:p>
@@ -14100,18 +13699,18 @@
       </p:sp>
       <p:sp>
         <p:nvSpPr>
-          <p:cNvPr id="14" name="Shape 12"/>
+          <p:cNvPr id="12" name="Shape 10"/>
           <p:cNvSpPr/>
           <p:nvPr/>
         </p:nvSpPr>
         <p:spPr>
           <a:xfrm>
-            <a:off x="8092440" y="2834640"/>
-            <a:ext cx="3550615" cy="3383280"/>
+            <a:off x="8092440" y="2788920"/>
+            <a:ext cx="3550615" cy="3429000"/>
           </a:xfrm>
           <a:prstGeom prst="roundRect">
             <a:avLst>
-              <a:gd name="adj" fmla="val 2162"/>
+              <a:gd name="adj" fmla="val 2133"/>
             </a:avLst>
           </a:prstGeom>
           <a:solidFill>
@@ -14127,14 +13726,14 @@
       </p:sp>
       <p:sp>
         <p:nvSpPr>
-          <p:cNvPr id="15" name="Text 13"/>
-          <p:cNvSpPr txBox="1"/>
-          <p:nvPr/>
-        </p:nvSpPr>
-        <p:spPr>
-          <a:xfrm>
-            <a:off x="8321040" y="2971800"/>
-            <a:ext cx="3093415" cy="365760"/>
+          <p:cNvPr id="13" name="Text 11"/>
+          <p:cNvSpPr txBox="1"/>
+          <p:nvPr/>
+        </p:nvSpPr>
+        <p:spPr>
+          <a:xfrm>
+            <a:off x="8321040" y="2880360"/>
+            <a:ext cx="3093415" cy="310896"/>
           </a:xfrm>
           <a:prstGeom prst="rect">
             <a:avLst/>
@@ -14150,7 +13749,7 @@
               <a:buNone/>
             </a:pPr>
             <a:r>
-              <a:rPr lang="en-US" sz="1500" b="1" dirty="0">
+              <a:rPr lang="en-US" sz="1400" b="1" dirty="0">
                 <a:solidFill>
                   <a:srgbClr val="2F7D4F"/>
                 </a:solidFill>
@@ -14160,20 +13759,20 @@
               </a:rPr>
               <a:t>You should see</a:t>
             </a:r>
-            <a:endParaRPr lang="en-US" sz="1500" dirty="0"/>
-          </a:p>
-        </p:txBody>
-      </p:sp>
-      <p:sp>
-        <p:nvSpPr>
-          <p:cNvPr id="16" name="Text 14"/>
-          <p:cNvSpPr txBox="1"/>
-          <p:nvPr/>
-        </p:nvSpPr>
-        <p:spPr>
-          <a:xfrm>
-            <a:off x="8321040" y="3429000"/>
-            <a:ext cx="3093415" cy="2606040"/>
+            <a:endParaRPr lang="en-US" sz="1400" dirty="0"/>
+          </a:p>
+        </p:txBody>
+      </p:sp>
+      <p:sp>
+        <p:nvSpPr>
+          <p:cNvPr id="14" name="Text 12"/>
+          <p:cNvSpPr txBox="1"/>
+          <p:nvPr/>
+        </p:nvSpPr>
+        <p:spPr>
+          <a:xfrm>
+            <a:off x="8321040" y="3246120"/>
+            <a:ext cx="3093415" cy="2862072"/>
           </a:xfrm>
           <a:prstGeom prst="rect">
             <a:avLst/>
@@ -14197,7 +13796,7 @@
                 <a:ea typeface="Calibri" pitchFamily="34" charset="-122"/>
                 <a:cs typeface="Calibri" pitchFamily="34" charset="-120"/>
               </a:rPr>
-              <a:t>Your game is waiting for review, then it appears in the class Store.</a:t>
+              <a:t>Green buttons mean a real cartridge was made. If there are none, your teacher will explain the source bundle.</a:t>
             </a:r>
             <a:endParaRPr lang="en-US" sz="2200" dirty="0"/>
           </a:p>
@@ -14311,7 +13910,7 @@
                 <a:ea typeface="Cambria" pitchFamily="34" charset="-122"/>
                 <a:cs typeface="Cambria" pitchFamily="34" charset="-120"/>
               </a:rPr>
-              <a:t>Showcase</a:t>
+              <a:t>Share with your teacher</a:t>
             </a:r>
             <a:endParaRPr lang="en-US" sz="3000" dirty="0"/>
           </a:p>
@@ -14397,7 +13996,7 @@
                 <a:ea typeface="Calibri" pitchFamily="34" charset="-122"/>
                 <a:cs typeface="Calibri" pitchFamily="34" charset="-120"/>
               </a:rPr>
-              <a:t>Swap seats with another pair</a:t>
+              <a:t>Call your teacher over</a:t>
             </a:r>
             <a:endParaRPr lang="en-US" sz="2400" dirty="0"/>
           </a:p>
@@ -14483,7 +14082,7 @@
                 <a:ea typeface="Calibri" pitchFamily="34" charset="-122"/>
                 <a:cs typeface="Calibri" pitchFamily="34" charset="-120"/>
               </a:rPr>
-              <a:t>Play their game for two minutes</a:t>
+              <a:t>Open the Publish page together</a:t>
             </a:r>
             <a:endParaRPr lang="en-US" sz="2400" dirty="0"/>
           </a:p>
@@ -14569,7 +14168,7 @@
                 <a:ea typeface="Calibri" pitchFamily="34" charset="-122"/>
                 <a:cs typeface="Calibri" pitchFamily="34" charset="-120"/>
               </a:rPr>
-              <a:t>Tell them one thing you liked</a:t>
+              <a:t>Click Publish next to your game</a:t>
             </a:r>
             <a:endParaRPr lang="en-US" sz="2400" dirty="0"/>
           </a:p>
@@ -14655,7 +14254,7 @@
                 <a:ea typeface="Calibri" pitchFamily="34" charset="-122"/>
                 <a:cs typeface="Calibri" pitchFamily="34" charset="-120"/>
               </a:rPr>
-              <a:t>Tell them one idea to make it even better</a:t>
+              <a:t>Your teacher checks it and says yes</a:t>
             </a:r>
             <a:endParaRPr lang="en-US" sz="2400" dirty="0"/>
           </a:p>
@@ -14721,7 +14320,7 @@
                 <a:ea typeface="Cambria" pitchFamily="34" charset="-122"/>
                 <a:cs typeface="Cambria" pitchFamily="34" charset="-120"/>
               </a:rPr>
-              <a:t>Step 14</a:t>
+              <a:t>Step 13</a:t>
             </a:r>
             <a:endParaRPr lang="en-US" sz="2200" dirty="0"/>
           </a:p>
@@ -14760,7 +14359,7 @@
                 <a:ea typeface="Calibri" pitchFamily="34" charset="-122"/>
                 <a:cs typeface="Calibri" pitchFamily="34" charset="-120"/>
               </a:rPr>
-              <a:t>about 5 min</a:t>
+              <a:t>about 4 min</a:t>
             </a:r>
             <a:endParaRPr lang="en-US" sz="1600" dirty="0"/>
           </a:p>
@@ -14774,12 +14373,12 @@
         </p:nvSpPr>
         <p:spPr>
           <a:xfrm>
-            <a:off x="8092440" y="2834640"/>
-            <a:ext cx="3550615" cy="3383280"/>
+            <a:off x="8092440" y="2788920"/>
+            <a:ext cx="3550615" cy="3429000"/>
           </a:xfrm>
           <a:prstGeom prst="roundRect">
             <a:avLst>
-              <a:gd name="adj" fmla="val 2162"/>
+              <a:gd name="adj" fmla="val 2133"/>
             </a:avLst>
           </a:prstGeom>
           <a:solidFill>
@@ -14801,8 +14400,8 @@
         </p:nvSpPr>
         <p:spPr>
           <a:xfrm>
-            <a:off x="8321040" y="2971800"/>
-            <a:ext cx="3093415" cy="365760"/>
+            <a:off x="8321040" y="2880360"/>
+            <a:ext cx="3093415" cy="310896"/>
           </a:xfrm>
           <a:prstGeom prst="rect">
             <a:avLst/>
@@ -14818,7 +14417,7 @@
               <a:buNone/>
             </a:pPr>
             <a:r>
-              <a:rPr lang="en-US" sz="1500" b="1" dirty="0">
+              <a:rPr lang="en-US" sz="1400" b="1" dirty="0">
                 <a:solidFill>
                   <a:srgbClr val="2F7D4F"/>
                 </a:solidFill>
@@ -14828,7 +14427,7 @@
               </a:rPr>
               <a:t>You should see</a:t>
             </a:r>
-            <a:endParaRPr lang="en-US" sz="1500" dirty="0"/>
+            <a:endParaRPr lang="en-US" sz="1400" dirty="0"/>
           </a:p>
         </p:txBody>
       </p:sp>
@@ -14840,8 +14439,8 @@
         </p:nvSpPr>
         <p:spPr>
           <a:xfrm>
-            <a:off x="8321040" y="3429000"/>
-            <a:ext cx="3093415" cy="2606040"/>
+            <a:off x="8321040" y="3246120"/>
+            <a:ext cx="3093415" cy="2862072"/>
           </a:xfrm>
           <a:prstGeom prst="rect">
             <a:avLst/>
@@ -14865,7 +14464,7 @@
                 <a:ea typeface="Calibri" pitchFamily="34" charset="-122"/>
                 <a:cs typeface="Calibri" pitchFamily="34" charset="-120"/>
               </a:rPr>
-              <a:t>Every game has been played by someone who did not make it.</a:t>
+              <a:t>Your game is waiting for review, then it appears in the class Store.</a:t>
             </a:r>
             <a:endParaRPr lang="en-US" sz="2200" dirty="0"/>
           </a:p>
@@ -14979,7 +14578,7 @@
                 <a:ea typeface="Cambria" pitchFamily="34" charset="-122"/>
                 <a:cs typeface="Cambria" pitchFamily="34" charset="-120"/>
               </a:rPr>
-              <a:t>You are a game maker!</a:t>
+              <a:t>Showcase</a:t>
             </a:r>
             <a:endParaRPr lang="en-US" sz="3000" dirty="0"/>
           </a:p>
@@ -14994,19 +14593,19 @@
         <p:spPr>
           <a:xfrm>
             <a:off x="548640" y="1481328"/>
-            <a:ext cx="457200" cy="457200"/>
+            <a:ext cx="438912" cy="438912"/>
           </a:xfrm>
           <a:prstGeom prst="roundRect">
             <a:avLst>
-              <a:gd name="adj" fmla="val 16000"/>
+              <a:gd name="adj" fmla="val 16667"/>
             </a:avLst>
           </a:prstGeom>
           <a:solidFill>
-            <a:srgbClr val="2F7D4F"/>
+            <a:srgbClr val="6B4FA0"/>
           </a:solidFill>
           <a:ln>
             <a:solidFill>
-              <a:srgbClr val="2F7D4F"/>
+              <a:srgbClr val="6B4FA0"/>
             </a:solidFill>
           </a:ln>
         </p:spPr>
@@ -15018,7 +14617,7 @@
               <a:buNone/>
             </a:pPr>
             <a:r>
-              <a:rPr lang="en-US" sz="1700" b="1" dirty="0">
+              <a:rPr lang="en-US" sz="1600" b="1" dirty="0">
                 <a:solidFill>
                   <a:srgbClr val="FFFFFF"/>
                 </a:solidFill>
@@ -15028,7 +14627,7 @@
               </a:rPr>
               <a:t>1</a:t>
             </a:r>
-            <a:endParaRPr lang="en-US" sz="1700" dirty="0"/>
+            <a:endParaRPr lang="en-US" sz="1600" dirty="0"/>
           </a:p>
         </p:txBody>
       </p:sp>
@@ -15040,8 +14639,8 @@
         </p:nvSpPr>
         <p:spPr>
           <a:xfrm>
-            <a:off x="1280160" y="1463040"/>
-            <a:ext cx="10362895" cy="493776"/>
+            <a:off x="1234440" y="1463040"/>
+            <a:ext cx="6446520" cy="475488"/>
           </a:xfrm>
           <a:prstGeom prst="rect">
             <a:avLst/>
@@ -15057,7 +14656,7 @@
               <a:buNone/>
             </a:pPr>
             <a:r>
-              <a:rPr lang="en-US" sz="2500" dirty="0">
+              <a:rPr lang="en-US" sz="2400" dirty="0">
                 <a:solidFill>
                   <a:srgbClr val="1B2530"/>
                 </a:solidFill>
@@ -15065,9 +14664,9 @@
                 <a:ea typeface="Calibri" pitchFamily="34" charset="-122"/>
                 <a:cs typeface="Calibri" pitchFamily="34" charset="-120"/>
               </a:rPr>
-              <a:t>Sounds that mean something</a:t>
-            </a:r>
-            <a:endParaRPr lang="en-US" sz="2500" dirty="0"/>
+              <a:t>Swap seats with another pair</a:t>
+            </a:r>
+            <a:endParaRPr lang="en-US" sz="2400" dirty="0"/>
           </a:p>
         </p:txBody>
       </p:sp>
@@ -15079,20 +14678,20 @@
         </p:nvSpPr>
         <p:spPr>
           <a:xfrm>
-            <a:off x="548640" y="2301240"/>
-            <a:ext cx="457200" cy="457200"/>
+            <a:off x="548640" y="2706624"/>
+            <a:ext cx="438912" cy="438912"/>
           </a:xfrm>
           <a:prstGeom prst="roundRect">
             <a:avLst>
-              <a:gd name="adj" fmla="val 16000"/>
+              <a:gd name="adj" fmla="val 16667"/>
             </a:avLst>
           </a:prstGeom>
           <a:solidFill>
-            <a:srgbClr val="2F7D4F"/>
+            <a:srgbClr val="6B4FA0"/>
           </a:solidFill>
           <a:ln>
             <a:solidFill>
-              <a:srgbClr val="2F7D4F"/>
+              <a:srgbClr val="6B4FA0"/>
             </a:solidFill>
           </a:ln>
         </p:spPr>
@@ -15104,7 +14703,7 @@
               <a:buNone/>
             </a:pPr>
             <a:r>
-              <a:rPr lang="en-US" sz="1700" b="1" dirty="0">
+              <a:rPr lang="en-US" sz="1600" b="1" dirty="0">
                 <a:solidFill>
                   <a:srgbClr val="FFFFFF"/>
                 </a:solidFill>
@@ -15114,7 +14713,7 @@
               </a:rPr>
               <a:t>2</a:t>
             </a:r>
-            <a:endParaRPr lang="en-US" sz="1700" dirty="0"/>
+            <a:endParaRPr lang="en-US" sz="1600" dirty="0"/>
           </a:p>
         </p:txBody>
       </p:sp>
@@ -15126,8 +14725,8 @@
         </p:nvSpPr>
         <p:spPr>
           <a:xfrm>
-            <a:off x="1280160" y="2282952"/>
-            <a:ext cx="10362895" cy="493776"/>
+            <a:off x="1234440" y="2688336"/>
+            <a:ext cx="6446520" cy="475488"/>
           </a:xfrm>
           <a:prstGeom prst="rect">
             <a:avLst/>
@@ -15143,7 +14742,7 @@
               <a:buNone/>
             </a:pPr>
             <a:r>
-              <a:rPr lang="en-US" sz="2500" dirty="0">
+              <a:rPr lang="en-US" sz="2400" dirty="0">
                 <a:solidFill>
                   <a:srgbClr val="1B2530"/>
                 </a:solidFill>
@@ -15151,9 +14750,9 @@
                 <a:ea typeface="Calibri" pitchFamily="34" charset="-122"/>
                 <a:cs typeface="Calibri" pitchFamily="34" charset="-120"/>
               </a:rPr>
-              <a:t>A musical instrument</a:t>
-            </a:r>
-            <a:endParaRPr lang="en-US" sz="2500" dirty="0"/>
+              <a:t>Play their game for two minutes</a:t>
+            </a:r>
+            <a:endParaRPr lang="en-US" sz="2400" dirty="0"/>
           </a:p>
         </p:txBody>
       </p:sp>
@@ -15165,20 +14764,20 @@
         </p:nvSpPr>
         <p:spPr>
           <a:xfrm>
-            <a:off x="548640" y="3121152"/>
-            <a:ext cx="457200" cy="457200"/>
+            <a:off x="548640" y="3931920"/>
+            <a:ext cx="438912" cy="438912"/>
           </a:xfrm>
           <a:prstGeom prst="roundRect">
             <a:avLst>
-              <a:gd name="adj" fmla="val 16000"/>
+              <a:gd name="adj" fmla="val 16667"/>
             </a:avLst>
           </a:prstGeom>
           <a:solidFill>
-            <a:srgbClr val="2F7D4F"/>
+            <a:srgbClr val="6B4FA0"/>
           </a:solidFill>
           <a:ln>
             <a:solidFill>
-              <a:srgbClr val="2F7D4F"/>
+              <a:srgbClr val="6B4FA0"/>
             </a:solidFill>
           </a:ln>
         </p:spPr>
@@ -15190,7 +14789,7 @@
               <a:buNone/>
             </a:pPr>
             <a:r>
-              <a:rPr lang="en-US" sz="1700" b="1" dirty="0">
+              <a:rPr lang="en-US" sz="1600" b="1" dirty="0">
                 <a:solidFill>
                   <a:srgbClr val="FFFFFF"/>
                 </a:solidFill>
@@ -15200,7 +14799,7 @@
               </a:rPr>
               <a:t>3</a:t>
             </a:r>
-            <a:endParaRPr lang="en-US" sz="1700" dirty="0"/>
+            <a:endParaRPr lang="en-US" sz="1600" dirty="0"/>
           </a:p>
         </p:txBody>
       </p:sp>
@@ -15212,8 +14811,8 @@
         </p:nvSpPr>
         <p:spPr>
           <a:xfrm>
-            <a:off x="1280160" y="3102864"/>
-            <a:ext cx="10362895" cy="493776"/>
+            <a:off x="1234440" y="3913632"/>
+            <a:ext cx="6446520" cy="475488"/>
           </a:xfrm>
           <a:prstGeom prst="rect">
             <a:avLst/>
@@ -15229,7 +14828,7 @@
               <a:buNone/>
             </a:pPr>
             <a:r>
-              <a:rPr lang="en-US" sz="2500" dirty="0">
+              <a:rPr lang="en-US" sz="2400" dirty="0">
                 <a:solidFill>
                   <a:srgbClr val="1B2530"/>
                 </a:solidFill>
@@ -15237,9 +14836,9 @@
                 <a:ea typeface="Calibri" pitchFamily="34" charset="-122"/>
                 <a:cs typeface="Calibri" pitchFamily="34" charset="-120"/>
               </a:rPr>
-              <a:t>Your own sprite</a:t>
-            </a:r>
-            <a:endParaRPr lang="en-US" sz="2500" dirty="0"/>
+              <a:t>Tell them one thing you liked</a:t>
+            </a:r>
+            <a:endParaRPr lang="en-US" sz="2400" dirty="0"/>
           </a:p>
         </p:txBody>
       </p:sp>
@@ -15251,20 +14850,20 @@
         </p:nvSpPr>
         <p:spPr>
           <a:xfrm>
-            <a:off x="548640" y="3941064"/>
-            <a:ext cx="457200" cy="457200"/>
+            <a:off x="548640" y="5157216"/>
+            <a:ext cx="438912" cy="438912"/>
           </a:xfrm>
           <a:prstGeom prst="roundRect">
             <a:avLst>
-              <a:gd name="adj" fmla="val 16000"/>
+              <a:gd name="adj" fmla="val 16667"/>
             </a:avLst>
           </a:prstGeom>
           <a:solidFill>
-            <a:srgbClr val="2F7D4F"/>
+            <a:srgbClr val="6B4FA0"/>
           </a:solidFill>
           <a:ln>
             <a:solidFill>
-              <a:srgbClr val="2F7D4F"/>
+              <a:srgbClr val="6B4FA0"/>
             </a:solidFill>
           </a:ln>
         </p:spPr>
@@ -15276,7 +14875,7 @@
               <a:buNone/>
             </a:pPr>
             <a:r>
-              <a:rPr lang="en-US" sz="1700" b="1" dirty="0">
+              <a:rPr lang="en-US" sz="1600" b="1" dirty="0">
                 <a:solidFill>
                   <a:srgbClr val="FFFFFF"/>
                 </a:solidFill>
@@ -15286,7 +14885,7 @@
               </a:rPr>
               <a:t>4</a:t>
             </a:r>
-            <a:endParaRPr lang="en-US" sz="1700" dirty="0"/>
+            <a:endParaRPr lang="en-US" sz="1600" dirty="0"/>
           </a:p>
         </p:txBody>
       </p:sp>
@@ -15298,8 +14897,8 @@
         </p:nvSpPr>
         <p:spPr>
           <a:xfrm>
-            <a:off x="1280160" y="3922776"/>
-            <a:ext cx="10362895" cy="493776"/>
+            <a:off x="1234440" y="5138928"/>
+            <a:ext cx="6446520" cy="475488"/>
           </a:xfrm>
           <a:prstGeom prst="rect">
             <a:avLst/>
@@ -15315,7 +14914,7 @@
               <a:buNone/>
             </a:pPr>
             <a:r>
-              <a:rPr lang="en-US" sz="2500" dirty="0">
+              <a:rPr lang="en-US" sz="2400" dirty="0">
                 <a:solidFill>
                   <a:srgbClr val="1B2530"/>
                 </a:solidFill>
@@ -15323,58 +14922,38 @@
                 <a:ea typeface="Calibri" pitchFamily="34" charset="-122"/>
                 <a:cs typeface="Calibri" pitchFamily="34" charset="-120"/>
               </a:rPr>
-              <a:t>You read real C</a:t>
-            </a:r>
-            <a:endParaRPr lang="en-US" sz="2500" dirty="0"/>
-          </a:p>
-        </p:txBody>
-      </p:sp>
-      <p:sp>
-        <p:nvSpPr>
-          <p:cNvPr id="11" name="Text 9"/>
-          <p:cNvSpPr txBox="1"/>
-          <p:nvPr/>
-        </p:nvSpPr>
-        <p:spPr>
-          <a:xfrm>
-            <a:off x="548640" y="4760976"/>
-            <a:ext cx="457200" cy="457200"/>
+              <a:t>Tell them one idea to make it even better</a:t>
+            </a:r>
+            <a:endParaRPr lang="en-US" sz="2400" dirty="0"/>
+          </a:p>
+        </p:txBody>
+      </p:sp>
+      <p:sp>
+        <p:nvSpPr>
+          <p:cNvPr id="11" name="Shape 9"/>
+          <p:cNvSpPr/>
+          <p:nvPr/>
+        </p:nvSpPr>
+        <p:spPr>
+          <a:xfrm>
+            <a:off x="8092440" y="1463040"/>
+            <a:ext cx="3550615" cy="1143000"/>
           </a:xfrm>
           <a:prstGeom prst="roundRect">
             <a:avLst>
-              <a:gd name="adj" fmla="val 16000"/>
+              <a:gd name="adj" fmla="val 6400"/>
             </a:avLst>
           </a:prstGeom>
           <a:solidFill>
-            <a:srgbClr val="2F7D4F"/>
+            <a:srgbClr val="1B2530"/>
           </a:solidFill>
-          <a:ln>
+          <a:ln w="12700">
             <a:solidFill>
-              <a:srgbClr val="2F7D4F"/>
+              <a:srgbClr val="1B2530"/>
             </a:solidFill>
+            <a:prstDash val="solid"/>
           </a:ln>
         </p:spPr>
-        <p:txBody>
-          <a:bodyPr wrap="square" lIns="0" tIns="0" rIns="0" bIns="0" rtlCol="0" anchor="ctr"/>
-          <a:lstStyle/>
-          <a:p>
-            <a:pPr algn="ctr" indent="0" marL="0">
-              <a:buNone/>
-            </a:pPr>
-            <a:r>
-              <a:rPr lang="en-US" sz="1700" b="1" dirty="0">
-                <a:solidFill>
-                  <a:srgbClr val="FFFFFF"/>
-                </a:solidFill>
-                <a:latin typeface="Calibri" pitchFamily="34" charset="0"/>
-                <a:ea typeface="Calibri" pitchFamily="34" charset="-122"/>
-                <a:cs typeface="Calibri" pitchFamily="34" charset="-120"/>
-              </a:rPr>
-              <a:t>5</a:t>
-            </a:r>
-            <a:endParaRPr lang="en-US" sz="1700" dirty="0"/>
-          </a:p>
-        </p:txBody>
       </p:sp>
       <p:sp>
         <p:nvSpPr>
@@ -15384,8 +14963,8 @@
         </p:nvSpPr>
         <p:spPr>
           <a:xfrm>
-            <a:off x="1280160" y="4742688"/>
-            <a:ext cx="10362895" cy="493776"/>
+            <a:off x="8321040" y="1600200"/>
+            <a:ext cx="3093415" cy="457200"/>
           </a:xfrm>
           <a:prstGeom prst="rect">
             <a:avLst/>
@@ -15394,24 +14973,24 @@
           <a:ln/>
         </p:spPr>
         <p:txBody>
-          <a:bodyPr wrap="square" lIns="0" tIns="0" rIns="0" bIns="0" rtlCol="0" anchor="ctr"/>
+          <a:bodyPr wrap="square" lIns="0" tIns="0" rIns="0" bIns="0" rtlCol="0" anchor="t"/>
           <a:lstStyle/>
           <a:p>
             <a:pPr indent="0" marL="0">
               <a:buNone/>
             </a:pPr>
             <a:r>
-              <a:rPr lang="en-US" sz="2500" dirty="0">
-                <a:solidFill>
-                  <a:srgbClr val="1B2530"/>
-                </a:solidFill>
-                <a:latin typeface="Calibri" pitchFamily="34" charset="0"/>
-                <a:ea typeface="Calibri" pitchFamily="34" charset="-122"/>
-                <a:cs typeface="Calibri" pitchFamily="34" charset="-120"/>
-              </a:rPr>
-              <a:t>A cartridge with your game</a:t>
-            </a:r>
-            <a:endParaRPr lang="en-US" sz="2500" dirty="0"/>
+              <a:rPr lang="en-US" sz="2200" b="1" dirty="0">
+                <a:solidFill>
+                  <a:srgbClr val="FFFFFF"/>
+                </a:solidFill>
+                <a:latin typeface="Cambria" pitchFamily="34" charset="0"/>
+                <a:ea typeface="Cambria" pitchFamily="34" charset="-122"/>
+                <a:cs typeface="Cambria" pitchFamily="34" charset="-120"/>
+              </a:rPr>
+              <a:t>Step 14</a:t>
+            </a:r>
+            <a:endParaRPr lang="en-US" sz="2200" dirty="0"/>
           </a:p>
         </p:txBody>
       </p:sp>
@@ -15423,55 +15002,74 @@
         </p:nvSpPr>
         <p:spPr>
           <a:xfrm>
-            <a:off x="548640" y="5580888"/>
-            <a:ext cx="457200" cy="457200"/>
+            <a:off x="8321040" y="2084832"/>
+            <a:ext cx="3093415" cy="365760"/>
+          </a:xfrm>
+          <a:prstGeom prst="rect">
+            <a:avLst/>
+          </a:prstGeom>
+          <a:noFill/>
+          <a:ln/>
+        </p:spPr>
+        <p:txBody>
+          <a:bodyPr wrap="square" lIns="0" tIns="0" rIns="0" bIns="0" rtlCol="0" anchor="t"/>
+          <a:lstStyle/>
+          <a:p>
+            <a:pPr indent="0" marL="0">
+              <a:buNone/>
+            </a:pPr>
+            <a:r>
+              <a:rPr lang="en-US" sz="1600" dirty="0">
+                <a:solidFill>
+                  <a:srgbClr val="CFE3EA"/>
+                </a:solidFill>
+                <a:latin typeface="Calibri" pitchFamily="34" charset="0"/>
+                <a:ea typeface="Calibri" pitchFamily="34" charset="-122"/>
+                <a:cs typeface="Calibri" pitchFamily="34" charset="-120"/>
+              </a:rPr>
+              <a:t>about 5 min</a:t>
+            </a:r>
+            <a:endParaRPr lang="en-US" sz="1600" dirty="0"/>
+          </a:p>
+        </p:txBody>
+      </p:sp>
+      <p:sp>
+        <p:nvSpPr>
+          <p:cNvPr id="14" name="Shape 12"/>
+          <p:cNvSpPr/>
+          <p:nvPr/>
+        </p:nvSpPr>
+        <p:spPr>
+          <a:xfrm>
+            <a:off x="8092440" y="2788920"/>
+            <a:ext cx="3550615" cy="3429000"/>
           </a:xfrm>
           <a:prstGeom prst="roundRect">
             <a:avLst>
-              <a:gd name="adj" fmla="val 16000"/>
+              <a:gd name="adj" fmla="val 2133"/>
             </a:avLst>
           </a:prstGeom>
           <a:solidFill>
-            <a:srgbClr val="2F7D4F"/>
+            <a:srgbClr val="EEF2F4"/>
           </a:solidFill>
-          <a:ln>
+          <a:ln w="12700">
             <a:solidFill>
-              <a:srgbClr val="2F7D4F"/>
+              <a:srgbClr val="EEF2F4"/>
             </a:solidFill>
+            <a:prstDash val="solid"/>
           </a:ln>
         </p:spPr>
-        <p:txBody>
-          <a:bodyPr wrap="square" lIns="0" tIns="0" rIns="0" bIns="0" rtlCol="0" anchor="ctr"/>
-          <a:lstStyle/>
-          <a:p>
-            <a:pPr algn="ctr" indent="0" marL="0">
-              <a:buNone/>
-            </a:pPr>
-            <a:r>
-              <a:rPr lang="en-US" sz="1700" b="1" dirty="0">
-                <a:solidFill>
-                  <a:srgbClr val="FFFFFF"/>
-                </a:solidFill>
-                <a:latin typeface="Calibri" pitchFamily="34" charset="0"/>
-                <a:ea typeface="Calibri" pitchFamily="34" charset="-122"/>
-                <a:cs typeface="Calibri" pitchFamily="34" charset="-120"/>
-              </a:rPr>
-              <a:t>6</a:t>
-            </a:r>
-            <a:endParaRPr lang="en-US" sz="1700" dirty="0"/>
-          </a:p>
-        </p:txBody>
-      </p:sp>
-      <p:sp>
-        <p:nvSpPr>
-          <p:cNvPr id="14" name="Text 12"/>
-          <p:cNvSpPr txBox="1"/>
-          <p:nvPr/>
-        </p:nvSpPr>
-        <p:spPr>
-          <a:xfrm>
-            <a:off x="1280160" y="5562600"/>
-            <a:ext cx="10362895" cy="493776"/>
+      </p:sp>
+      <p:sp>
+        <p:nvSpPr>
+          <p:cNvPr id="15" name="Text 13"/>
+          <p:cNvSpPr txBox="1"/>
+          <p:nvPr/>
+        </p:nvSpPr>
+        <p:spPr>
+          <a:xfrm>
+            <a:off x="8321040" y="2880360"/>
+            <a:ext cx="3093415" cy="310896"/>
           </a:xfrm>
           <a:prstGeom prst="rect">
             <a:avLst/>
@@ -15480,14 +15078,53 @@
           <a:ln/>
         </p:spPr>
         <p:txBody>
-          <a:bodyPr wrap="square" lIns="0" tIns="0" rIns="0" bIns="0" rtlCol="0" anchor="ctr"/>
+          <a:bodyPr wrap="square" lIns="0" tIns="0" rIns="0" bIns="0" rtlCol="0" anchor="t"/>
           <a:lstStyle/>
           <a:p>
             <a:pPr indent="0" marL="0">
               <a:buNone/>
             </a:pPr>
             <a:r>
-              <a:rPr lang="en-US" sz="2500" dirty="0">
+              <a:rPr lang="en-US" sz="1400" b="1" dirty="0">
+                <a:solidFill>
+                  <a:srgbClr val="2F7D4F"/>
+                </a:solidFill>
+                <a:latin typeface="Calibri" pitchFamily="34" charset="0"/>
+                <a:ea typeface="Calibri" pitchFamily="34" charset="-122"/>
+                <a:cs typeface="Calibri" pitchFamily="34" charset="-120"/>
+              </a:rPr>
+              <a:t>You should see</a:t>
+            </a:r>
+            <a:endParaRPr lang="en-US" sz="1400" dirty="0"/>
+          </a:p>
+        </p:txBody>
+      </p:sp>
+      <p:sp>
+        <p:nvSpPr>
+          <p:cNvPr id="16" name="Text 14"/>
+          <p:cNvSpPr txBox="1"/>
+          <p:nvPr/>
+        </p:nvSpPr>
+        <p:spPr>
+          <a:xfrm>
+            <a:off x="8321040" y="3246120"/>
+            <a:ext cx="3093415" cy="2862072"/>
+          </a:xfrm>
+          <a:prstGeom prst="rect">
+            <a:avLst/>
+          </a:prstGeom>
+          <a:noFill/>
+          <a:ln/>
+        </p:spPr>
+        <p:txBody>
+          <a:bodyPr wrap="square" lIns="0" tIns="0" rIns="0" bIns="0" rtlCol="0" anchor="t"/>
+          <a:lstStyle/>
+          <a:p>
+            <a:pPr indent="0" marL="0">
+              <a:buNone/>
+            </a:pPr>
+            <a:r>
+              <a:rPr lang="en-US" sz="2200" dirty="0">
                 <a:solidFill>
                   <a:srgbClr val="1B2530"/>
                 </a:solidFill>
@@ -15495,9 +15132,9 @@
                 <a:ea typeface="Calibri" pitchFamily="34" charset="-122"/>
                 <a:cs typeface="Calibri" pitchFamily="34" charset="-120"/>
               </a:rPr>
-              <a:t>You shared it safely</a:t>
-            </a:r>
-            <a:endParaRPr lang="en-US" sz="2500" dirty="0"/>
+              <a:t>Every game has been played by someone who did not make it.</a:t>
+            </a:r>
+            <a:endParaRPr lang="en-US" sz="2200" dirty="0"/>
           </a:p>
         </p:txBody>
       </p:sp>
@@ -16608,6 +16245,636 @@
                 <a:ea typeface="Cambria" pitchFamily="34" charset="-122"/>
                 <a:cs typeface="Cambria" pitchFamily="34" charset="-120"/>
               </a:rPr>
+              <a:t>You are a game maker!</a:t>
+            </a:r>
+            <a:endParaRPr lang="en-US" sz="3000" dirty="0"/>
+          </a:p>
+        </p:txBody>
+      </p:sp>
+      <p:sp>
+        <p:nvSpPr>
+          <p:cNvPr id="3" name="Text 1"/>
+          <p:cNvSpPr txBox="1"/>
+          <p:nvPr/>
+        </p:nvSpPr>
+        <p:spPr>
+          <a:xfrm>
+            <a:off x="548640" y="1481328"/>
+            <a:ext cx="457200" cy="457200"/>
+          </a:xfrm>
+          <a:prstGeom prst="roundRect">
+            <a:avLst>
+              <a:gd name="adj" fmla="val 16000"/>
+            </a:avLst>
+          </a:prstGeom>
+          <a:solidFill>
+            <a:srgbClr val="2F7D4F"/>
+          </a:solidFill>
+          <a:ln>
+            <a:solidFill>
+              <a:srgbClr val="2F7D4F"/>
+            </a:solidFill>
+          </a:ln>
+        </p:spPr>
+        <p:txBody>
+          <a:bodyPr wrap="square" lIns="0" tIns="0" rIns="0" bIns="0" rtlCol="0" anchor="ctr"/>
+          <a:lstStyle/>
+          <a:p>
+            <a:pPr algn="ctr" indent="0" marL="0">
+              <a:buNone/>
+            </a:pPr>
+            <a:r>
+              <a:rPr lang="en-US" sz="1700" b="1" dirty="0">
+                <a:solidFill>
+                  <a:srgbClr val="FFFFFF"/>
+                </a:solidFill>
+                <a:latin typeface="Calibri" pitchFamily="34" charset="0"/>
+                <a:ea typeface="Calibri" pitchFamily="34" charset="-122"/>
+                <a:cs typeface="Calibri" pitchFamily="34" charset="-120"/>
+              </a:rPr>
+              <a:t>1</a:t>
+            </a:r>
+            <a:endParaRPr lang="en-US" sz="1700" dirty="0"/>
+          </a:p>
+        </p:txBody>
+      </p:sp>
+      <p:sp>
+        <p:nvSpPr>
+          <p:cNvPr id="4" name="Text 2"/>
+          <p:cNvSpPr txBox="1"/>
+          <p:nvPr/>
+        </p:nvSpPr>
+        <p:spPr>
+          <a:xfrm>
+            <a:off x="1280160" y="1463040"/>
+            <a:ext cx="10362895" cy="493776"/>
+          </a:xfrm>
+          <a:prstGeom prst="rect">
+            <a:avLst/>
+          </a:prstGeom>
+          <a:noFill/>
+          <a:ln/>
+        </p:spPr>
+        <p:txBody>
+          <a:bodyPr wrap="square" lIns="0" tIns="0" rIns="0" bIns="0" rtlCol="0" anchor="ctr"/>
+          <a:lstStyle/>
+          <a:p>
+            <a:pPr indent="0" marL="0">
+              <a:buNone/>
+            </a:pPr>
+            <a:r>
+              <a:rPr lang="en-US" sz="2500" dirty="0">
+                <a:solidFill>
+                  <a:srgbClr val="1B2530"/>
+                </a:solidFill>
+                <a:latin typeface="Calibri" pitchFamily="34" charset="0"/>
+                <a:ea typeface="Calibri" pitchFamily="34" charset="-122"/>
+                <a:cs typeface="Calibri" pitchFamily="34" charset="-120"/>
+              </a:rPr>
+              <a:t>Sounds that mean something</a:t>
+            </a:r>
+            <a:endParaRPr lang="en-US" sz="2500" dirty="0"/>
+          </a:p>
+        </p:txBody>
+      </p:sp>
+      <p:sp>
+        <p:nvSpPr>
+          <p:cNvPr id="5" name="Text 3"/>
+          <p:cNvSpPr txBox="1"/>
+          <p:nvPr/>
+        </p:nvSpPr>
+        <p:spPr>
+          <a:xfrm>
+            <a:off x="548640" y="2301240"/>
+            <a:ext cx="457200" cy="457200"/>
+          </a:xfrm>
+          <a:prstGeom prst="roundRect">
+            <a:avLst>
+              <a:gd name="adj" fmla="val 16000"/>
+            </a:avLst>
+          </a:prstGeom>
+          <a:solidFill>
+            <a:srgbClr val="2F7D4F"/>
+          </a:solidFill>
+          <a:ln>
+            <a:solidFill>
+              <a:srgbClr val="2F7D4F"/>
+            </a:solidFill>
+          </a:ln>
+        </p:spPr>
+        <p:txBody>
+          <a:bodyPr wrap="square" lIns="0" tIns="0" rIns="0" bIns="0" rtlCol="0" anchor="ctr"/>
+          <a:lstStyle/>
+          <a:p>
+            <a:pPr algn="ctr" indent="0" marL="0">
+              <a:buNone/>
+            </a:pPr>
+            <a:r>
+              <a:rPr lang="en-US" sz="1700" b="1" dirty="0">
+                <a:solidFill>
+                  <a:srgbClr val="FFFFFF"/>
+                </a:solidFill>
+                <a:latin typeface="Calibri" pitchFamily="34" charset="0"/>
+                <a:ea typeface="Calibri" pitchFamily="34" charset="-122"/>
+                <a:cs typeface="Calibri" pitchFamily="34" charset="-120"/>
+              </a:rPr>
+              <a:t>2</a:t>
+            </a:r>
+            <a:endParaRPr lang="en-US" sz="1700" dirty="0"/>
+          </a:p>
+        </p:txBody>
+      </p:sp>
+      <p:sp>
+        <p:nvSpPr>
+          <p:cNvPr id="6" name="Text 4"/>
+          <p:cNvSpPr txBox="1"/>
+          <p:nvPr/>
+        </p:nvSpPr>
+        <p:spPr>
+          <a:xfrm>
+            <a:off x="1280160" y="2282952"/>
+            <a:ext cx="10362895" cy="493776"/>
+          </a:xfrm>
+          <a:prstGeom prst="rect">
+            <a:avLst/>
+          </a:prstGeom>
+          <a:noFill/>
+          <a:ln/>
+        </p:spPr>
+        <p:txBody>
+          <a:bodyPr wrap="square" lIns="0" tIns="0" rIns="0" bIns="0" rtlCol="0" anchor="ctr"/>
+          <a:lstStyle/>
+          <a:p>
+            <a:pPr indent="0" marL="0">
+              <a:buNone/>
+            </a:pPr>
+            <a:r>
+              <a:rPr lang="en-US" sz="2500" dirty="0">
+                <a:solidFill>
+                  <a:srgbClr val="1B2530"/>
+                </a:solidFill>
+                <a:latin typeface="Calibri" pitchFamily="34" charset="0"/>
+                <a:ea typeface="Calibri" pitchFamily="34" charset="-122"/>
+                <a:cs typeface="Calibri" pitchFamily="34" charset="-120"/>
+              </a:rPr>
+              <a:t>A musical instrument</a:t>
+            </a:r>
+            <a:endParaRPr lang="en-US" sz="2500" dirty="0"/>
+          </a:p>
+        </p:txBody>
+      </p:sp>
+      <p:sp>
+        <p:nvSpPr>
+          <p:cNvPr id="7" name="Text 5"/>
+          <p:cNvSpPr txBox="1"/>
+          <p:nvPr/>
+        </p:nvSpPr>
+        <p:spPr>
+          <a:xfrm>
+            <a:off x="548640" y="3121152"/>
+            <a:ext cx="457200" cy="457200"/>
+          </a:xfrm>
+          <a:prstGeom prst="roundRect">
+            <a:avLst>
+              <a:gd name="adj" fmla="val 16000"/>
+            </a:avLst>
+          </a:prstGeom>
+          <a:solidFill>
+            <a:srgbClr val="2F7D4F"/>
+          </a:solidFill>
+          <a:ln>
+            <a:solidFill>
+              <a:srgbClr val="2F7D4F"/>
+            </a:solidFill>
+          </a:ln>
+        </p:spPr>
+        <p:txBody>
+          <a:bodyPr wrap="square" lIns="0" tIns="0" rIns="0" bIns="0" rtlCol="0" anchor="ctr"/>
+          <a:lstStyle/>
+          <a:p>
+            <a:pPr algn="ctr" indent="0" marL="0">
+              <a:buNone/>
+            </a:pPr>
+            <a:r>
+              <a:rPr lang="en-US" sz="1700" b="1" dirty="0">
+                <a:solidFill>
+                  <a:srgbClr val="FFFFFF"/>
+                </a:solidFill>
+                <a:latin typeface="Calibri" pitchFamily="34" charset="0"/>
+                <a:ea typeface="Calibri" pitchFamily="34" charset="-122"/>
+                <a:cs typeface="Calibri" pitchFamily="34" charset="-120"/>
+              </a:rPr>
+              <a:t>3</a:t>
+            </a:r>
+            <a:endParaRPr lang="en-US" sz="1700" dirty="0"/>
+          </a:p>
+        </p:txBody>
+      </p:sp>
+      <p:sp>
+        <p:nvSpPr>
+          <p:cNvPr id="8" name="Text 6"/>
+          <p:cNvSpPr txBox="1"/>
+          <p:nvPr/>
+        </p:nvSpPr>
+        <p:spPr>
+          <a:xfrm>
+            <a:off x="1280160" y="3102864"/>
+            <a:ext cx="10362895" cy="493776"/>
+          </a:xfrm>
+          <a:prstGeom prst="rect">
+            <a:avLst/>
+          </a:prstGeom>
+          <a:noFill/>
+          <a:ln/>
+        </p:spPr>
+        <p:txBody>
+          <a:bodyPr wrap="square" lIns="0" tIns="0" rIns="0" bIns="0" rtlCol="0" anchor="ctr"/>
+          <a:lstStyle/>
+          <a:p>
+            <a:pPr indent="0" marL="0">
+              <a:buNone/>
+            </a:pPr>
+            <a:r>
+              <a:rPr lang="en-US" sz="2500" dirty="0">
+                <a:solidFill>
+                  <a:srgbClr val="1B2530"/>
+                </a:solidFill>
+                <a:latin typeface="Calibri" pitchFamily="34" charset="0"/>
+                <a:ea typeface="Calibri" pitchFamily="34" charset="-122"/>
+                <a:cs typeface="Calibri" pitchFamily="34" charset="-120"/>
+              </a:rPr>
+              <a:t>Your own sprite</a:t>
+            </a:r>
+            <a:endParaRPr lang="en-US" sz="2500" dirty="0"/>
+          </a:p>
+        </p:txBody>
+      </p:sp>
+      <p:sp>
+        <p:nvSpPr>
+          <p:cNvPr id="9" name="Text 7"/>
+          <p:cNvSpPr txBox="1"/>
+          <p:nvPr/>
+        </p:nvSpPr>
+        <p:spPr>
+          <a:xfrm>
+            <a:off x="548640" y="3941064"/>
+            <a:ext cx="457200" cy="457200"/>
+          </a:xfrm>
+          <a:prstGeom prst="roundRect">
+            <a:avLst>
+              <a:gd name="adj" fmla="val 16000"/>
+            </a:avLst>
+          </a:prstGeom>
+          <a:solidFill>
+            <a:srgbClr val="2F7D4F"/>
+          </a:solidFill>
+          <a:ln>
+            <a:solidFill>
+              <a:srgbClr val="2F7D4F"/>
+            </a:solidFill>
+          </a:ln>
+        </p:spPr>
+        <p:txBody>
+          <a:bodyPr wrap="square" lIns="0" tIns="0" rIns="0" bIns="0" rtlCol="0" anchor="ctr"/>
+          <a:lstStyle/>
+          <a:p>
+            <a:pPr algn="ctr" indent="0" marL="0">
+              <a:buNone/>
+            </a:pPr>
+            <a:r>
+              <a:rPr lang="en-US" sz="1700" b="1" dirty="0">
+                <a:solidFill>
+                  <a:srgbClr val="FFFFFF"/>
+                </a:solidFill>
+                <a:latin typeface="Calibri" pitchFamily="34" charset="0"/>
+                <a:ea typeface="Calibri" pitchFamily="34" charset="-122"/>
+                <a:cs typeface="Calibri" pitchFamily="34" charset="-120"/>
+              </a:rPr>
+              <a:t>4</a:t>
+            </a:r>
+            <a:endParaRPr lang="en-US" sz="1700" dirty="0"/>
+          </a:p>
+        </p:txBody>
+      </p:sp>
+      <p:sp>
+        <p:nvSpPr>
+          <p:cNvPr id="10" name="Text 8"/>
+          <p:cNvSpPr txBox="1"/>
+          <p:nvPr/>
+        </p:nvSpPr>
+        <p:spPr>
+          <a:xfrm>
+            <a:off x="1280160" y="3922776"/>
+            <a:ext cx="10362895" cy="493776"/>
+          </a:xfrm>
+          <a:prstGeom prst="rect">
+            <a:avLst/>
+          </a:prstGeom>
+          <a:noFill/>
+          <a:ln/>
+        </p:spPr>
+        <p:txBody>
+          <a:bodyPr wrap="square" lIns="0" tIns="0" rIns="0" bIns="0" rtlCol="0" anchor="ctr"/>
+          <a:lstStyle/>
+          <a:p>
+            <a:pPr indent="0" marL="0">
+              <a:buNone/>
+            </a:pPr>
+            <a:r>
+              <a:rPr lang="en-US" sz="2500" dirty="0">
+                <a:solidFill>
+                  <a:srgbClr val="1B2530"/>
+                </a:solidFill>
+                <a:latin typeface="Calibri" pitchFamily="34" charset="0"/>
+                <a:ea typeface="Calibri" pitchFamily="34" charset="-122"/>
+                <a:cs typeface="Calibri" pitchFamily="34" charset="-120"/>
+              </a:rPr>
+              <a:t>You read real C</a:t>
+            </a:r>
+            <a:endParaRPr lang="en-US" sz="2500" dirty="0"/>
+          </a:p>
+        </p:txBody>
+      </p:sp>
+      <p:sp>
+        <p:nvSpPr>
+          <p:cNvPr id="11" name="Text 9"/>
+          <p:cNvSpPr txBox="1"/>
+          <p:nvPr/>
+        </p:nvSpPr>
+        <p:spPr>
+          <a:xfrm>
+            <a:off x="548640" y="4760976"/>
+            <a:ext cx="457200" cy="457200"/>
+          </a:xfrm>
+          <a:prstGeom prst="roundRect">
+            <a:avLst>
+              <a:gd name="adj" fmla="val 16000"/>
+            </a:avLst>
+          </a:prstGeom>
+          <a:solidFill>
+            <a:srgbClr val="2F7D4F"/>
+          </a:solidFill>
+          <a:ln>
+            <a:solidFill>
+              <a:srgbClr val="2F7D4F"/>
+            </a:solidFill>
+          </a:ln>
+        </p:spPr>
+        <p:txBody>
+          <a:bodyPr wrap="square" lIns="0" tIns="0" rIns="0" bIns="0" rtlCol="0" anchor="ctr"/>
+          <a:lstStyle/>
+          <a:p>
+            <a:pPr algn="ctr" indent="0" marL="0">
+              <a:buNone/>
+            </a:pPr>
+            <a:r>
+              <a:rPr lang="en-US" sz="1700" b="1" dirty="0">
+                <a:solidFill>
+                  <a:srgbClr val="FFFFFF"/>
+                </a:solidFill>
+                <a:latin typeface="Calibri" pitchFamily="34" charset="0"/>
+                <a:ea typeface="Calibri" pitchFamily="34" charset="-122"/>
+                <a:cs typeface="Calibri" pitchFamily="34" charset="-120"/>
+              </a:rPr>
+              <a:t>5</a:t>
+            </a:r>
+            <a:endParaRPr lang="en-US" sz="1700" dirty="0"/>
+          </a:p>
+        </p:txBody>
+      </p:sp>
+      <p:sp>
+        <p:nvSpPr>
+          <p:cNvPr id="12" name="Text 10"/>
+          <p:cNvSpPr txBox="1"/>
+          <p:nvPr/>
+        </p:nvSpPr>
+        <p:spPr>
+          <a:xfrm>
+            <a:off x="1280160" y="4742688"/>
+            <a:ext cx="10362895" cy="493776"/>
+          </a:xfrm>
+          <a:prstGeom prst="rect">
+            <a:avLst/>
+          </a:prstGeom>
+          <a:noFill/>
+          <a:ln/>
+        </p:spPr>
+        <p:txBody>
+          <a:bodyPr wrap="square" lIns="0" tIns="0" rIns="0" bIns="0" rtlCol="0" anchor="ctr"/>
+          <a:lstStyle/>
+          <a:p>
+            <a:pPr indent="0" marL="0">
+              <a:buNone/>
+            </a:pPr>
+            <a:r>
+              <a:rPr lang="en-US" sz="2500" dirty="0">
+                <a:solidFill>
+                  <a:srgbClr val="1B2530"/>
+                </a:solidFill>
+                <a:latin typeface="Calibri" pitchFamily="34" charset="0"/>
+                <a:ea typeface="Calibri" pitchFamily="34" charset="-122"/>
+                <a:cs typeface="Calibri" pitchFamily="34" charset="-120"/>
+              </a:rPr>
+              <a:t>A cartridge with your game</a:t>
+            </a:r>
+            <a:endParaRPr lang="en-US" sz="2500" dirty="0"/>
+          </a:p>
+        </p:txBody>
+      </p:sp>
+      <p:sp>
+        <p:nvSpPr>
+          <p:cNvPr id="13" name="Text 11"/>
+          <p:cNvSpPr txBox="1"/>
+          <p:nvPr/>
+        </p:nvSpPr>
+        <p:spPr>
+          <a:xfrm>
+            <a:off x="548640" y="5580888"/>
+            <a:ext cx="457200" cy="457200"/>
+          </a:xfrm>
+          <a:prstGeom prst="roundRect">
+            <a:avLst>
+              <a:gd name="adj" fmla="val 16000"/>
+            </a:avLst>
+          </a:prstGeom>
+          <a:solidFill>
+            <a:srgbClr val="2F7D4F"/>
+          </a:solidFill>
+          <a:ln>
+            <a:solidFill>
+              <a:srgbClr val="2F7D4F"/>
+            </a:solidFill>
+          </a:ln>
+        </p:spPr>
+        <p:txBody>
+          <a:bodyPr wrap="square" lIns="0" tIns="0" rIns="0" bIns="0" rtlCol="0" anchor="ctr"/>
+          <a:lstStyle/>
+          <a:p>
+            <a:pPr algn="ctr" indent="0" marL="0">
+              <a:buNone/>
+            </a:pPr>
+            <a:r>
+              <a:rPr lang="en-US" sz="1700" b="1" dirty="0">
+                <a:solidFill>
+                  <a:srgbClr val="FFFFFF"/>
+                </a:solidFill>
+                <a:latin typeface="Calibri" pitchFamily="34" charset="0"/>
+                <a:ea typeface="Calibri" pitchFamily="34" charset="-122"/>
+                <a:cs typeface="Calibri" pitchFamily="34" charset="-120"/>
+              </a:rPr>
+              <a:t>6</a:t>
+            </a:r>
+            <a:endParaRPr lang="en-US" sz="1700" dirty="0"/>
+          </a:p>
+        </p:txBody>
+      </p:sp>
+      <p:sp>
+        <p:nvSpPr>
+          <p:cNvPr id="14" name="Text 12"/>
+          <p:cNvSpPr txBox="1"/>
+          <p:nvPr/>
+        </p:nvSpPr>
+        <p:spPr>
+          <a:xfrm>
+            <a:off x="1280160" y="5562600"/>
+            <a:ext cx="10362895" cy="493776"/>
+          </a:xfrm>
+          <a:prstGeom prst="rect">
+            <a:avLst/>
+          </a:prstGeom>
+          <a:noFill/>
+          <a:ln/>
+        </p:spPr>
+        <p:txBody>
+          <a:bodyPr wrap="square" lIns="0" tIns="0" rIns="0" bIns="0" rtlCol="0" anchor="ctr"/>
+          <a:lstStyle/>
+          <a:p>
+            <a:pPr indent="0" marL="0">
+              <a:buNone/>
+            </a:pPr>
+            <a:r>
+              <a:rPr lang="en-US" sz="2500" dirty="0">
+                <a:solidFill>
+                  <a:srgbClr val="1B2530"/>
+                </a:solidFill>
+                <a:latin typeface="Calibri" pitchFamily="34" charset="0"/>
+                <a:ea typeface="Calibri" pitchFamily="34" charset="-122"/>
+                <a:cs typeface="Calibri" pitchFamily="34" charset="-120"/>
+              </a:rPr>
+              <a:t>You shared it safely</a:t>
+            </a:r>
+            <a:endParaRPr lang="en-US" sz="2500" dirty="0"/>
+          </a:p>
+        </p:txBody>
+      </p:sp>
+      <p:sp>
+        <p:nvSpPr>
+          <p:cNvPr id="25" name="Slide Number Placeholder 0"/>
+          <p:cNvSpPr>
+            <a:spLocks noGrp="1"/>
+          </p:cNvSpPr>
+          <p:nvPr>
+            <p:ph type="sldNum" sz="quarter" idx="4294967295"/>
+          </p:nvPr>
+        </p:nvSpPr>
+        <p:spPr>
+          <a:xfrm>
+            <a:off x="11002975" y="6419088"/>
+            <a:ext cx="640080" cy="274320"/>
+          </a:xfrm>
+          <a:prstGeom prst="rect">
+            <a:avLst/>
+          </a:prstGeom>
+          <a:extLst>
+            <a:ext uri="{C572A759-6A51-4108-AA02-DFA0A04FC94B}">
+              <ma14:wrappingTextBoxFlag xmlns:ma14="http://schemas.microsoft.com/office/mac/drawingml/2011/main" val="0"/>
+            </a:ext>
+          </a:extLst>
+        </p:spPr>
+        <p:txBody>
+          <a:bodyPr/>
+          <a:lstStyle>
+            <a:lvl1pPr>
+              <a:defRPr sz="1000">
+                <a:solidFill>
+                  <a:srgbClr val="5B6B78"/>
+                </a:solidFill>
+                <a:latin typeface="Calibri"/>
+                <a:ea typeface="Calibri"/>
+                <a:cs typeface="Calibri"/>
+              </a:defRPr>
+            </a:lvl1pPr>
+          </a:lstStyle>
+          <a:p>
+            <a:pPr algn="r"/>
+            <a:fld id="{F7021451-1387-4CA6-816F-3879F97B5CBC}" type="slidenum">
+              <a:rPr b="0" lang="en-US"/>
+              <a:t>30</a:t>
+            </a:fld>
+            <a:endParaRPr lang="en-US"/>
+          </a:p>
+        </p:txBody>
+      </p:sp>
+    </p:spTree>
+  </p:cSld>
+  <p:clrMapOvr>
+    <a:masterClrMapping/>
+  </p:clrMapOvr>
+</p:sld>
+</file>
+
+<file path=ppt/slides/slide31.xml><?xml version="1.0" encoding="utf-8"?>
+<p:sld xmlns:a="http://schemas.openxmlformats.org/drawingml/2006/main" xmlns:r="http://schemas.openxmlformats.org/officeDocument/2006/relationships" xmlns:p="http://schemas.openxmlformats.org/presentationml/2006/main">
+  <p:cSld name="Slide 31">
+    <p:spTree>
+      <p:nvGrpSpPr>
+        <p:cNvPr id="1" name=""/>
+        <p:cNvGrpSpPr/>
+        <p:nvPr/>
+      </p:nvGrpSpPr>
+      <p:grpSpPr>
+        <a:xfrm>
+          <a:off x="0" y="0"/>
+          <a:ext cx="0" cy="0"/>
+          <a:chOff x="0" y="0"/>
+          <a:chExt cx="0" cy="0"/>
+        </a:xfrm>
+      </p:grpSpPr>
+      <p:sp>
+        <p:nvSpPr>
+          <p:cNvPr id="2" name="Text 1"/>
+          <p:cNvSpPr/>
+          <p:nvPr>
+            <p:ph idx="101" type="title" hasCustomPrompt="1"/>
+          </p:nvPr>
+        </p:nvSpPr>
+        <p:spPr>
+          <a:xfrm>
+            <a:off x="548640" y="384048"/>
+            <a:ext cx="11094415" cy="868680"/>
+          </a:xfrm>
+          <a:prstGeom prst="rect">
+            <a:avLst/>
+          </a:prstGeom>
+          <a:noFill/>
+          <a:ln/>
+        </p:spPr>
+        <p:txBody>
+          <a:bodyPr wrap="square" lIns="0" tIns="0" rIns="0" bIns="0" rtlCol="0" anchor="ctr"/>
+          <a:lstStyle/>
+          <a:p>
+            <a:pPr algn="l" indent="0" marL="0">
+              <a:buNone/>
+            </a:pPr>
+            <a:r>
+              <a:rPr lang="en-US" sz="3000" b="1" dirty="0">
+                <a:solidFill>
+                  <a:srgbClr val="2E4A62"/>
+                </a:solidFill>
+                <a:latin typeface="Cambria" pitchFamily="34" charset="0"/>
+                <a:ea typeface="Cambria" pitchFamily="34" charset="-122"/>
+                <a:cs typeface="Cambria" pitchFamily="34" charset="-120"/>
+              </a:rPr>
               <a:t>Next time, and for grown-ups</a:t>
             </a:r>
             <a:endParaRPr lang="en-US" sz="3000" dirty="0"/>
@@ -16995,7 +17262,7 @@
             <a:pPr algn="r"/>
             <a:fld id="{F7021451-1387-4CA6-816F-3879F97B5CBC}" type="slidenum">
               <a:rPr b="0" lang="en-US"/>
-              <a:t>30</a:t>
+              <a:t>31</a:t>
             </a:fld>
             <a:endParaRPr lang="en-US"/>
           </a:p>
@@ -18798,12 +19065,12 @@
         </p:nvSpPr>
         <p:spPr>
           <a:xfrm>
-            <a:off x="8092440" y="2834640"/>
-            <a:ext cx="3550615" cy="3383280"/>
+            <a:off x="8092440" y="2788920"/>
+            <a:ext cx="3550615" cy="3429000"/>
           </a:xfrm>
           <a:prstGeom prst="roundRect">
             <a:avLst>
-              <a:gd name="adj" fmla="val 2162"/>
+              <a:gd name="adj" fmla="val 2133"/>
             </a:avLst>
           </a:prstGeom>
           <a:solidFill>
@@ -18825,8 +19092,8 @@
         </p:nvSpPr>
         <p:spPr>
           <a:xfrm>
-            <a:off x="8321040" y="2971800"/>
-            <a:ext cx="3093415" cy="365760"/>
+            <a:off x="8321040" y="2880360"/>
+            <a:ext cx="3093415" cy="310896"/>
           </a:xfrm>
           <a:prstGeom prst="rect">
             <a:avLst/>
@@ -18842,7 +19109,7 @@
               <a:buNone/>
             </a:pPr>
             <a:r>
-              <a:rPr lang="en-US" sz="1500" b="1" dirty="0">
+              <a:rPr lang="en-US" sz="1400" b="1" dirty="0">
                 <a:solidFill>
                   <a:srgbClr val="2F7D4F"/>
                 </a:solidFill>
@@ -18852,7 +19119,7 @@
               </a:rPr>
               <a:t>You should see</a:t>
             </a:r>
-            <a:endParaRPr lang="en-US" sz="1500" dirty="0"/>
+            <a:endParaRPr lang="en-US" sz="1400" dirty="0"/>
           </a:p>
         </p:txBody>
       </p:sp>
@@ -18864,8 +19131,8 @@
         </p:nvSpPr>
         <p:spPr>
           <a:xfrm>
-            <a:off x="8321040" y="3429000"/>
-            <a:ext cx="3093415" cy="2606040"/>
+            <a:off x="8321040" y="3246120"/>
+            <a:ext cx="3093415" cy="2862072"/>
           </a:xfrm>
           <a:prstGeom prst="rect">
             <a:avLst/>
@@ -19380,12 +19647,12 @@
         </p:nvSpPr>
         <p:spPr>
           <a:xfrm>
-            <a:off x="8092440" y="2834640"/>
-            <a:ext cx="3550615" cy="3383280"/>
+            <a:off x="8092440" y="2788920"/>
+            <a:ext cx="3550615" cy="3429000"/>
           </a:xfrm>
           <a:prstGeom prst="roundRect">
             <a:avLst>
-              <a:gd name="adj" fmla="val 2162"/>
+              <a:gd name="adj" fmla="val 2133"/>
             </a:avLst>
           </a:prstGeom>
           <a:solidFill>
@@ -19407,8 +19674,8 @@
         </p:nvSpPr>
         <p:spPr>
           <a:xfrm>
-            <a:off x="8321040" y="2971800"/>
-            <a:ext cx="3093415" cy="365760"/>
+            <a:off x="8321040" y="2880360"/>
+            <a:ext cx="3093415" cy="310896"/>
           </a:xfrm>
           <a:prstGeom prst="rect">
             <a:avLst/>
@@ -19424,7 +19691,7 @@
               <a:buNone/>
             </a:pPr>
             <a:r>
-              <a:rPr lang="en-US" sz="1500" b="1" dirty="0">
+              <a:rPr lang="en-US" sz="1400" b="1" dirty="0">
                 <a:solidFill>
                   <a:srgbClr val="2F7D4F"/>
                 </a:solidFill>
@@ -19434,7 +19701,7 @@
               </a:rPr>
               <a:t>You should see</a:t>
             </a:r>
-            <a:endParaRPr lang="en-US" sz="1500" dirty="0"/>
+            <a:endParaRPr lang="en-US" sz="1400" dirty="0"/>
           </a:p>
         </p:txBody>
       </p:sp>
@@ -19446,8 +19713,8 @@
         </p:nvSpPr>
         <p:spPr>
           <a:xfrm>
-            <a:off x="8321040" y="3429000"/>
-            <a:ext cx="3093415" cy="2606040"/>
+            <a:off x="8321040" y="3246120"/>
+            <a:ext cx="3093415" cy="2862072"/>
           </a:xfrm>
           <a:prstGeom prst="rect">
             <a:avLst/>
@@ -19962,12 +20229,12 @@
         </p:nvSpPr>
         <p:spPr>
           <a:xfrm>
-            <a:off x="8092440" y="2834640"/>
-            <a:ext cx="3550615" cy="3383280"/>
+            <a:off x="8092440" y="2788920"/>
+            <a:ext cx="3550615" cy="3429000"/>
           </a:xfrm>
           <a:prstGeom prst="roundRect">
             <a:avLst>
-              <a:gd name="adj" fmla="val 2162"/>
+              <a:gd name="adj" fmla="val 2133"/>
             </a:avLst>
           </a:prstGeom>
           <a:solidFill>
@@ -19989,8 +20256,8 @@
         </p:nvSpPr>
         <p:spPr>
           <a:xfrm>
-            <a:off x="8321040" y="2971800"/>
-            <a:ext cx="3093415" cy="365760"/>
+            <a:off x="8321040" y="2880360"/>
+            <a:ext cx="3093415" cy="310896"/>
           </a:xfrm>
           <a:prstGeom prst="rect">
             <a:avLst/>
@@ -20006,7 +20273,7 @@
               <a:buNone/>
             </a:pPr>
             <a:r>
-              <a:rPr lang="en-US" sz="1500" b="1" dirty="0">
+              <a:rPr lang="en-US" sz="1400" b="1" dirty="0">
                 <a:solidFill>
                   <a:srgbClr val="2F7D4F"/>
                 </a:solidFill>
@@ -20016,7 +20283,7 @@
               </a:rPr>
               <a:t>You should see</a:t>
             </a:r>
-            <a:endParaRPr lang="en-US" sz="1500" dirty="0"/>
+            <a:endParaRPr lang="en-US" sz="1400" dirty="0"/>
           </a:p>
         </p:txBody>
       </p:sp>
@@ -20028,8 +20295,8 @@
         </p:nvSpPr>
         <p:spPr>
           <a:xfrm>
-            <a:off x="8321040" y="3429000"/>
-            <a:ext cx="3093415" cy="2606040"/>
+            <a:off x="8321040" y="3246120"/>
+            <a:ext cx="3093415" cy="2862072"/>
           </a:xfrm>
           <a:prstGeom prst="rect">
             <a:avLst/>

--- a/presentations/14-kids-sound-and-share/14-kids-sound-and-share-lab.pptx
+++ b/presentations/14-kids-sound-and-share/14-kids-sound-and-share-lab.pptx
@@ -137,7 +137,7 @@
   <p:extLst>
     <p:ext uri="{521415D9-36F7-43E2-AB2F-B90AF26B5E84}">
       <p14:sectionLst xmlns:p14="http://schemas.microsoft.com/office/powerpoint/2010/main">
-        <p14:section name="Opening" id="{e0462330-72d4-128f-2f3c-f4af6f6a25d7}">
+        <p14:section name="Opening" id="{9ecaa782-a36a-f5bd-6123-67425f9113f5}">
           <p14:sldIdLst>
             <p14:sldId id="256"/>
             <p14:sldId id="257"/>
@@ -145,7 +145,7 @@
             <p14:sldId id="259"/>
           </p14:sldIdLst>
         </p14:section>
-        <p14:section name="Mission 4" id="{d8aa0ff5-4975-ff63-96fd-05e45fd03584}">
+        <p14:section name="Mission 4" id="{d1c9abec-cbde-5452-9cf1-6c7e7d96a17c}">
           <p14:sldIdLst>
             <p14:sldId id="260"/>
             <p14:sldId id="261"/>
@@ -154,7 +154,7 @@
             <p14:sldId id="264"/>
           </p14:sldIdLst>
         </p14:section>
-        <p14:section name="The Music Pad" id="{ba191fe7-09c6-b6cf-e209-6a64035599cf}">
+        <p14:section name="The Music Pad" id="{fc306685-78a3-f758-6dea-89dc4a209130}">
           <p14:sldIdLst>
             <p14:sldId id="265"/>
             <p14:sldId id="266"/>
@@ -167,21 +167,21 @@
             <p14:sldId id="273"/>
           </p14:sldIdLst>
         </p14:section>
-        <p14:section name="Sprite Lab" id="{6de503a2-72c9-3f77-2dcc-888abd6eb306}">
+        <p14:section name="Sprite Lab" id="{9c03b1b4-333e-f9f8-3f33-2865527c07f3}">
           <p14:sldIdLst>
             <p14:sldId id="274"/>
             <p14:sldId id="275"/>
             <p14:sldId id="276"/>
           </p14:sldIdLst>
         </p14:section>
-        <p14:section name="Peek at the C" id="{69cbf986-9f12-b6a8-1942-8d102ff8b259}">
+        <p14:section name="Peek at the C" id="{be210be6-edb6-c4f2-afc0-354aa1310082}">
           <p14:sldIdLst>
             <p14:sldId id="277"/>
             <p14:sldId id="278"/>
             <p14:sldId id="279"/>
           </p14:sldIdLst>
         </p14:section>
-        <p14:section name="Mission 5" id="{3798cfde-cd42-55e9-3b9d-80773bc28563}">
+        <p14:section name="Mission 5" id="{a21d6c43-7392-d39b-ddaa-3c9ca8ce89f9}">
           <p14:sldIdLst>
             <p14:sldId id="280"/>
             <p14:sldId id="281"/>
@@ -191,7 +191,7 @@
             <p14:sldId id="285"/>
           </p14:sldIdLst>
         </p14:section>
-        <p14:section name="Closing" id="{b5a3a44b-146e-4e8d-6ce2-d4f18f73e269}">
+        <p14:section name="Closing" id="{a7f74db1-1b33-82e8-6125-7392428e131e}">
           <p14:sldIdLst>
             <p14:sldId id="286"/>
           </p14:sldIdLst>
@@ -5070,7 +5070,7 @@
           </a:ln>
         </p:spPr>
         <p:txBody>
-          <a:bodyPr wrap="square" lIns="0" tIns="127000" rIns="101600" bIns="0" rtlCol="0" anchor="ctr"/>
+          <a:bodyPr wrap="square" lIns="88900" tIns="88900" rIns="88900" bIns="88900" rtlCol="0" anchor="ctr"/>
           <a:lstStyle/>
           <a:p>
             <a:pPr algn="l" indent="0" marL="0">
@@ -5117,7 +5117,7 @@
           </a:ln>
         </p:spPr>
         <p:txBody>
-          <a:bodyPr wrap="square" lIns="0" tIns="127000" rIns="101600" bIns="0" rtlCol="0" anchor="ctr"/>
+          <a:bodyPr wrap="square" lIns="88900" tIns="88900" rIns="88900" bIns="88900" rtlCol="0" anchor="ctr"/>
           <a:lstStyle/>
           <a:p>
             <a:pPr algn="l" indent="0" marL="0">
@@ -5164,7 +5164,7 @@
           </a:ln>
         </p:spPr>
         <p:txBody>
-          <a:bodyPr wrap="square" lIns="0" tIns="127000" rIns="101600" bIns="0" rtlCol="0" anchor="ctr"/>
+          <a:bodyPr wrap="square" lIns="88900" tIns="88900" rIns="88900" bIns="88900" rtlCol="0" anchor="ctr"/>
           <a:lstStyle/>
           <a:p>
             <a:pPr algn="l" indent="0" marL="0">
@@ -5211,7 +5211,7 @@
           </a:ln>
         </p:spPr>
         <p:txBody>
-          <a:bodyPr wrap="square" lIns="0" tIns="127000" rIns="101600" bIns="0" rtlCol="0" anchor="ctr"/>
+          <a:bodyPr wrap="square" lIns="88900" tIns="88900" rIns="88900" bIns="88900" rtlCol="0" anchor="ctr"/>
           <a:lstStyle/>
           <a:p>
             <a:pPr algn="l" indent="0" marL="0">
@@ -5258,7 +5258,7 @@
           </a:ln>
         </p:spPr>
         <p:txBody>
-          <a:bodyPr wrap="square" lIns="0" tIns="127000" rIns="101600" bIns="0" rtlCol="0" anchor="ctr"/>
+          <a:bodyPr wrap="square" lIns="88900" tIns="88900" rIns="88900" bIns="88900" rtlCol="0" anchor="ctr"/>
           <a:lstStyle/>
           <a:p>
             <a:pPr algn="l" indent="0" marL="0">
@@ -5305,7 +5305,7 @@
           </a:ln>
         </p:spPr>
         <p:txBody>
-          <a:bodyPr wrap="square" lIns="0" tIns="127000" rIns="101600" bIns="0" rtlCol="0" anchor="ctr"/>
+          <a:bodyPr wrap="square" lIns="88900" tIns="88900" rIns="88900" bIns="88900" rtlCol="0" anchor="ctr"/>
           <a:lstStyle/>
           <a:p>
             <a:pPr algn="l" indent="0" marL="0">
@@ -5352,7 +5352,7 @@
           </a:ln>
         </p:spPr>
         <p:txBody>
-          <a:bodyPr wrap="square" lIns="0" tIns="127000" rIns="101600" bIns="0" rtlCol="0" anchor="ctr"/>
+          <a:bodyPr wrap="square" lIns="88900" tIns="88900" rIns="88900" bIns="88900" rtlCol="0" anchor="ctr"/>
           <a:lstStyle/>
           <a:p>
             <a:pPr algn="l" indent="0" marL="0">
@@ -6294,7 +6294,7 @@
           </a:ln>
         </p:spPr>
         <p:txBody>
-          <a:bodyPr wrap="square" lIns="0" tIns="127000" rIns="101600" bIns="0" rtlCol="0" anchor="ctr"/>
+          <a:bodyPr wrap="square" lIns="88900" tIns="88900" rIns="88900" bIns="88900" rtlCol="0" anchor="ctr"/>
           <a:lstStyle/>
           <a:p>
             <a:pPr algn="l" indent="0" marL="0">
@@ -6341,7 +6341,7 @@
           </a:ln>
         </p:spPr>
         <p:txBody>
-          <a:bodyPr wrap="square" lIns="0" tIns="127000" rIns="101600" bIns="0" rtlCol="0" anchor="ctr"/>
+          <a:bodyPr wrap="square" lIns="88900" tIns="88900" rIns="88900" bIns="88900" rtlCol="0" anchor="ctr"/>
           <a:lstStyle/>
           <a:p>
             <a:pPr algn="l" indent="0" marL="0">
@@ -6388,7 +6388,7 @@
           </a:ln>
         </p:spPr>
         <p:txBody>
-          <a:bodyPr wrap="square" lIns="0" tIns="127000" rIns="101600" bIns="0" rtlCol="0" anchor="ctr"/>
+          <a:bodyPr wrap="square" lIns="88900" tIns="88900" rIns="88900" bIns="88900" rtlCol="0" anchor="ctr"/>
           <a:lstStyle/>
           <a:p>
             <a:pPr algn="l" indent="0" marL="0">
@@ -6435,7 +6435,7 @@
           </a:ln>
         </p:spPr>
         <p:txBody>
-          <a:bodyPr wrap="square" lIns="0" tIns="127000" rIns="101600" bIns="0" rtlCol="0" anchor="ctr"/>
+          <a:bodyPr wrap="square" lIns="88900" tIns="88900" rIns="88900" bIns="88900" rtlCol="0" anchor="ctr"/>
           <a:lstStyle/>
           <a:p>
             <a:pPr algn="l" indent="0" marL="0">
@@ -6482,7 +6482,7 @@
           </a:ln>
         </p:spPr>
         <p:txBody>
-          <a:bodyPr wrap="square" lIns="0" tIns="127000" rIns="101600" bIns="0" rtlCol="0" anchor="ctr"/>
+          <a:bodyPr wrap="square" lIns="88900" tIns="88900" rIns="88900" bIns="88900" rtlCol="0" anchor="ctr"/>
           <a:lstStyle/>
           <a:p>
             <a:pPr algn="l" indent="0" marL="0">
@@ -6529,7 +6529,7 @@
           </a:ln>
         </p:spPr>
         <p:txBody>
-          <a:bodyPr wrap="square" lIns="0" tIns="127000" rIns="101600" bIns="0" rtlCol="0" anchor="ctr"/>
+          <a:bodyPr wrap="square" lIns="88900" tIns="88900" rIns="88900" bIns="88900" rtlCol="0" anchor="ctr"/>
           <a:lstStyle/>
           <a:p>
             <a:pPr algn="l" indent="0" marL="0">
@@ -6576,7 +6576,7 @@
           </a:ln>
         </p:spPr>
         <p:txBody>
-          <a:bodyPr wrap="square" lIns="0" tIns="127000" rIns="101600" bIns="0" rtlCol="0" anchor="ctr"/>
+          <a:bodyPr wrap="square" lIns="88900" tIns="88900" rIns="88900" bIns="88900" rtlCol="0" anchor="ctr"/>
           <a:lstStyle/>
           <a:p>
             <a:pPr algn="l" indent="0" marL="0">
@@ -6623,7 +6623,7 @@
           </a:ln>
         </p:spPr>
         <p:txBody>
-          <a:bodyPr wrap="square" lIns="0" tIns="127000" rIns="101600" bIns="0" rtlCol="0" anchor="ctr"/>
+          <a:bodyPr wrap="square" lIns="88900" tIns="88900" rIns="88900" bIns="88900" rtlCol="0" anchor="ctr"/>
           <a:lstStyle/>
           <a:p>
             <a:pPr algn="l" indent="0" marL="0">
@@ -18035,7 +18035,7 @@
           </a:ln>
         </p:spPr>
         <p:txBody>
-          <a:bodyPr wrap="square" lIns="0" tIns="127000" rIns="101600" bIns="0" rtlCol="0" anchor="ctr"/>
+          <a:bodyPr wrap="square" lIns="88900" tIns="88900" rIns="88900" bIns="88900" rtlCol="0" anchor="ctr"/>
           <a:lstStyle/>
           <a:p>
             <a:pPr algn="l" indent="0" marL="0">
@@ -18082,7 +18082,7 @@
           </a:ln>
         </p:spPr>
         <p:txBody>
-          <a:bodyPr wrap="square" lIns="0" tIns="127000" rIns="101600" bIns="0" rtlCol="0" anchor="ctr"/>
+          <a:bodyPr wrap="square" lIns="88900" tIns="88900" rIns="88900" bIns="88900" rtlCol="0" anchor="ctr"/>
           <a:lstStyle/>
           <a:p>
             <a:pPr algn="l" indent="0" marL="0">
@@ -18129,7 +18129,7 @@
           </a:ln>
         </p:spPr>
         <p:txBody>
-          <a:bodyPr wrap="square" lIns="0" tIns="127000" rIns="101600" bIns="0" rtlCol="0" anchor="ctr"/>
+          <a:bodyPr wrap="square" lIns="88900" tIns="88900" rIns="88900" bIns="88900" rtlCol="0" anchor="ctr"/>
           <a:lstStyle/>
           <a:p>
             <a:pPr algn="l" indent="0" marL="0">
